--- a/doc/other/Plugin.pptx
+++ b/doc/other/Plugin.pptx
@@ -5,22 +5,23 @@
     <p:sldMasterId id="2147483648" r:id="rId1"/>
   </p:sldMasterIdLst>
   <p:handoutMasterIdLst>
-    <p:handoutMasterId r:id="rId15"/>
+    <p:handoutMasterId r:id="rId16"/>
   </p:handoutMasterIdLst>
   <p:sldIdLst>
     <p:sldId id="256" r:id="rId2"/>
     <p:sldId id="265" r:id="rId3"/>
     <p:sldId id="266" r:id="rId4"/>
     <p:sldId id="268" r:id="rId5"/>
-    <p:sldId id="269" r:id="rId6"/>
-    <p:sldId id="270" r:id="rId7"/>
-    <p:sldId id="271" r:id="rId8"/>
-    <p:sldId id="278" r:id="rId9"/>
-    <p:sldId id="272" r:id="rId10"/>
-    <p:sldId id="273" r:id="rId11"/>
-    <p:sldId id="277" r:id="rId12"/>
-    <p:sldId id="274" r:id="rId13"/>
-    <p:sldId id="276" r:id="rId14"/>
+    <p:sldId id="279" r:id="rId6"/>
+    <p:sldId id="269" r:id="rId7"/>
+    <p:sldId id="270" r:id="rId8"/>
+    <p:sldId id="271" r:id="rId9"/>
+    <p:sldId id="278" r:id="rId10"/>
+    <p:sldId id="272" r:id="rId11"/>
+    <p:sldId id="273" r:id="rId12"/>
+    <p:sldId id="277" r:id="rId13"/>
+    <p:sldId id="274" r:id="rId14"/>
+    <p:sldId id="276" r:id="rId15"/>
   </p:sldIdLst>
   <p:sldSz cx="9144000" cy="6858000" type="screen4x3"/>
   <p:notesSz cx="6858000" cy="9144000"/>
@@ -204,7 +205,7 @@
           <a:p>
             <a:fld id="{807E3084-EA0B-40F1-AB9E-F0831A9C9EFC}" type="datetimeFigureOut">
               <a:rPr lang="en-US" smtClean="0"/>
-              <a:t>11/8/2013</a:t>
+              <a:t>11/11/2013</a:t>
             </a:fld>
             <a:endParaRPr lang="en-US"/>
           </a:p>
@@ -468,7 +469,7 @@
           <a:p>
             <a:fld id="{17FEB0A2-9E0E-4885-91D3-6DE54AE15078}" type="datetimeFigureOut">
               <a:rPr lang="en-US" smtClean="0"/>
-              <a:t>11/8/2013</a:t>
+              <a:t>11/11/2013</a:t>
             </a:fld>
             <a:endParaRPr lang="en-US"/>
           </a:p>
@@ -638,7 +639,7 @@
           <a:p>
             <a:fld id="{17FEB0A2-9E0E-4885-91D3-6DE54AE15078}" type="datetimeFigureOut">
               <a:rPr lang="en-US" smtClean="0"/>
-              <a:t>11/8/2013</a:t>
+              <a:t>11/11/2013</a:t>
             </a:fld>
             <a:endParaRPr lang="en-US"/>
           </a:p>
@@ -818,7 +819,7 @@
           <a:p>
             <a:fld id="{17FEB0A2-9E0E-4885-91D3-6DE54AE15078}" type="datetimeFigureOut">
               <a:rPr lang="en-US" smtClean="0"/>
-              <a:t>11/8/2013</a:t>
+              <a:t>11/11/2013</a:t>
             </a:fld>
             <a:endParaRPr lang="en-US"/>
           </a:p>
@@ -988,7 +989,7 @@
           <a:p>
             <a:fld id="{17FEB0A2-9E0E-4885-91D3-6DE54AE15078}" type="datetimeFigureOut">
               <a:rPr lang="en-US" smtClean="0"/>
-              <a:t>11/8/2013</a:t>
+              <a:t>11/11/2013</a:t>
             </a:fld>
             <a:endParaRPr lang="en-US"/>
           </a:p>
@@ -1234,7 +1235,7 @@
           <a:p>
             <a:fld id="{17FEB0A2-9E0E-4885-91D3-6DE54AE15078}" type="datetimeFigureOut">
               <a:rPr lang="en-US" smtClean="0"/>
-              <a:t>11/8/2013</a:t>
+              <a:t>11/11/2013</a:t>
             </a:fld>
             <a:endParaRPr lang="en-US"/>
           </a:p>
@@ -1522,7 +1523,7 @@
           <a:p>
             <a:fld id="{17FEB0A2-9E0E-4885-91D3-6DE54AE15078}" type="datetimeFigureOut">
               <a:rPr lang="en-US" smtClean="0"/>
-              <a:t>11/8/2013</a:t>
+              <a:t>11/11/2013</a:t>
             </a:fld>
             <a:endParaRPr lang="en-US"/>
           </a:p>
@@ -1944,7 +1945,7 @@
           <a:p>
             <a:fld id="{17FEB0A2-9E0E-4885-91D3-6DE54AE15078}" type="datetimeFigureOut">
               <a:rPr lang="en-US" smtClean="0"/>
-              <a:t>11/8/2013</a:t>
+              <a:t>11/11/2013</a:t>
             </a:fld>
             <a:endParaRPr lang="en-US"/>
           </a:p>
@@ -2062,7 +2063,7 @@
           <a:p>
             <a:fld id="{17FEB0A2-9E0E-4885-91D3-6DE54AE15078}" type="datetimeFigureOut">
               <a:rPr lang="en-US" smtClean="0"/>
-              <a:t>11/8/2013</a:t>
+              <a:t>11/11/2013</a:t>
             </a:fld>
             <a:endParaRPr lang="en-US"/>
           </a:p>
@@ -2157,7 +2158,7 @@
           <a:p>
             <a:fld id="{17FEB0A2-9E0E-4885-91D3-6DE54AE15078}" type="datetimeFigureOut">
               <a:rPr lang="en-US" smtClean="0"/>
-              <a:t>11/8/2013</a:t>
+              <a:t>11/11/2013</a:t>
             </a:fld>
             <a:endParaRPr lang="en-US"/>
           </a:p>
@@ -2434,7 +2435,7 @@
           <a:p>
             <a:fld id="{17FEB0A2-9E0E-4885-91D3-6DE54AE15078}" type="datetimeFigureOut">
               <a:rPr lang="en-US" smtClean="0"/>
-              <a:t>11/8/2013</a:t>
+              <a:t>11/11/2013</a:t>
             </a:fld>
             <a:endParaRPr lang="en-US"/>
           </a:p>
@@ -2687,7 +2688,7 @@
           <a:p>
             <a:fld id="{17FEB0A2-9E0E-4885-91D3-6DE54AE15078}" type="datetimeFigureOut">
               <a:rPr lang="en-US" smtClean="0"/>
-              <a:t>11/8/2013</a:t>
+              <a:t>11/11/2013</a:t>
             </a:fld>
             <a:endParaRPr lang="en-US"/>
           </a:p>
@@ -2900,7 +2901,7 @@
           <a:p>
             <a:fld id="{17FEB0A2-9E0E-4885-91D3-6DE54AE15078}" type="datetimeFigureOut">
               <a:rPr lang="en-US" smtClean="0"/>
-              <a:t>11/8/2013</a:t>
+              <a:t>11/11/2013</a:t>
             </a:fld>
             <a:endParaRPr lang="en-US"/>
           </a:p>
@@ -3415,7 +3416,7 @@
               <a:rPr lang="de-DE" dirty="0" err="1"/>
               <a:t>Plugin</a:t>
             </a:r>
-            <a:endParaRPr lang="en-US" dirty="0"/>
+            <a:endParaRPr lang="de-DE" dirty="0"/>
           </a:p>
         </p:txBody>
       </p:sp>
@@ -3431,8 +3432,8 @@
         </p:nvSpPr>
         <p:spPr>
           <a:xfrm>
-            <a:off x="179512" y="3140968"/>
-            <a:ext cx="8856984" cy="3672408"/>
+            <a:off x="179512" y="4077072"/>
+            <a:ext cx="8712968" cy="2304256"/>
           </a:xfrm>
         </p:spPr>
         <p:txBody>
@@ -3456,81 +3457,68 @@
                 <a:latin typeface="Consolas" pitchFamily="49" charset="0"/>
                 <a:cs typeface="Consolas" pitchFamily="49" charset="0"/>
               </a:rPr>
-              <a:t> </a:t>
-            </a:r>
-            <a:r>
-              <a:rPr lang="en-US" sz="1600" dirty="0" err="1">
-                <a:latin typeface="Consolas" pitchFamily="49" charset="0"/>
-                <a:cs typeface="Consolas" pitchFamily="49" charset="0"/>
-              </a:rPr>
-              <a:t>EnglishGreeter</a:t>
+              <a:t> Greeter </a:t>
+            </a:r>
+            <a:endParaRPr lang="en-US" sz="1600" dirty="0" smtClean="0">
+              <a:latin typeface="Consolas" pitchFamily="49" charset="0"/>
+              <a:cs typeface="Consolas" pitchFamily="49" charset="0"/>
+            </a:endParaRPr>
+          </a:p>
+          <a:p>
+            <a:pPr marL="0" indent="0">
+              <a:buNone/>
+            </a:pPr>
+            <a:r>
+              <a:rPr lang="en-US" sz="1600" dirty="0" smtClean="0">
+                <a:latin typeface="Consolas" pitchFamily="49" charset="0"/>
+                <a:cs typeface="Consolas" pitchFamily="49" charset="0"/>
+              </a:rPr>
+              <a:t>{ </a:t>
+            </a:r>
+          </a:p>
+          <a:p>
+            <a:pPr marL="0" indent="0">
+              <a:buNone/>
+            </a:pPr>
+            <a:r>
+              <a:rPr lang="en-US" sz="1600" b="1" dirty="0" smtClean="0">
+                <a:latin typeface="Consolas" pitchFamily="49" charset="0"/>
+                <a:cs typeface="Consolas" pitchFamily="49" charset="0"/>
+              </a:rPr>
+              <a:t>  public</a:t>
             </a:r>
             <a:r>
               <a:rPr lang="en-US" sz="1600" dirty="0">
                 <a:latin typeface="Consolas" pitchFamily="49" charset="0"/>
                 <a:cs typeface="Consolas" pitchFamily="49" charset="0"/>
               </a:rPr>
-              <a:t> : </a:t>
-            </a:r>
-            <a:r>
-              <a:rPr lang="en-US" sz="1600" b="1" dirty="0">
-                <a:latin typeface="Consolas" pitchFamily="49" charset="0"/>
-                <a:cs typeface="Consolas" pitchFamily="49" charset="0"/>
-              </a:rPr>
-              <a:t>public</a:t>
-            </a:r>
+              <a:t>: </a:t>
+            </a:r>
+            <a:endParaRPr lang="en-US" sz="1600" dirty="0" smtClean="0">
+              <a:latin typeface="Consolas" pitchFamily="49" charset="0"/>
+              <a:cs typeface="Consolas" pitchFamily="49" charset="0"/>
+            </a:endParaRPr>
+          </a:p>
+          <a:p>
+            <a:pPr marL="0" indent="0">
+              <a:buNone/>
+            </a:pPr>
             <a:r>
               <a:rPr lang="en-US" sz="1600" dirty="0">
                 <a:latin typeface="Consolas" pitchFamily="49" charset="0"/>
                 <a:cs typeface="Consolas" pitchFamily="49" charset="0"/>
               </a:rPr>
-              <a:t> Greeter </a:t>
-            </a:r>
-          </a:p>
-          <a:p>
-            <a:pPr marL="0" indent="0">
-              <a:buNone/>
-            </a:pPr>
-            <a:r>
-              <a:rPr lang="en-US" sz="1600" dirty="0">
-                <a:latin typeface="Consolas" pitchFamily="49" charset="0"/>
-                <a:cs typeface="Consolas" pitchFamily="49" charset="0"/>
-              </a:rPr>
-              <a:t>{ </a:t>
-            </a:r>
-          </a:p>
-          <a:p>
-            <a:pPr marL="0" indent="0">
-              <a:buNone/>
-            </a:pPr>
-            <a:r>
-              <a:rPr lang="en-US" sz="1600" b="1" dirty="0">
-                <a:latin typeface="Consolas" pitchFamily="49" charset="0"/>
-                <a:cs typeface="Consolas" pitchFamily="49" charset="0"/>
-              </a:rPr>
-              <a:t>  public</a:t>
-            </a:r>
-            <a:r>
-              <a:rPr lang="en-US" sz="1600" dirty="0">
-                <a:latin typeface="Consolas" pitchFamily="49" charset="0"/>
-                <a:cs typeface="Consolas" pitchFamily="49" charset="0"/>
-              </a:rPr>
-              <a:t>: </a:t>
-            </a:r>
-          </a:p>
-          <a:p>
-            <a:pPr marL="0" indent="0">
-              <a:buNone/>
-            </a:pPr>
-            <a:r>
-              <a:rPr lang="en-US" sz="1600" dirty="0">
-                <a:latin typeface="Consolas" pitchFamily="49" charset="0"/>
-                <a:cs typeface="Consolas" pitchFamily="49" charset="0"/>
-              </a:rPr>
-              <a:t>    </a:t>
-            </a:r>
-            <a:r>
-              <a:rPr lang="en-US" sz="1600" dirty="0">
+              <a:t> </a:t>
+            </a:r>
+            <a:r>
+              <a:rPr lang="en-US" sz="1600" dirty="0" smtClean="0">
+                <a:latin typeface="Consolas" pitchFamily="49" charset="0"/>
+                <a:cs typeface="Consolas" pitchFamily="49" charset="0"/>
+              </a:rPr>
+              <a:t>   </a:t>
+            </a:r>
+            <a:r>
+              <a:rPr lang="en-US" sz="1600" dirty="0" smtClean="0">
                 <a:solidFill>
                   <a:schemeClr val="tx2">
                     <a:lumMod val="60000"/>
@@ -3540,6 +3528,103 @@
                 <a:latin typeface="Consolas" pitchFamily="49" charset="0"/>
                 <a:cs typeface="Consolas" pitchFamily="49" charset="0"/>
               </a:rPr>
+              <a:t>virtual</a:t>
+            </a:r>
+            <a:r>
+              <a:rPr lang="en-US" sz="1600" dirty="0" smtClean="0">
+                <a:latin typeface="Consolas" pitchFamily="49" charset="0"/>
+                <a:cs typeface="Consolas" pitchFamily="49" charset="0"/>
+              </a:rPr>
+              <a:t> </a:t>
+            </a:r>
+            <a:r>
+              <a:rPr lang="en-US" sz="1600" dirty="0">
+                <a:latin typeface="Consolas" pitchFamily="49" charset="0"/>
+                <a:cs typeface="Consolas" pitchFamily="49" charset="0"/>
+              </a:rPr>
+              <a:t>~Greeter() </a:t>
+            </a:r>
+            <a:endParaRPr lang="en-US" sz="1600" dirty="0" smtClean="0">
+              <a:latin typeface="Consolas" pitchFamily="49" charset="0"/>
+              <a:cs typeface="Consolas" pitchFamily="49" charset="0"/>
+            </a:endParaRPr>
+          </a:p>
+          <a:p>
+            <a:pPr marL="0" indent="0">
+              <a:buNone/>
+            </a:pPr>
+            <a:r>
+              <a:rPr lang="en-US" sz="1600" dirty="0">
+                <a:latin typeface="Consolas" pitchFamily="49" charset="0"/>
+                <a:cs typeface="Consolas" pitchFamily="49" charset="0"/>
+              </a:rPr>
+              <a:t> </a:t>
+            </a:r>
+            <a:r>
+              <a:rPr lang="en-US" sz="1600" dirty="0" smtClean="0">
+                <a:latin typeface="Consolas" pitchFamily="49" charset="0"/>
+                <a:cs typeface="Consolas" pitchFamily="49" charset="0"/>
+              </a:rPr>
+              <a:t>   {} </a:t>
+            </a:r>
+          </a:p>
+          <a:p>
+            <a:pPr marL="0" indent="0">
+              <a:buNone/>
+            </a:pPr>
+            <a:endParaRPr lang="en-US" sz="800" dirty="0" smtClean="0">
+              <a:latin typeface="Consolas" pitchFamily="49" charset="0"/>
+              <a:cs typeface="Consolas" pitchFamily="49" charset="0"/>
+            </a:endParaRPr>
+          </a:p>
+          <a:p>
+            <a:pPr marL="0" indent="0">
+              <a:buNone/>
+            </a:pPr>
+            <a:r>
+              <a:rPr lang="en-US" sz="1600" dirty="0">
+                <a:solidFill>
+                  <a:schemeClr val="tx2">
+                    <a:lumMod val="60000"/>
+                    <a:lumOff val="40000"/>
+                  </a:schemeClr>
+                </a:solidFill>
+                <a:latin typeface="Consolas" pitchFamily="49" charset="0"/>
+                <a:cs typeface="Consolas" pitchFamily="49" charset="0"/>
+              </a:rPr>
+              <a:t> </a:t>
+            </a:r>
+            <a:r>
+              <a:rPr lang="en-US" sz="1600" dirty="0" smtClean="0">
+                <a:solidFill>
+                  <a:schemeClr val="tx2">
+                    <a:lumMod val="60000"/>
+                    <a:lumOff val="40000"/>
+                  </a:schemeClr>
+                </a:solidFill>
+                <a:latin typeface="Consolas" pitchFamily="49" charset="0"/>
+                <a:cs typeface="Consolas" pitchFamily="49" charset="0"/>
+              </a:rPr>
+              <a:t>   virtual</a:t>
+            </a:r>
+            <a:r>
+              <a:rPr lang="en-US" sz="1600" dirty="0" smtClean="0">
+                <a:latin typeface="Consolas" pitchFamily="49" charset="0"/>
+                <a:cs typeface="Consolas" pitchFamily="49" charset="0"/>
+              </a:rPr>
+              <a:t> </a:t>
+            </a:r>
+            <a:r>
+              <a:rPr lang="en-US" sz="1600" dirty="0">
+                <a:solidFill>
+                  <a:schemeClr val="tx2">
+                    <a:lumMod val="60000"/>
+                    <a:lumOff val="40000"/>
+                  </a:schemeClr>
+                </a:solidFill>
+                <a:latin typeface="Consolas" pitchFamily="49" charset="0"/>
+                <a:cs typeface="Consolas" pitchFamily="49" charset="0"/>
+              </a:rPr>
               <a:t>void</a:t>
             </a:r>
             <a:r>
@@ -3557,76 +3642,30 @@
               <a:t>sayHello</a:t>
             </a:r>
             <a:r>
+              <a:rPr lang="en-US" sz="1600" dirty="0" smtClean="0">
+                <a:latin typeface="Consolas" pitchFamily="49" charset="0"/>
+                <a:cs typeface="Consolas" pitchFamily="49" charset="0"/>
+              </a:rPr>
+              <a:t>() </a:t>
+            </a:r>
+            <a:r>
               <a:rPr lang="en-US" sz="1600" dirty="0">
                 <a:latin typeface="Consolas" pitchFamily="49" charset="0"/>
                 <a:cs typeface="Consolas" pitchFamily="49" charset="0"/>
               </a:rPr>
-              <a:t>() </a:t>
-            </a:r>
+              <a:t>= 0; </a:t>
+            </a:r>
+            <a:endParaRPr lang="en-US" sz="1600" dirty="0" smtClean="0">
+              <a:latin typeface="Consolas" pitchFamily="49" charset="0"/>
+              <a:cs typeface="Consolas" pitchFamily="49" charset="0"/>
+            </a:endParaRPr>
           </a:p>
           <a:p>
             <a:pPr marL="0" indent="0">
               <a:buNone/>
             </a:pPr>
             <a:r>
-              <a:rPr lang="en-US" sz="1600" dirty="0">
-                <a:latin typeface="Consolas" pitchFamily="49" charset="0"/>
-                <a:cs typeface="Consolas" pitchFamily="49" charset="0"/>
-              </a:rPr>
-              <a:t>    { </a:t>
-            </a:r>
-            <a:r>
-              <a:rPr lang="en-US" sz="1600" dirty="0" err="1">
-                <a:latin typeface="Consolas" pitchFamily="49" charset="0"/>
-                <a:cs typeface="Consolas" pitchFamily="49" charset="0"/>
-              </a:rPr>
-              <a:t>std</a:t>
-            </a:r>
-            <a:r>
-              <a:rPr lang="en-US" sz="1600" dirty="0">
-                <a:latin typeface="Consolas" pitchFamily="49" charset="0"/>
-                <a:cs typeface="Consolas" pitchFamily="49" charset="0"/>
-              </a:rPr>
-              <a:t>::</a:t>
-            </a:r>
-            <a:r>
-              <a:rPr lang="en-US" sz="1600" dirty="0" err="1">
-                <a:latin typeface="Consolas" pitchFamily="49" charset="0"/>
-                <a:cs typeface="Consolas" pitchFamily="49" charset="0"/>
-              </a:rPr>
-              <a:t>cout</a:t>
-            </a:r>
-            <a:r>
-              <a:rPr lang="en-US" sz="1600" dirty="0">
-                <a:latin typeface="Consolas" pitchFamily="49" charset="0"/>
-                <a:cs typeface="Consolas" pitchFamily="49" charset="0"/>
-              </a:rPr>
-              <a:t> &lt;&lt; </a:t>
-            </a:r>
-            <a:r>
-              <a:rPr lang="en-US" sz="1600" dirty="0">
-                <a:solidFill>
-                  <a:srgbClr val="FF0000"/>
-                </a:solidFill>
-                <a:latin typeface="Consolas" pitchFamily="49" charset="0"/>
-                <a:cs typeface="Consolas" pitchFamily="49" charset="0"/>
-              </a:rPr>
-              <a:t>"Hello World"</a:t>
-            </a:r>
-            <a:r>
-              <a:rPr lang="en-US" sz="1600" dirty="0">
-                <a:latin typeface="Consolas" pitchFamily="49" charset="0"/>
-                <a:cs typeface="Consolas" pitchFamily="49" charset="0"/>
-              </a:rPr>
-              <a:t>; } </a:t>
-            </a:r>
-          </a:p>
-          <a:p>
-            <a:pPr marL="0" indent="0">
-              <a:buNone/>
-            </a:pPr>
-            <a:r>
-              <a:rPr lang="en-US" sz="1600" dirty="0">
+              <a:rPr lang="en-US" sz="1600" dirty="0" smtClean="0">
                 <a:latin typeface="Consolas" pitchFamily="49" charset="0"/>
                 <a:cs typeface="Consolas" pitchFamily="49" charset="0"/>
               </a:rPr>
@@ -3641,264 +3680,7 @@
             <a:pPr marL="0" indent="0">
               <a:buNone/>
             </a:pPr>
-            <a:endParaRPr lang="de-DE" sz="1600" dirty="0" smtClean="0">
-              <a:solidFill>
-                <a:schemeClr val="accent3">
-                  <a:lumMod val="75000"/>
-                </a:schemeClr>
-              </a:solidFill>
-              <a:latin typeface="Consolas" pitchFamily="49" charset="0"/>
-              <a:cs typeface="Consolas" pitchFamily="49" charset="0"/>
-            </a:endParaRPr>
-          </a:p>
-          <a:p>
-            <a:pPr marL="0" indent="0">
-              <a:buNone/>
-            </a:pPr>
-            <a:r>
-              <a:rPr lang="en-US" sz="1600" b="1" dirty="0" smtClean="0">
-                <a:latin typeface="Consolas" pitchFamily="49" charset="0"/>
-                <a:cs typeface="Consolas" pitchFamily="49" charset="0"/>
-              </a:rPr>
-              <a:t>static</a:t>
-            </a:r>
-            <a:r>
-              <a:rPr lang="en-US" sz="1600" dirty="0" smtClean="0">
-                <a:latin typeface="Consolas" pitchFamily="49" charset="0"/>
-                <a:cs typeface="Consolas" pitchFamily="49" charset="0"/>
-              </a:rPr>
-              <a:t> </a:t>
-            </a:r>
-            <a:r>
-              <a:rPr lang="en-US" sz="1600" dirty="0" err="1">
-                <a:latin typeface="Consolas" pitchFamily="49" charset="0"/>
-                <a:cs typeface="Consolas" pitchFamily="49" charset="0"/>
-              </a:rPr>
-              <a:t>BasicPlugin</a:t>
-            </a:r>
-            <a:r>
-              <a:rPr lang="en-US" sz="1600" dirty="0">
-                <a:latin typeface="Consolas" pitchFamily="49" charset="0"/>
-                <a:cs typeface="Consolas" pitchFamily="49" charset="0"/>
-              </a:rPr>
-              <a:t>&lt;</a:t>
-            </a:r>
-            <a:r>
-              <a:rPr lang="en-US" sz="1600" dirty="0" err="1">
-                <a:latin typeface="Consolas" pitchFamily="49" charset="0"/>
-                <a:cs typeface="Consolas" pitchFamily="49" charset="0"/>
-              </a:rPr>
-              <a:t>EnglishGreeter</a:t>
-            </a:r>
-            <a:r>
-              <a:rPr lang="en-US" sz="1600" dirty="0">
-                <a:latin typeface="Consolas" pitchFamily="49" charset="0"/>
-                <a:cs typeface="Consolas" pitchFamily="49" charset="0"/>
-              </a:rPr>
-              <a:t>, Greeter&gt; _</a:t>
-            </a:r>
-            <a:r>
-              <a:rPr lang="en-US" sz="1600" dirty="0" err="1">
-                <a:latin typeface="Consolas" pitchFamily="49" charset="0"/>
-                <a:cs typeface="Consolas" pitchFamily="49" charset="0"/>
-              </a:rPr>
-              <a:t>enGreeter</a:t>
-            </a:r>
-            <a:r>
-              <a:rPr lang="en-US" sz="1600" dirty="0">
-                <a:latin typeface="Consolas" pitchFamily="49" charset="0"/>
-                <a:cs typeface="Consolas" pitchFamily="49" charset="0"/>
-              </a:rPr>
-              <a:t>(</a:t>
-            </a:r>
-            <a:r>
-              <a:rPr lang="en-US" sz="1600" dirty="0">
-                <a:solidFill>
-                  <a:srgbClr val="FF0000"/>
-                </a:solidFill>
-                <a:latin typeface="Consolas" pitchFamily="49" charset="0"/>
-                <a:cs typeface="Consolas" pitchFamily="49" charset="0"/>
-              </a:rPr>
-              <a:t>"en"</a:t>
-            </a:r>
-            <a:r>
-              <a:rPr lang="en-US" sz="1600" dirty="0">
-                <a:latin typeface="Consolas" pitchFamily="49" charset="0"/>
-                <a:cs typeface="Consolas" pitchFamily="49" charset="0"/>
-              </a:rPr>
-              <a:t>); </a:t>
-            </a:r>
             <a:endParaRPr lang="en-US" sz="1600" dirty="0" smtClean="0">
-              <a:latin typeface="Consolas" pitchFamily="49" charset="0"/>
-              <a:cs typeface="Consolas" pitchFamily="49" charset="0"/>
-            </a:endParaRPr>
-          </a:p>
-          <a:p>
-            <a:pPr marL="0" indent="0">
-              <a:buNone/>
-            </a:pPr>
-            <a:endParaRPr lang="de-DE" sz="1600" dirty="0" smtClean="0">
-              <a:latin typeface="Consolas" pitchFamily="49" charset="0"/>
-              <a:cs typeface="Consolas" pitchFamily="49" charset="0"/>
-            </a:endParaRPr>
-          </a:p>
-          <a:p>
-            <a:pPr marL="0" indent="0">
-              <a:buNone/>
-            </a:pPr>
-            <a:r>
-              <a:rPr lang="en-US" sz="1600" b="1" dirty="0" smtClean="0">
-                <a:latin typeface="Consolas" pitchFamily="49" charset="0"/>
-                <a:cs typeface="Consolas" pitchFamily="49" charset="0"/>
-              </a:rPr>
-              <a:t>extern</a:t>
-            </a:r>
-            <a:r>
-              <a:rPr lang="en-US" sz="1600" dirty="0" smtClean="0">
-                <a:latin typeface="Consolas" pitchFamily="49" charset="0"/>
-                <a:cs typeface="Consolas" pitchFamily="49" charset="0"/>
-              </a:rPr>
-              <a:t> </a:t>
-            </a:r>
-            <a:r>
-              <a:rPr lang="en-US" sz="1600" dirty="0">
-                <a:solidFill>
-                  <a:srgbClr val="FF0000"/>
-                </a:solidFill>
-                <a:latin typeface="Consolas" pitchFamily="49" charset="0"/>
-                <a:cs typeface="Consolas" pitchFamily="49" charset="0"/>
-              </a:rPr>
-              <a:t>"C"</a:t>
-            </a:r>
-            <a:r>
-              <a:rPr lang="en-US" sz="1600" dirty="0">
-                <a:latin typeface="Consolas" pitchFamily="49" charset="0"/>
-                <a:cs typeface="Consolas" pitchFamily="49" charset="0"/>
-              </a:rPr>
-              <a:t> { </a:t>
-            </a:r>
-            <a:endParaRPr lang="en-US" sz="1600" dirty="0" smtClean="0">
-              <a:latin typeface="Consolas" pitchFamily="49" charset="0"/>
-              <a:cs typeface="Consolas" pitchFamily="49" charset="0"/>
-            </a:endParaRPr>
-          </a:p>
-          <a:p>
-            <a:pPr marL="0" indent="0">
-              <a:buNone/>
-            </a:pPr>
-            <a:r>
-              <a:rPr lang="en-US" sz="1600" dirty="0">
-                <a:latin typeface="Consolas" pitchFamily="49" charset="0"/>
-                <a:cs typeface="Consolas" pitchFamily="49" charset="0"/>
-              </a:rPr>
-              <a:t> </a:t>
-            </a:r>
-            <a:r>
-              <a:rPr lang="en-US" sz="1600" dirty="0" smtClean="0">
-                <a:latin typeface="Consolas" pitchFamily="49" charset="0"/>
-                <a:cs typeface="Consolas" pitchFamily="49" charset="0"/>
-              </a:rPr>
-              <a:t> </a:t>
-            </a:r>
-            <a:r>
-              <a:rPr lang="en-US" sz="1600" dirty="0" smtClean="0">
-                <a:latin typeface="Consolas" pitchFamily="49" charset="0"/>
-                <a:cs typeface="Consolas" pitchFamily="49" charset="0"/>
-              </a:rPr>
-              <a:t>EXPORT </a:t>
-            </a:r>
-            <a:r>
-              <a:rPr lang="en-US" sz="1600" dirty="0" err="1" smtClean="0">
-                <a:latin typeface="Consolas" pitchFamily="49" charset="0"/>
-                <a:cs typeface="Consolas" pitchFamily="49" charset="0"/>
-              </a:rPr>
-              <a:t>PluginId</a:t>
-            </a:r>
-            <a:r>
-              <a:rPr lang="en-US" sz="1600" dirty="0">
-                <a:latin typeface="Consolas" pitchFamily="49" charset="0"/>
-                <a:cs typeface="Consolas" pitchFamily="49" charset="0"/>
-              </a:rPr>
-              <a:t>* </a:t>
-            </a:r>
-            <a:r>
-              <a:rPr lang="en-US" sz="1600" dirty="0" err="1">
-                <a:latin typeface="Consolas" pitchFamily="49" charset="0"/>
-                <a:cs typeface="Consolas" pitchFamily="49" charset="0"/>
-              </a:rPr>
-              <a:t>PluginList</a:t>
-            </a:r>
-            <a:r>
-              <a:rPr lang="en-US" sz="1600" dirty="0">
-                <a:latin typeface="Consolas" pitchFamily="49" charset="0"/>
-                <a:cs typeface="Consolas" pitchFamily="49" charset="0"/>
-              </a:rPr>
-              <a:t>[] = { &amp;_</a:t>
-            </a:r>
-            <a:r>
-              <a:rPr lang="en-US" sz="1600" dirty="0" err="1">
-                <a:latin typeface="Consolas" pitchFamily="49" charset="0"/>
-                <a:cs typeface="Consolas" pitchFamily="49" charset="0"/>
-              </a:rPr>
-              <a:t>enGreeter</a:t>
-            </a:r>
-            <a:r>
-              <a:rPr lang="en-US" sz="1600" dirty="0">
-                <a:latin typeface="Consolas" pitchFamily="49" charset="0"/>
-                <a:cs typeface="Consolas" pitchFamily="49" charset="0"/>
-              </a:rPr>
-              <a:t>, </a:t>
-            </a:r>
-            <a:r>
-              <a:rPr lang="en-US" sz="1600" dirty="0">
-                <a:solidFill>
-                  <a:schemeClr val="accent1">
-                    <a:lumMod val="75000"/>
-                  </a:schemeClr>
-                </a:solidFill>
-                <a:latin typeface="Consolas" pitchFamily="49" charset="0"/>
-                <a:cs typeface="Consolas" pitchFamily="49" charset="0"/>
-              </a:rPr>
-              <a:t>0</a:t>
-            </a:r>
-            <a:r>
-              <a:rPr lang="en-US" sz="1600" dirty="0">
-                <a:latin typeface="Consolas" pitchFamily="49" charset="0"/>
-                <a:cs typeface="Consolas" pitchFamily="49" charset="0"/>
-              </a:rPr>
-              <a:t> }; </a:t>
-            </a:r>
-            <a:endParaRPr lang="en-US" sz="1600" dirty="0" smtClean="0">
-              <a:latin typeface="Consolas" pitchFamily="49" charset="0"/>
-              <a:cs typeface="Consolas" pitchFamily="49" charset="0"/>
-            </a:endParaRPr>
-          </a:p>
-          <a:p>
-            <a:pPr marL="0" indent="0">
-              <a:buNone/>
-            </a:pPr>
-            <a:r>
-              <a:rPr lang="en-US" sz="1600" dirty="0" smtClean="0">
-                <a:latin typeface="Consolas" pitchFamily="49" charset="0"/>
-                <a:cs typeface="Consolas" pitchFamily="49" charset="0"/>
-              </a:rPr>
-              <a:t>}</a:t>
-            </a:r>
-          </a:p>
-          <a:p>
-            <a:pPr marL="0" indent="0">
-              <a:buNone/>
-            </a:pPr>
-            <a:endParaRPr lang="de-DE" sz="1600" dirty="0">
-              <a:latin typeface="Consolas" pitchFamily="49" charset="0"/>
-              <a:cs typeface="Consolas" pitchFamily="49" charset="0"/>
-            </a:endParaRPr>
-          </a:p>
-          <a:p>
-            <a:pPr marL="0" indent="0">
-              <a:buNone/>
-            </a:pPr>
-            <a:endParaRPr lang="de-DE" sz="1600" dirty="0" smtClean="0">
               <a:latin typeface="Consolas" pitchFamily="49" charset="0"/>
               <a:cs typeface="Consolas" pitchFamily="49" charset="0"/>
             </a:endParaRPr>
@@ -3949,7 +3731,7 @@
         <p:spPr>
           <a:xfrm>
             <a:off x="179512" y="989112"/>
-            <a:ext cx="8856984" cy="1431776"/>
+            <a:ext cx="8856984" cy="1935832"/>
           </a:xfrm>
           <a:prstGeom prst="rect">
             <a:avLst/>
@@ -4115,197 +3897,114 @@
             </a:r>
             <a:r>
               <a:rPr lang="de-DE" dirty="0" smtClean="0"/>
-              <a:t> Implementation</a:t>
+              <a:t> Interface</a:t>
             </a:r>
           </a:p>
           <a:p>
             <a:pPr lvl="1"/>
             <a:r>
-              <a:rPr lang="de-DE" dirty="0" smtClean="0">
-                <a:solidFill>
-                  <a:schemeClr val="accent5">
-                    <a:lumMod val="75000"/>
-                  </a:schemeClr>
-                </a:solidFill>
-              </a:rPr>
-              <a:t>Exports a variable, not </a:t>
-            </a:r>
-            <a:r>
-              <a:rPr lang="de-DE" dirty="0" err="1" smtClean="0">
-                <a:solidFill>
-                  <a:schemeClr val="accent5">
-                    <a:lumMod val="75000"/>
-                  </a:schemeClr>
-                </a:solidFill>
-              </a:rPr>
-              <a:t>functions</a:t>
-            </a:r>
-            <a:r>
-              <a:rPr lang="de-DE" dirty="0" smtClean="0">
-                <a:solidFill>
-                  <a:schemeClr val="accent5">
-                    <a:lumMod val="75000"/>
-                  </a:schemeClr>
-                </a:solidFill>
-              </a:rPr>
-              <a:t> (also type </a:t>
-            </a:r>
-            <a:r>
-              <a:rPr lang="de-DE" dirty="0" err="1" smtClean="0">
-                <a:solidFill>
-                  <a:schemeClr val="accent5">
-                    <a:lumMod val="75000"/>
-                  </a:schemeClr>
-                </a:solidFill>
-              </a:rPr>
-              <a:t>safe</a:t>
-            </a:r>
-            <a:r>
-              <a:rPr lang="de-DE" dirty="0" smtClean="0">
-                <a:solidFill>
-                  <a:schemeClr val="accent5">
-                    <a:lumMod val="75000"/>
-                  </a:schemeClr>
-                </a:solidFill>
-              </a:rPr>
-              <a:t>!!!)</a:t>
-            </a:r>
+              <a:rPr lang="de-DE" dirty="0" smtClean="0"/>
+              <a:t>Classic OO design </a:t>
+            </a:r>
+            <a:r>
+              <a:rPr lang="de-DE" dirty="0" err="1" smtClean="0"/>
+              <a:t>using</a:t>
+            </a:r>
+            <a:r>
+              <a:rPr lang="de-DE" dirty="0" smtClean="0"/>
+              <a:t> </a:t>
+            </a:r>
+            <a:r>
+              <a:rPr lang="de-DE" dirty="0" err="1" smtClean="0"/>
+              <a:t>virtual</a:t>
+            </a:r>
+            <a:r>
+              <a:rPr lang="de-DE" dirty="0" smtClean="0"/>
+              <a:t> </a:t>
+            </a:r>
+            <a:r>
+              <a:rPr lang="de-DE" dirty="0" err="1" smtClean="0"/>
+              <a:t>base</a:t>
+            </a:r>
+            <a:r>
+              <a:rPr lang="de-DE" dirty="0" smtClean="0"/>
+              <a:t> </a:t>
+            </a:r>
+            <a:r>
+              <a:rPr lang="de-DE" dirty="0" err="1" smtClean="0"/>
+              <a:t>classes</a:t>
+            </a:r>
+            <a:endParaRPr lang="de-DE" dirty="0" smtClean="0"/>
           </a:p>
           <a:p>
             <a:pPr lvl="1"/>
             <a:r>
-              <a:rPr lang="de-DE" dirty="0" smtClean="0">
-                <a:solidFill>
-                  <a:schemeClr val="accent5">
-                    <a:lumMod val="75000"/>
-                  </a:schemeClr>
-                </a:solidFill>
-              </a:rPr>
-              <a:t>C </a:t>
-            </a:r>
-            <a:r>
-              <a:rPr lang="de-DE" dirty="0" err="1" smtClean="0">
-                <a:solidFill>
-                  <a:schemeClr val="accent5">
-                    <a:lumMod val="75000"/>
-                  </a:schemeClr>
-                </a:solidFill>
-              </a:rPr>
-              <a:t>Linkage</a:t>
-            </a:r>
-            <a:r>
-              <a:rPr lang="de-DE" dirty="0" smtClean="0">
-                <a:solidFill>
-                  <a:schemeClr val="accent5">
-                    <a:lumMod val="75000"/>
-                  </a:schemeClr>
-                </a:solidFill>
-              </a:rPr>
-              <a:t>, </a:t>
-            </a:r>
-            <a:r>
-              <a:rPr lang="de-DE" dirty="0" err="1" smtClean="0">
-                <a:solidFill>
-                  <a:schemeClr val="accent5">
-                    <a:lumMod val="75000"/>
-                  </a:schemeClr>
-                </a:solidFill>
-              </a:rPr>
-              <a:t>even</a:t>
-            </a:r>
-            <a:r>
-              <a:rPr lang="de-DE" dirty="0" smtClean="0">
-                <a:solidFill>
-                  <a:schemeClr val="accent5">
-                    <a:lumMod val="75000"/>
-                  </a:schemeClr>
-                </a:solidFill>
-              </a:rPr>
-              <a:t> </a:t>
-            </a:r>
-            <a:r>
-              <a:rPr lang="de-DE" dirty="0" err="1" smtClean="0">
-                <a:solidFill>
-                  <a:schemeClr val="accent5">
-                    <a:lumMod val="75000"/>
-                  </a:schemeClr>
-                </a:solidFill>
-              </a:rPr>
-              <a:t>though</a:t>
-            </a:r>
-            <a:r>
-              <a:rPr lang="de-DE" dirty="0" smtClean="0">
-                <a:solidFill>
-                  <a:schemeClr val="accent5">
-                    <a:lumMod val="75000"/>
-                  </a:schemeClr>
-                </a:solidFill>
-              </a:rPr>
-              <a:t> </a:t>
-            </a:r>
-            <a:r>
-              <a:rPr lang="de-DE" dirty="0" err="1" smtClean="0">
-                <a:solidFill>
-                  <a:schemeClr val="accent5">
-                    <a:lumMod val="75000"/>
-                  </a:schemeClr>
-                </a:solidFill>
-              </a:rPr>
+              <a:rPr lang="de-DE" dirty="0" err="1" smtClean="0"/>
               <a:t>Plugin</a:t>
             </a:r>
             <a:r>
-              <a:rPr lang="de-DE" dirty="0" smtClean="0">
-                <a:solidFill>
-                  <a:schemeClr val="accent5">
-                    <a:lumMod val="75000"/>
-                  </a:schemeClr>
-                </a:solidFill>
-              </a:rPr>
-              <a:t> </a:t>
-            </a:r>
-            <a:r>
-              <a:rPr lang="de-DE" dirty="0" err="1" smtClean="0">
-                <a:solidFill>
-                  <a:schemeClr val="accent5">
-                    <a:lumMod val="75000"/>
-                  </a:schemeClr>
-                </a:solidFill>
-              </a:rPr>
-              <a:t>is</a:t>
-            </a:r>
-            <a:r>
-              <a:rPr lang="de-DE" dirty="0" smtClean="0">
-                <a:solidFill>
-                  <a:schemeClr val="accent5">
-                    <a:lumMod val="75000"/>
-                  </a:schemeClr>
-                </a:solidFill>
-              </a:rPr>
-              <a:t> a C++ </a:t>
-            </a:r>
-            <a:r>
-              <a:rPr lang="de-DE" dirty="0" err="1" smtClean="0">
-                <a:solidFill>
-                  <a:schemeClr val="accent5">
-                    <a:lumMod val="75000"/>
-                  </a:schemeClr>
-                </a:solidFill>
-              </a:rPr>
-              <a:t>class</a:t>
-            </a:r>
-            <a:endParaRPr lang="de-DE" dirty="0" smtClean="0">
-              <a:solidFill>
-                <a:schemeClr val="accent5">
-                  <a:lumMod val="75000"/>
-                </a:schemeClr>
-              </a:solidFill>
-            </a:endParaRPr>
+              <a:rPr lang="de-DE" dirty="0" smtClean="0"/>
+              <a:t> Interface </a:t>
+            </a:r>
+            <a:r>
+              <a:rPr lang="de-DE" dirty="0" err="1" smtClean="0"/>
+              <a:t>defined</a:t>
+            </a:r>
+            <a:r>
+              <a:rPr lang="de-DE" dirty="0" smtClean="0"/>
+              <a:t> in </a:t>
+            </a:r>
+            <a:r>
+              <a:rPr lang="de-DE" dirty="0" err="1" smtClean="0"/>
+              <a:t>header</a:t>
+            </a:r>
+            <a:endParaRPr lang="de-DE" dirty="0" smtClean="0"/>
+          </a:p>
+          <a:p>
+            <a:pPr lvl="1"/>
+            <a:r>
+              <a:rPr lang="de-DE" dirty="0" err="1" smtClean="0"/>
+              <a:t>Plugins</a:t>
+            </a:r>
+            <a:r>
+              <a:rPr lang="de-DE" dirty="0" smtClean="0"/>
+              <a:t> </a:t>
+            </a:r>
+            <a:r>
+              <a:rPr lang="de-DE" dirty="0" err="1" smtClean="0"/>
+              <a:t>implement</a:t>
+            </a:r>
+            <a:r>
+              <a:rPr lang="de-DE" dirty="0" smtClean="0"/>
+              <a:t> </a:t>
+            </a:r>
+            <a:r>
+              <a:rPr lang="de-DE" dirty="0" err="1" smtClean="0"/>
+              <a:t>this</a:t>
+            </a:r>
+            <a:r>
+              <a:rPr lang="de-DE" dirty="0" smtClean="0"/>
+              <a:t> </a:t>
+            </a:r>
+            <a:r>
+              <a:rPr lang="de-DE" dirty="0" err="1" smtClean="0"/>
+              <a:t>interface</a:t>
+            </a:r>
+            <a:endParaRPr lang="de-DE" dirty="0" smtClean="0"/>
+          </a:p>
+          <a:p>
+            <a:pPr lvl="1"/>
+            <a:endParaRPr lang="de-DE" dirty="0" smtClean="0"/>
+          </a:p>
+          <a:p>
+            <a:pPr lvl="1"/>
+            <a:endParaRPr lang="de-DE" dirty="0"/>
           </a:p>
         </p:txBody>
       </p:sp>
       <p:sp>
         <p:nvSpPr>
-          <p:cNvPr id="6" name="Inhaltsplatzhalter 2"/>
+          <p:cNvPr id="8" name="Inhaltsplatzhalter 2"/>
           <p:cNvSpPr txBox="1">
             <a:spLocks/>
           </p:cNvSpPr>
@@ -4313,7 +4012,7 @@
         </p:nvSpPr>
         <p:spPr>
           <a:xfrm>
-            <a:off x="179512" y="2636912"/>
+            <a:off x="179512" y="3501008"/>
             <a:ext cx="8856984" cy="432048"/>
           </a:xfrm>
           <a:prstGeom prst="rect">
@@ -4466,24 +4165,8 @@
               <a:buNone/>
             </a:pPr>
             <a:r>
-              <a:rPr lang="de-DE" sz="2000" u="sng" dirty="0" smtClean="0"/>
-              <a:t>EnglishGreeter.cpp  (</a:t>
-            </a:r>
-            <a:r>
               <a:rPr lang="de-DE" sz="2000" u="sng" dirty="0" err="1" smtClean="0"/>
-              <a:t>built</a:t>
-            </a:r>
-            <a:r>
-              <a:rPr lang="de-DE" sz="2000" u="sng" dirty="0" smtClean="0"/>
-              <a:t> </a:t>
-            </a:r>
-            <a:r>
-              <a:rPr lang="de-DE" sz="2000" u="sng" dirty="0" err="1" smtClean="0"/>
-              <a:t>to</a:t>
-            </a:r>
-            <a:r>
-              <a:rPr lang="de-DE" sz="2000" u="sng" dirty="0" smtClean="0"/>
-              <a:t> plugin.so)</a:t>
+              <a:t>Greeter.h</a:t>
             </a:r>
             <a:endParaRPr lang="de-DE" sz="2000" u="sng" dirty="0"/>
           </a:p>
@@ -4492,7 +4175,7 @@
     </p:spTree>
     <p:extLst>
       <p:ext uri="{BB962C8B-B14F-4D97-AF65-F5344CB8AC3E}">
-        <p14:creationId xmlns:p14="http://schemas.microsoft.com/office/powerpoint/2010/main" val="3197550836"/>
+        <p14:creationId xmlns:p14="http://schemas.microsoft.com/office/powerpoint/2010/main" val="2536750366"/>
       </p:ext>
     </p:extLst>
   </p:cSld>
@@ -4575,13 +4258,13 @@
         </p:nvSpPr>
         <p:spPr>
           <a:xfrm>
-            <a:off x="179512" y="3545632"/>
-            <a:ext cx="4824536" cy="3267744"/>
+            <a:off x="179512" y="3140968"/>
+            <a:ext cx="8856984" cy="3672408"/>
           </a:xfrm>
         </p:spPr>
         <p:txBody>
           <a:bodyPr>
-            <a:normAutofit fontScale="92500" lnSpcReduction="10000"/>
+            <a:normAutofit/>
           </a:bodyPr>
           <a:lstStyle/>
           <a:p>
@@ -4589,12 +4272,298 @@
               <a:buNone/>
             </a:pPr>
             <a:r>
-              <a:rPr lang="de-DE" sz="1600" dirty="0" err="1" smtClean="0">
-                <a:latin typeface="Consolas" pitchFamily="49" charset="0"/>
-                <a:cs typeface="Consolas" pitchFamily="49" charset="0"/>
-              </a:rPr>
-              <a:t>PluginId</a:t>
-            </a:r>
+              <a:rPr lang="en-US" sz="1600" b="1" dirty="0">
+                <a:latin typeface="Consolas" pitchFamily="49" charset="0"/>
+                <a:cs typeface="Consolas" pitchFamily="49" charset="0"/>
+              </a:rPr>
+              <a:t>class</a:t>
+            </a:r>
+            <a:r>
+              <a:rPr lang="en-US" sz="1600" dirty="0">
+                <a:latin typeface="Consolas" pitchFamily="49" charset="0"/>
+                <a:cs typeface="Consolas" pitchFamily="49" charset="0"/>
+              </a:rPr>
+              <a:t> </a:t>
+            </a:r>
+            <a:r>
+              <a:rPr lang="en-US" sz="1600" dirty="0" err="1">
+                <a:latin typeface="Consolas" pitchFamily="49" charset="0"/>
+                <a:cs typeface="Consolas" pitchFamily="49" charset="0"/>
+              </a:rPr>
+              <a:t>EnglishGreeter</a:t>
+            </a:r>
+            <a:r>
+              <a:rPr lang="en-US" sz="1600" dirty="0">
+                <a:latin typeface="Consolas" pitchFamily="49" charset="0"/>
+                <a:cs typeface="Consolas" pitchFamily="49" charset="0"/>
+              </a:rPr>
+              <a:t> : </a:t>
+            </a:r>
+            <a:r>
+              <a:rPr lang="en-US" sz="1600" b="1" dirty="0">
+                <a:latin typeface="Consolas" pitchFamily="49" charset="0"/>
+                <a:cs typeface="Consolas" pitchFamily="49" charset="0"/>
+              </a:rPr>
+              <a:t>public</a:t>
+            </a:r>
+            <a:r>
+              <a:rPr lang="en-US" sz="1600" dirty="0">
+                <a:latin typeface="Consolas" pitchFamily="49" charset="0"/>
+                <a:cs typeface="Consolas" pitchFamily="49" charset="0"/>
+              </a:rPr>
+              <a:t> Greeter </a:t>
+            </a:r>
+          </a:p>
+          <a:p>
+            <a:pPr marL="0" indent="0">
+              <a:buNone/>
+            </a:pPr>
+            <a:r>
+              <a:rPr lang="en-US" sz="1600" dirty="0">
+                <a:latin typeface="Consolas" pitchFamily="49" charset="0"/>
+                <a:cs typeface="Consolas" pitchFamily="49" charset="0"/>
+              </a:rPr>
+              <a:t>{ </a:t>
+            </a:r>
+          </a:p>
+          <a:p>
+            <a:pPr marL="0" indent="0">
+              <a:buNone/>
+            </a:pPr>
+            <a:r>
+              <a:rPr lang="en-US" sz="1600" b="1" dirty="0">
+                <a:latin typeface="Consolas" pitchFamily="49" charset="0"/>
+                <a:cs typeface="Consolas" pitchFamily="49" charset="0"/>
+              </a:rPr>
+              <a:t>  public</a:t>
+            </a:r>
+            <a:r>
+              <a:rPr lang="en-US" sz="1600" dirty="0">
+                <a:latin typeface="Consolas" pitchFamily="49" charset="0"/>
+                <a:cs typeface="Consolas" pitchFamily="49" charset="0"/>
+              </a:rPr>
+              <a:t>: </a:t>
+            </a:r>
+          </a:p>
+          <a:p>
+            <a:pPr marL="0" indent="0">
+              <a:buNone/>
+            </a:pPr>
+            <a:r>
+              <a:rPr lang="en-US" sz="1600" dirty="0">
+                <a:latin typeface="Consolas" pitchFamily="49" charset="0"/>
+                <a:cs typeface="Consolas" pitchFamily="49" charset="0"/>
+              </a:rPr>
+              <a:t>    </a:t>
+            </a:r>
+            <a:r>
+              <a:rPr lang="en-US" sz="1600" dirty="0">
+                <a:solidFill>
+                  <a:schemeClr val="tx2">
+                    <a:lumMod val="60000"/>
+                    <a:lumOff val="40000"/>
+                  </a:schemeClr>
+                </a:solidFill>
+                <a:latin typeface="Consolas" pitchFamily="49" charset="0"/>
+                <a:cs typeface="Consolas" pitchFamily="49" charset="0"/>
+              </a:rPr>
+              <a:t>void</a:t>
+            </a:r>
+            <a:r>
+              <a:rPr lang="en-US" sz="1600" dirty="0">
+                <a:latin typeface="Consolas" pitchFamily="49" charset="0"/>
+                <a:cs typeface="Consolas" pitchFamily="49" charset="0"/>
+              </a:rPr>
+              <a:t> </a:t>
+            </a:r>
+            <a:r>
+              <a:rPr lang="en-US" sz="1600" dirty="0" err="1">
+                <a:latin typeface="Consolas" pitchFamily="49" charset="0"/>
+                <a:cs typeface="Consolas" pitchFamily="49" charset="0"/>
+              </a:rPr>
+              <a:t>sayHello</a:t>
+            </a:r>
+            <a:r>
+              <a:rPr lang="en-US" sz="1600" dirty="0">
+                <a:latin typeface="Consolas" pitchFamily="49" charset="0"/>
+                <a:cs typeface="Consolas" pitchFamily="49" charset="0"/>
+              </a:rPr>
+              <a:t>() </a:t>
+            </a:r>
+          </a:p>
+          <a:p>
+            <a:pPr marL="0" indent="0">
+              <a:buNone/>
+            </a:pPr>
+            <a:r>
+              <a:rPr lang="en-US" sz="1600" dirty="0">
+                <a:latin typeface="Consolas" pitchFamily="49" charset="0"/>
+                <a:cs typeface="Consolas" pitchFamily="49" charset="0"/>
+              </a:rPr>
+              <a:t>    { </a:t>
+            </a:r>
+            <a:r>
+              <a:rPr lang="en-US" sz="1600" dirty="0" err="1">
+                <a:latin typeface="Consolas" pitchFamily="49" charset="0"/>
+                <a:cs typeface="Consolas" pitchFamily="49" charset="0"/>
+              </a:rPr>
+              <a:t>std</a:t>
+            </a:r>
+            <a:r>
+              <a:rPr lang="en-US" sz="1600" dirty="0">
+                <a:latin typeface="Consolas" pitchFamily="49" charset="0"/>
+                <a:cs typeface="Consolas" pitchFamily="49" charset="0"/>
+              </a:rPr>
+              <a:t>::</a:t>
+            </a:r>
+            <a:r>
+              <a:rPr lang="en-US" sz="1600" dirty="0" err="1">
+                <a:latin typeface="Consolas" pitchFamily="49" charset="0"/>
+                <a:cs typeface="Consolas" pitchFamily="49" charset="0"/>
+              </a:rPr>
+              <a:t>cout</a:t>
+            </a:r>
+            <a:r>
+              <a:rPr lang="en-US" sz="1600" dirty="0">
+                <a:latin typeface="Consolas" pitchFamily="49" charset="0"/>
+                <a:cs typeface="Consolas" pitchFamily="49" charset="0"/>
+              </a:rPr>
+              <a:t> &lt;&lt; </a:t>
+            </a:r>
+            <a:r>
+              <a:rPr lang="en-US" sz="1600" dirty="0">
+                <a:solidFill>
+                  <a:srgbClr val="FF0000"/>
+                </a:solidFill>
+                <a:latin typeface="Consolas" pitchFamily="49" charset="0"/>
+                <a:cs typeface="Consolas" pitchFamily="49" charset="0"/>
+              </a:rPr>
+              <a:t>"Hello World"</a:t>
+            </a:r>
+            <a:r>
+              <a:rPr lang="en-US" sz="1600" dirty="0">
+                <a:latin typeface="Consolas" pitchFamily="49" charset="0"/>
+                <a:cs typeface="Consolas" pitchFamily="49" charset="0"/>
+              </a:rPr>
+              <a:t>; } </a:t>
+            </a:r>
+          </a:p>
+          <a:p>
+            <a:pPr marL="0" indent="0">
+              <a:buNone/>
+            </a:pPr>
+            <a:r>
+              <a:rPr lang="en-US" sz="1600" dirty="0">
+                <a:latin typeface="Consolas" pitchFamily="49" charset="0"/>
+                <a:cs typeface="Consolas" pitchFamily="49" charset="0"/>
+              </a:rPr>
+              <a:t>};</a:t>
+            </a:r>
+            <a:endParaRPr lang="de-DE" sz="1600" b="1" dirty="0">
+              <a:latin typeface="Consolas" pitchFamily="49" charset="0"/>
+              <a:cs typeface="Consolas" pitchFamily="49" charset="0"/>
+            </a:endParaRPr>
+          </a:p>
+          <a:p>
+            <a:pPr marL="0" indent="0">
+              <a:buNone/>
+            </a:pPr>
+            <a:endParaRPr lang="de-DE" sz="1600" dirty="0" smtClean="0">
+              <a:solidFill>
+                <a:schemeClr val="accent3">
+                  <a:lumMod val="75000"/>
+                </a:schemeClr>
+              </a:solidFill>
+              <a:latin typeface="Consolas" pitchFamily="49" charset="0"/>
+              <a:cs typeface="Consolas" pitchFamily="49" charset="0"/>
+            </a:endParaRPr>
+          </a:p>
+          <a:p>
+            <a:pPr marL="0" indent="0">
+              <a:buNone/>
+            </a:pPr>
+            <a:r>
+              <a:rPr lang="en-US" sz="1600" b="1" dirty="0" smtClean="0">
+                <a:latin typeface="Consolas" pitchFamily="49" charset="0"/>
+                <a:cs typeface="Consolas" pitchFamily="49" charset="0"/>
+              </a:rPr>
+              <a:t>static</a:t>
+            </a:r>
+            <a:r>
+              <a:rPr lang="en-US" sz="1600" dirty="0" smtClean="0">
+                <a:latin typeface="Consolas" pitchFamily="49" charset="0"/>
+                <a:cs typeface="Consolas" pitchFamily="49" charset="0"/>
+              </a:rPr>
+              <a:t> </a:t>
+            </a:r>
+            <a:r>
+              <a:rPr lang="en-US" sz="1600" dirty="0" err="1">
+                <a:latin typeface="Consolas" pitchFamily="49" charset="0"/>
+                <a:cs typeface="Consolas" pitchFamily="49" charset="0"/>
+              </a:rPr>
+              <a:t>BasicPlugin</a:t>
+            </a:r>
+            <a:r>
+              <a:rPr lang="en-US" sz="1600" dirty="0">
+                <a:latin typeface="Consolas" pitchFamily="49" charset="0"/>
+                <a:cs typeface="Consolas" pitchFamily="49" charset="0"/>
+              </a:rPr>
+              <a:t>&lt;</a:t>
+            </a:r>
+            <a:r>
+              <a:rPr lang="en-US" sz="1600" dirty="0" err="1">
+                <a:latin typeface="Consolas" pitchFamily="49" charset="0"/>
+                <a:cs typeface="Consolas" pitchFamily="49" charset="0"/>
+              </a:rPr>
+              <a:t>EnglishGreeter</a:t>
+            </a:r>
+            <a:r>
+              <a:rPr lang="en-US" sz="1600" dirty="0">
+                <a:latin typeface="Consolas" pitchFamily="49" charset="0"/>
+                <a:cs typeface="Consolas" pitchFamily="49" charset="0"/>
+              </a:rPr>
+              <a:t>, Greeter&gt; _</a:t>
+            </a:r>
+            <a:r>
+              <a:rPr lang="en-US" sz="1600" dirty="0" err="1">
+                <a:latin typeface="Consolas" pitchFamily="49" charset="0"/>
+                <a:cs typeface="Consolas" pitchFamily="49" charset="0"/>
+              </a:rPr>
+              <a:t>enGreeter</a:t>
+            </a:r>
+            <a:r>
+              <a:rPr lang="en-US" sz="1600" dirty="0">
+                <a:latin typeface="Consolas" pitchFamily="49" charset="0"/>
+                <a:cs typeface="Consolas" pitchFamily="49" charset="0"/>
+              </a:rPr>
+              <a:t>(</a:t>
+            </a:r>
+            <a:r>
+              <a:rPr lang="en-US" sz="1600" dirty="0">
+                <a:solidFill>
+                  <a:srgbClr val="FF0000"/>
+                </a:solidFill>
+                <a:latin typeface="Consolas" pitchFamily="49" charset="0"/>
+                <a:cs typeface="Consolas" pitchFamily="49" charset="0"/>
+              </a:rPr>
+              <a:t>"en"</a:t>
+            </a:r>
+            <a:r>
+              <a:rPr lang="en-US" sz="1600" dirty="0">
+                <a:latin typeface="Consolas" pitchFamily="49" charset="0"/>
+                <a:cs typeface="Consolas" pitchFamily="49" charset="0"/>
+              </a:rPr>
+              <a:t>); </a:t>
+            </a:r>
+            <a:endParaRPr lang="en-US" sz="1600" dirty="0" smtClean="0">
+              <a:latin typeface="Consolas" pitchFamily="49" charset="0"/>
+              <a:cs typeface="Consolas" pitchFamily="49" charset="0"/>
+            </a:endParaRPr>
+          </a:p>
+          <a:p>
+            <a:pPr marL="0" indent="0">
+              <a:buNone/>
+            </a:pPr>
             <a:endParaRPr lang="de-DE" sz="1600" dirty="0" smtClean="0">
               <a:latin typeface="Consolas" pitchFamily="49" charset="0"/>
               <a:cs typeface="Consolas" pitchFamily="49" charset="0"/>
@@ -4605,34 +4574,37 @@
               <a:buNone/>
             </a:pPr>
             <a:r>
-              <a:rPr lang="de-DE" sz="1600" dirty="0">
-                <a:latin typeface="Consolas" pitchFamily="49" charset="0"/>
-                <a:cs typeface="Consolas" pitchFamily="49" charset="0"/>
-              </a:rPr>
-              <a:t> </a:t>
-            </a:r>
-            <a:r>
-              <a:rPr lang="de-DE" sz="1600" dirty="0" smtClean="0">
-                <a:latin typeface="Consolas" pitchFamily="49" charset="0"/>
-                <a:cs typeface="Consolas" pitchFamily="49" charset="0"/>
-              </a:rPr>
-              <a:t>  + </a:t>
-            </a:r>
-            <a:r>
-              <a:rPr lang="de-DE" sz="1600" i="1" dirty="0" smtClean="0">
-                <a:latin typeface="Consolas" pitchFamily="49" charset="0"/>
-                <a:cs typeface="Consolas" pitchFamily="49" charset="0"/>
-              </a:rPr>
-              <a:t>type() : </a:t>
-            </a:r>
-            <a:r>
-              <a:rPr lang="de-DE" sz="1600" i="1" dirty="0" err="1" smtClean="0">
-                <a:latin typeface="Consolas" pitchFamily="49" charset="0"/>
-                <a:cs typeface="Consolas" pitchFamily="49" charset="0"/>
-              </a:rPr>
-              <a:t>type_info</a:t>
-            </a:r>
-            <a:endParaRPr lang="de-DE" sz="1600" i="1" dirty="0" smtClean="0">
+              <a:rPr lang="en-US" sz="1600" b="1" dirty="0" smtClean="0">
+                <a:latin typeface="Consolas" pitchFamily="49" charset="0"/>
+                <a:cs typeface="Consolas" pitchFamily="49" charset="0"/>
+              </a:rPr>
+              <a:t>extern</a:t>
+            </a:r>
+            <a:r>
+              <a:rPr lang="en-US" sz="1600" dirty="0" smtClean="0">
+                <a:latin typeface="Consolas" pitchFamily="49" charset="0"/>
+                <a:cs typeface="Consolas" pitchFamily="49" charset="0"/>
+              </a:rPr>
+              <a:t> </a:t>
+            </a:r>
+            <a:r>
+              <a:rPr lang="en-US" sz="1600" dirty="0">
+                <a:solidFill>
+                  <a:srgbClr val="FF0000"/>
+                </a:solidFill>
+                <a:latin typeface="Consolas" pitchFamily="49" charset="0"/>
+                <a:cs typeface="Consolas" pitchFamily="49" charset="0"/>
+              </a:rPr>
+              <a:t>"C"</a:t>
+            </a:r>
+            <a:r>
+              <a:rPr lang="en-US" sz="1600" dirty="0">
+                <a:latin typeface="Consolas" pitchFamily="49" charset="0"/>
+                <a:cs typeface="Consolas" pitchFamily="49" charset="0"/>
+              </a:rPr>
+              <a:t> { </a:t>
+            </a:r>
+            <a:endParaRPr lang="en-US" sz="1600" dirty="0" smtClean="0">
               <a:latin typeface="Consolas" pitchFamily="49" charset="0"/>
               <a:cs typeface="Consolas" pitchFamily="49" charset="0"/>
             </a:endParaRPr>
@@ -4642,20 +4614,81 @@
               <a:buNone/>
             </a:pPr>
             <a:r>
-              <a:rPr lang="de-DE" sz="2800" dirty="0" smtClean="0">
-                <a:latin typeface="Consolas" pitchFamily="49" charset="0"/>
-                <a:cs typeface="Consolas" pitchFamily="49" charset="0"/>
-              </a:rPr>
-              <a:t> </a:t>
-            </a:r>
-            <a:r>
-              <a:rPr lang="de-DE" sz="2800" dirty="0" smtClean="0">
-                <a:latin typeface="Consolas" pitchFamily="49" charset="0"/>
-                <a:cs typeface="Consolas" pitchFamily="49" charset="0"/>
-              </a:rPr>
-              <a:t>    ↑</a:t>
-            </a:r>
-            <a:endParaRPr lang="de-DE" sz="2800" dirty="0">
+              <a:rPr lang="en-US" sz="1600" dirty="0">
+                <a:latin typeface="Consolas" pitchFamily="49" charset="0"/>
+                <a:cs typeface="Consolas" pitchFamily="49" charset="0"/>
+              </a:rPr>
+              <a:t> </a:t>
+            </a:r>
+            <a:r>
+              <a:rPr lang="en-US" sz="1600" dirty="0" smtClean="0">
+                <a:latin typeface="Consolas" pitchFamily="49" charset="0"/>
+                <a:cs typeface="Consolas" pitchFamily="49" charset="0"/>
+              </a:rPr>
+              <a:t> EXPORT </a:t>
+            </a:r>
+            <a:r>
+              <a:rPr lang="en-US" sz="1600" dirty="0" err="1" smtClean="0">
+                <a:latin typeface="Consolas" pitchFamily="49" charset="0"/>
+                <a:cs typeface="Consolas" pitchFamily="49" charset="0"/>
+              </a:rPr>
+              <a:t>PluginId</a:t>
+            </a:r>
+            <a:r>
+              <a:rPr lang="en-US" sz="1600" dirty="0">
+                <a:latin typeface="Consolas" pitchFamily="49" charset="0"/>
+                <a:cs typeface="Consolas" pitchFamily="49" charset="0"/>
+              </a:rPr>
+              <a:t>* </a:t>
+            </a:r>
+            <a:r>
+              <a:rPr lang="en-US" sz="1600" dirty="0" err="1">
+                <a:latin typeface="Consolas" pitchFamily="49" charset="0"/>
+                <a:cs typeface="Consolas" pitchFamily="49" charset="0"/>
+              </a:rPr>
+              <a:t>PluginList</a:t>
+            </a:r>
+            <a:r>
+              <a:rPr lang="en-US" sz="1600" dirty="0">
+                <a:latin typeface="Consolas" pitchFamily="49" charset="0"/>
+                <a:cs typeface="Consolas" pitchFamily="49" charset="0"/>
+              </a:rPr>
+              <a:t>[] = { &amp;_</a:t>
+            </a:r>
+            <a:r>
+              <a:rPr lang="en-US" sz="1600" dirty="0" err="1">
+                <a:latin typeface="Consolas" pitchFamily="49" charset="0"/>
+                <a:cs typeface="Consolas" pitchFamily="49" charset="0"/>
+              </a:rPr>
+              <a:t>enGreeter</a:t>
+            </a:r>
+            <a:r>
+              <a:rPr lang="en-US" sz="1600" dirty="0">
+                <a:latin typeface="Consolas" pitchFamily="49" charset="0"/>
+                <a:cs typeface="Consolas" pitchFamily="49" charset="0"/>
+              </a:rPr>
+              <a:t>, </a:t>
+            </a:r>
+            <a:r>
+              <a:rPr lang="en-US" sz="1600" dirty="0">
+                <a:solidFill>
+                  <a:schemeClr val="accent1">
+                    <a:lumMod val="75000"/>
+                  </a:schemeClr>
+                </a:solidFill>
+                <a:latin typeface="Consolas" pitchFamily="49" charset="0"/>
+                <a:cs typeface="Consolas" pitchFamily="49" charset="0"/>
+              </a:rPr>
+              <a:t>0</a:t>
+            </a:r>
+            <a:r>
+              <a:rPr lang="en-US" sz="1600" dirty="0">
+                <a:latin typeface="Consolas" pitchFamily="49" charset="0"/>
+                <a:cs typeface="Consolas" pitchFamily="49" charset="0"/>
+              </a:rPr>
+              <a:t> }; </a:t>
+            </a:r>
+            <a:endParaRPr lang="en-US" sz="1600" dirty="0" smtClean="0">
               <a:latin typeface="Consolas" pitchFamily="49" charset="0"/>
               <a:cs typeface="Consolas" pitchFamily="49" charset="0"/>
             </a:endParaRPr>
@@ -4665,52 +4698,26 @@
               <a:buNone/>
             </a:pPr>
             <a:r>
-              <a:rPr lang="de-DE" sz="1600" dirty="0" err="1" smtClean="0">
-                <a:latin typeface="Consolas" pitchFamily="49" charset="0"/>
-                <a:cs typeface="Consolas" pitchFamily="49" charset="0"/>
-              </a:rPr>
-              <a:t>Plugin</a:t>
-            </a:r>
-            <a:r>
-              <a:rPr lang="de-DE" sz="1600" dirty="0" smtClean="0">
-                <a:latin typeface="Consolas" pitchFamily="49" charset="0"/>
-                <a:cs typeface="Consolas" pitchFamily="49" charset="0"/>
-              </a:rPr>
-              <a:t>&lt;I&gt;</a:t>
+              <a:rPr lang="en-US" sz="1600" dirty="0" smtClean="0">
+                <a:latin typeface="Consolas" pitchFamily="49" charset="0"/>
+                <a:cs typeface="Consolas" pitchFamily="49" charset="0"/>
+              </a:rPr>
+              <a:t>}</a:t>
             </a:r>
           </a:p>
           <a:p>
             <a:pPr marL="0" indent="0">
               <a:buNone/>
             </a:pPr>
-            <a:r>
-              <a:rPr lang="de-DE" sz="1600" dirty="0">
-                <a:latin typeface="Consolas" pitchFamily="49" charset="0"/>
-                <a:cs typeface="Consolas" pitchFamily="49" charset="0"/>
-              </a:rPr>
-              <a:t> </a:t>
-            </a:r>
-            <a:r>
-              <a:rPr lang="de-DE" sz="1600" dirty="0" smtClean="0">
-                <a:latin typeface="Consolas" pitchFamily="49" charset="0"/>
-                <a:cs typeface="Consolas" pitchFamily="49" charset="0"/>
-              </a:rPr>
-              <a:t>  + type() </a:t>
-            </a:r>
-            <a:r>
-              <a:rPr lang="de-DE" sz="1600" dirty="0">
-                <a:latin typeface="Consolas" pitchFamily="49" charset="0"/>
-                <a:cs typeface="Consolas" pitchFamily="49" charset="0"/>
-              </a:rPr>
-              <a:t>: </a:t>
-            </a:r>
-            <a:r>
-              <a:rPr lang="de-DE" sz="1600" dirty="0" err="1" smtClean="0">
-                <a:latin typeface="Consolas" pitchFamily="49" charset="0"/>
-                <a:cs typeface="Consolas" pitchFamily="49" charset="0"/>
-              </a:rPr>
-              <a:t>type_info</a:t>
-            </a:r>
+            <a:endParaRPr lang="de-DE" sz="1600" dirty="0">
+              <a:latin typeface="Consolas" pitchFamily="49" charset="0"/>
+              <a:cs typeface="Consolas" pitchFamily="49" charset="0"/>
+            </a:endParaRPr>
+          </a:p>
+          <a:p>
+            <a:pPr marL="0" indent="0">
+              <a:buNone/>
+            </a:pPr>
             <a:endParaRPr lang="de-DE" sz="1600" dirty="0" smtClean="0">
               <a:latin typeface="Consolas" pitchFamily="49" charset="0"/>
               <a:cs typeface="Consolas" pitchFamily="49" charset="0"/>
@@ -4720,75 +4727,7 @@
             <a:pPr marL="0" indent="0">
               <a:buNone/>
             </a:pPr>
-            <a:r>
-              <a:rPr lang="de-DE" sz="1600" dirty="0">
-                <a:latin typeface="Consolas" pitchFamily="49" charset="0"/>
-                <a:cs typeface="Consolas" pitchFamily="49" charset="0"/>
-              </a:rPr>
-              <a:t> </a:t>
-            </a:r>
-            <a:r>
-              <a:rPr lang="de-DE" sz="1600" dirty="0" smtClean="0">
-                <a:latin typeface="Consolas" pitchFamily="49" charset="0"/>
-                <a:cs typeface="Consolas" pitchFamily="49" charset="0"/>
-              </a:rPr>
-              <a:t>  + </a:t>
-            </a:r>
-            <a:r>
-              <a:rPr lang="de-DE" sz="1600" i="1" dirty="0" err="1" smtClean="0">
-                <a:latin typeface="Consolas" pitchFamily="49" charset="0"/>
-                <a:cs typeface="Consolas" pitchFamily="49" charset="0"/>
-              </a:rPr>
-              <a:t>create</a:t>
-            </a:r>
-            <a:r>
-              <a:rPr lang="de-DE" sz="1600" i="1" dirty="0" smtClean="0">
-                <a:latin typeface="Consolas" pitchFamily="49" charset="0"/>
-                <a:cs typeface="Consolas" pitchFamily="49" charset="0"/>
-              </a:rPr>
-              <a:t>() : I*</a:t>
-            </a:r>
-          </a:p>
-          <a:p>
-            <a:pPr marL="0" indent="0">
-              <a:buNone/>
-            </a:pPr>
-            <a:r>
-              <a:rPr lang="de-DE" sz="1600" i="1" dirty="0">
-                <a:latin typeface="Consolas" pitchFamily="49" charset="0"/>
-                <a:cs typeface="Consolas" pitchFamily="49" charset="0"/>
-              </a:rPr>
-              <a:t> </a:t>
-            </a:r>
-            <a:r>
-              <a:rPr lang="de-DE" sz="1600" i="1" dirty="0" smtClean="0">
-                <a:latin typeface="Consolas" pitchFamily="49" charset="0"/>
-                <a:cs typeface="Consolas" pitchFamily="49" charset="0"/>
-              </a:rPr>
-              <a:t>  + </a:t>
-            </a:r>
-            <a:r>
-              <a:rPr lang="de-DE" sz="1600" i="1" dirty="0" err="1" smtClean="0">
-                <a:latin typeface="Consolas" pitchFamily="49" charset="0"/>
-                <a:cs typeface="Consolas" pitchFamily="49" charset="0"/>
-              </a:rPr>
-              <a:t>feature</a:t>
-            </a:r>
-            <a:r>
-              <a:rPr lang="de-DE" sz="1600" i="1" dirty="0" smtClean="0">
-                <a:latin typeface="Consolas" pitchFamily="49" charset="0"/>
-                <a:cs typeface="Consolas" pitchFamily="49" charset="0"/>
-              </a:rPr>
-              <a:t>() : </a:t>
-            </a:r>
-            <a:r>
-              <a:rPr lang="de-DE" sz="1600" i="1" dirty="0" err="1" smtClean="0">
-                <a:latin typeface="Consolas" pitchFamily="49" charset="0"/>
-                <a:cs typeface="Consolas" pitchFamily="49" charset="0"/>
-              </a:rPr>
-              <a:t>string</a:t>
-            </a:r>
-            <a:endParaRPr lang="de-DE" sz="1600" i="1" dirty="0" smtClean="0">
+            <a:endParaRPr lang="en-US" sz="1600" dirty="0" smtClean="0">
               <a:latin typeface="Consolas" pitchFamily="49" charset="0"/>
               <a:cs typeface="Consolas" pitchFamily="49" charset="0"/>
             </a:endParaRPr>
@@ -4797,116 +4736,6 @@
             <a:pPr marL="0" indent="0">
               <a:buNone/>
             </a:pPr>
-            <a:r>
-              <a:rPr lang="de-DE" sz="2800" dirty="0" smtClean="0">
-                <a:latin typeface="Consolas" pitchFamily="49" charset="0"/>
-                <a:cs typeface="Consolas" pitchFamily="49" charset="0"/>
-              </a:rPr>
-              <a:t> </a:t>
-            </a:r>
-            <a:r>
-              <a:rPr lang="de-DE" sz="2800" dirty="0" smtClean="0">
-                <a:latin typeface="Consolas" pitchFamily="49" charset="0"/>
-                <a:cs typeface="Consolas" pitchFamily="49" charset="0"/>
-              </a:rPr>
-              <a:t>    ↑</a:t>
-            </a:r>
-            <a:endParaRPr lang="de-DE" sz="1600" dirty="0">
-              <a:latin typeface="Consolas" pitchFamily="49" charset="0"/>
-              <a:cs typeface="Consolas" pitchFamily="49" charset="0"/>
-            </a:endParaRPr>
-          </a:p>
-          <a:p>
-            <a:pPr marL="0" indent="0">
-              <a:buNone/>
-            </a:pPr>
-            <a:r>
-              <a:rPr lang="de-DE" sz="1600" dirty="0" err="1" smtClean="0">
-                <a:latin typeface="Consolas" pitchFamily="49" charset="0"/>
-                <a:cs typeface="Consolas" pitchFamily="49" charset="0"/>
-              </a:rPr>
-              <a:t>BasicPlugin</a:t>
-            </a:r>
-            <a:r>
-              <a:rPr lang="de-DE" sz="1600" dirty="0" smtClean="0">
-                <a:latin typeface="Consolas" pitchFamily="49" charset="0"/>
-                <a:cs typeface="Consolas" pitchFamily="49" charset="0"/>
-              </a:rPr>
-              <a:t>&lt;T, I&gt;</a:t>
-            </a:r>
-          </a:p>
-          <a:p>
-            <a:pPr marL="0" indent="0">
-              <a:buNone/>
-            </a:pPr>
-            <a:r>
-              <a:rPr lang="de-DE" sz="1600" dirty="0">
-                <a:latin typeface="Consolas" pitchFamily="49" charset="0"/>
-                <a:cs typeface="Consolas" pitchFamily="49" charset="0"/>
-              </a:rPr>
-              <a:t> </a:t>
-            </a:r>
-            <a:r>
-              <a:rPr lang="de-DE" sz="1600" dirty="0" smtClean="0">
-                <a:latin typeface="Consolas" pitchFamily="49" charset="0"/>
-                <a:cs typeface="Consolas" pitchFamily="49" charset="0"/>
-              </a:rPr>
-              <a:t>  + </a:t>
-            </a:r>
-            <a:r>
-              <a:rPr lang="de-DE" sz="1600" dirty="0" err="1" smtClean="0">
-                <a:latin typeface="Consolas" pitchFamily="49" charset="0"/>
-                <a:cs typeface="Consolas" pitchFamily="49" charset="0"/>
-              </a:rPr>
-              <a:t>create</a:t>
-            </a:r>
-            <a:r>
-              <a:rPr lang="de-DE" sz="1600" dirty="0" smtClean="0">
-                <a:latin typeface="Consolas" pitchFamily="49" charset="0"/>
-                <a:cs typeface="Consolas" pitchFamily="49" charset="0"/>
-              </a:rPr>
-              <a:t>() : I*</a:t>
-            </a:r>
-          </a:p>
-          <a:p>
-            <a:pPr marL="0" indent="0">
-              <a:buNone/>
-            </a:pPr>
-            <a:r>
-              <a:rPr lang="de-DE" sz="1600" dirty="0">
-                <a:latin typeface="Consolas" pitchFamily="49" charset="0"/>
-                <a:cs typeface="Consolas" pitchFamily="49" charset="0"/>
-              </a:rPr>
-              <a:t> </a:t>
-            </a:r>
-            <a:r>
-              <a:rPr lang="de-DE" sz="1600" dirty="0" smtClean="0">
-                <a:latin typeface="Consolas" pitchFamily="49" charset="0"/>
-                <a:cs typeface="Consolas" pitchFamily="49" charset="0"/>
-              </a:rPr>
-              <a:t>  + </a:t>
-            </a:r>
-            <a:r>
-              <a:rPr lang="de-DE" sz="1600" dirty="0" err="1" smtClean="0">
-                <a:latin typeface="Consolas" pitchFamily="49" charset="0"/>
-                <a:cs typeface="Consolas" pitchFamily="49" charset="0"/>
-              </a:rPr>
-              <a:t>feature</a:t>
-            </a:r>
-            <a:r>
-              <a:rPr lang="de-DE" sz="1600" dirty="0" smtClean="0">
-                <a:latin typeface="Consolas" pitchFamily="49" charset="0"/>
-                <a:cs typeface="Consolas" pitchFamily="49" charset="0"/>
-              </a:rPr>
-              <a:t>() : </a:t>
-            </a:r>
-            <a:r>
-              <a:rPr lang="de-DE" sz="1600" dirty="0" err="1" smtClean="0">
-                <a:latin typeface="Consolas" pitchFamily="49" charset="0"/>
-                <a:cs typeface="Consolas" pitchFamily="49" charset="0"/>
-              </a:rPr>
-              <a:t>string</a:t>
-            </a:r>
             <a:endParaRPr lang="en-US" sz="1600" dirty="0">
               <a:latin typeface="Consolas" pitchFamily="49" charset="0"/>
               <a:cs typeface="Consolas" pitchFamily="49" charset="0"/>
@@ -4939,8 +4768,8 @@
         </p:nvSpPr>
         <p:spPr>
           <a:xfrm>
-            <a:off x="179512" y="908720"/>
-            <a:ext cx="8856984" cy="2520280"/>
+            <a:off x="179512" y="989112"/>
+            <a:ext cx="8856984" cy="1431776"/>
           </a:xfrm>
           <a:prstGeom prst="rect">
             <a:avLst/>
@@ -4948,7 +4777,7 @@
         </p:spPr>
         <p:txBody>
           <a:bodyPr vert="horz" lIns="91440" tIns="45720" rIns="91440" bIns="45720" rtlCol="0">
-            <a:normAutofit fontScale="77500" lnSpcReduction="20000"/>
+            <a:normAutofit fontScale="92500" lnSpcReduction="10000"/>
           </a:bodyPr>
           <a:lstStyle>
             <a:lvl1pPr marL="342900" indent="-342900" algn="l" defTabSz="914400" rtl="0" eaLnBrk="1" latinLnBrk="0" hangingPunct="1">
@@ -5089,301 +4918,200 @@
           </a:lstStyle>
           <a:p>
             <a:r>
-              <a:rPr lang="de-DE" dirty="0"/>
+              <a:rPr lang="de-DE" dirty="0" smtClean="0"/>
               <a:t>The </a:t>
             </a:r>
             <a:r>
-              <a:rPr lang="de-DE" dirty="0" err="1"/>
-              <a:t>PluginId</a:t>
-            </a:r>
-            <a:endParaRPr lang="de-DE" dirty="0"/>
+              <a:rPr lang="de-DE" dirty="0" err="1" smtClean="0"/>
+              <a:t>Greeter</a:t>
+            </a:r>
+            <a:r>
+              <a:rPr lang="de-DE" dirty="0" smtClean="0"/>
+              <a:t> </a:t>
+            </a:r>
+            <a:r>
+              <a:rPr lang="de-DE" dirty="0" err="1" smtClean="0"/>
+              <a:t>Plugin</a:t>
+            </a:r>
+            <a:r>
+              <a:rPr lang="de-DE" dirty="0" smtClean="0"/>
+              <a:t> Implementation</a:t>
+            </a:r>
           </a:p>
           <a:p>
             <a:pPr lvl="1"/>
             <a:r>
-              <a:rPr lang="de-DE" dirty="0" err="1"/>
-              <a:t>Allows</a:t>
-            </a:r>
-            <a:r>
-              <a:rPr lang="de-DE" dirty="0"/>
-              <a:t> </a:t>
-            </a:r>
-            <a:r>
-              <a:rPr lang="de-DE" dirty="0" err="1"/>
-              <a:t>typesafe</a:t>
-            </a:r>
-            <a:r>
-              <a:rPr lang="de-DE" dirty="0"/>
-              <a:t> </a:t>
-            </a:r>
-            <a:r>
-              <a:rPr lang="de-DE" dirty="0" err="1"/>
-              <a:t>cast</a:t>
-            </a:r>
-            <a:r>
-              <a:rPr lang="de-DE" dirty="0"/>
-              <a:t> </a:t>
-            </a:r>
-            <a:r>
-              <a:rPr lang="de-DE" dirty="0" err="1"/>
-              <a:t>to</a:t>
-            </a:r>
-            <a:r>
-              <a:rPr lang="de-DE" dirty="0"/>
-              <a:t> </a:t>
-            </a:r>
-            <a:r>
-              <a:rPr lang="de-DE" dirty="0" err="1"/>
-              <a:t>derived</a:t>
-            </a:r>
-            <a:r>
-              <a:rPr lang="de-DE" dirty="0"/>
-              <a:t> </a:t>
-            </a:r>
-            <a:r>
-              <a:rPr lang="de-DE" dirty="0" err="1"/>
-              <a:t>Plugin</a:t>
-            </a:r>
-            <a:r>
-              <a:rPr lang="de-DE" dirty="0"/>
-              <a:t>&lt;I&gt;</a:t>
-            </a:r>
-          </a:p>
-          <a:p>
-            <a:r>
-              <a:rPr lang="de-DE" dirty="0"/>
-              <a:t>The </a:t>
-            </a:r>
-            <a:r>
-              <a:rPr lang="de-DE" dirty="0" err="1"/>
-              <a:t>Plugin</a:t>
-            </a:r>
-            <a:r>
-              <a:rPr lang="de-DE" dirty="0"/>
-              <a:t>&lt;I&gt;</a:t>
-            </a:r>
-          </a:p>
-          <a:p>
-            <a:pPr lvl="1"/>
-            <a:r>
-              <a:rPr lang="de-DE" dirty="0" err="1"/>
-              <a:t>Is</a:t>
-            </a:r>
-            <a:r>
-              <a:rPr lang="de-DE" dirty="0"/>
-              <a:t> a </a:t>
-            </a:r>
-            <a:r>
-              <a:rPr lang="de-DE" dirty="0" err="1"/>
-              <a:t>factory</a:t>
-            </a:r>
-            <a:r>
-              <a:rPr lang="de-DE" dirty="0"/>
-              <a:t> </a:t>
-            </a:r>
-            <a:r>
-              <a:rPr lang="de-DE" dirty="0" err="1"/>
-              <a:t>interface</a:t>
-            </a:r>
-            <a:r>
-              <a:rPr lang="de-DE" dirty="0"/>
-              <a:t> </a:t>
-            </a:r>
-            <a:r>
-              <a:rPr lang="de-DE" dirty="0" err="1"/>
-              <a:t>to</a:t>
-            </a:r>
-            <a:r>
-              <a:rPr lang="de-DE" dirty="0"/>
-              <a:t> </a:t>
-            </a:r>
-            <a:r>
-              <a:rPr lang="de-DE" dirty="0" err="1"/>
-              <a:t>create</a:t>
-            </a:r>
-            <a:r>
-              <a:rPr lang="de-DE" dirty="0"/>
-              <a:t> </a:t>
-            </a:r>
-            <a:r>
-              <a:rPr lang="de-DE" dirty="0" err="1"/>
-              <a:t>objects</a:t>
-            </a:r>
-            <a:r>
-              <a:rPr lang="de-DE" dirty="0"/>
-              <a:t> </a:t>
-            </a:r>
-            <a:r>
-              <a:rPr lang="de-DE" dirty="0" err="1"/>
-              <a:t>implementing</a:t>
-            </a:r>
-            <a:r>
-              <a:rPr lang="de-DE" dirty="0"/>
-              <a:t> </a:t>
-            </a:r>
-            <a:r>
-              <a:rPr lang="de-DE" dirty="0" smtClean="0"/>
-              <a:t>I</a:t>
-            </a:r>
-          </a:p>
-          <a:p>
-            <a:r>
-              <a:rPr lang="de-DE" dirty="0" smtClean="0"/>
-              <a:t>The </a:t>
-            </a:r>
-            <a:r>
-              <a:rPr lang="de-DE" dirty="0" err="1" smtClean="0"/>
-              <a:t>BasicPlugin</a:t>
-            </a:r>
-            <a:r>
-              <a:rPr lang="de-DE" dirty="0" smtClean="0"/>
-              <a:t>&lt;T, I&gt; </a:t>
-            </a:r>
-          </a:p>
-          <a:p>
-            <a:pPr lvl="1"/>
-            <a:r>
-              <a:rPr lang="de-DE" dirty="0" err="1" smtClean="0"/>
-              <a:t>Is</a:t>
-            </a:r>
-            <a:r>
-              <a:rPr lang="de-DE" dirty="0" smtClean="0"/>
-              <a:t> a </a:t>
-            </a:r>
-            <a:r>
-              <a:rPr lang="de-DE" dirty="0" err="1" smtClean="0"/>
-              <a:t>factory</a:t>
-            </a:r>
-            <a:r>
-              <a:rPr lang="de-DE" dirty="0" smtClean="0"/>
-              <a:t> </a:t>
-            </a:r>
-            <a:r>
-              <a:rPr lang="de-DE" dirty="0" err="1" smtClean="0"/>
-              <a:t>to</a:t>
-            </a:r>
-            <a:r>
-              <a:rPr lang="de-DE" dirty="0" smtClean="0"/>
-              <a:t> </a:t>
-            </a:r>
-            <a:r>
-              <a:rPr lang="de-DE" dirty="0" err="1" smtClean="0"/>
-              <a:t>create</a:t>
-            </a:r>
-            <a:r>
-              <a:rPr lang="de-DE" dirty="0" smtClean="0"/>
-              <a:t> T </a:t>
-            </a:r>
-            <a:r>
-              <a:rPr lang="de-DE" dirty="0" err="1" smtClean="0"/>
-              <a:t>implementing</a:t>
-            </a:r>
-            <a:r>
-              <a:rPr lang="de-DE" dirty="0" smtClean="0"/>
-              <a:t> I</a:t>
-            </a:r>
-          </a:p>
-          <a:p>
-            <a:pPr lvl="1"/>
-            <a:r>
-              <a:rPr lang="de-DE" dirty="0">
+              <a:rPr lang="de-DE" dirty="0" smtClean="0">
                 <a:solidFill>
                   <a:schemeClr val="accent5">
                     <a:lumMod val="75000"/>
                   </a:schemeClr>
                 </a:solidFill>
               </a:rPr>
-              <a:t>Normal </a:t>
-            </a:r>
-            <a:r>
-              <a:rPr lang="de-DE" dirty="0" err="1">
+              <a:t>Exports a variable, not </a:t>
+            </a:r>
+            <a:r>
+              <a:rPr lang="de-DE" dirty="0" err="1" smtClean="0">
                 <a:solidFill>
                   <a:schemeClr val="accent5">
                     <a:lumMod val="75000"/>
                   </a:schemeClr>
                 </a:solidFill>
               </a:rPr>
-              <a:t>Ctor</a:t>
-            </a:r>
-            <a:r>
-              <a:rPr lang="de-DE" dirty="0">
+              <a:t>functions</a:t>
+            </a:r>
+            <a:r>
+              <a:rPr lang="de-DE" dirty="0" smtClean="0">
                 <a:solidFill>
                   <a:schemeClr val="accent5">
                     <a:lumMod val="75000"/>
                   </a:schemeClr>
                 </a:solidFill>
               </a:rPr>
-              <a:t> </a:t>
-            </a:r>
-            <a:r>
-              <a:rPr lang="de-DE" dirty="0" err="1">
+              <a:t> (also type </a:t>
+            </a:r>
+            <a:r>
+              <a:rPr lang="de-DE" dirty="0" err="1" smtClean="0">
                 <a:solidFill>
                   <a:schemeClr val="accent5">
                     <a:lumMod val="75000"/>
                   </a:schemeClr>
                 </a:solidFill>
               </a:rPr>
-              <a:t>instead</a:t>
-            </a:r>
-            <a:r>
-              <a:rPr lang="de-DE" dirty="0">
+              <a:t>safe</a:t>
+            </a:r>
+            <a:r>
+              <a:rPr lang="de-DE" dirty="0" smtClean="0">
                 <a:solidFill>
                   <a:schemeClr val="accent5">
                     <a:lumMod val="75000"/>
                   </a:schemeClr>
                 </a:solidFill>
               </a:rPr>
-              <a:t> </a:t>
-            </a:r>
-            <a:r>
-              <a:rPr lang="de-DE" dirty="0" err="1">
+              <a:t>!!!)</a:t>
+            </a:r>
+          </a:p>
+          <a:p>
+            <a:pPr lvl="1"/>
+            <a:r>
+              <a:rPr lang="de-DE" dirty="0" smtClean="0">
                 <a:solidFill>
                   <a:schemeClr val="accent5">
                     <a:lumMod val="75000"/>
                   </a:schemeClr>
                 </a:solidFill>
               </a:rPr>
-              <a:t>of</a:t>
-            </a:r>
-            <a:r>
-              <a:rPr lang="de-DE" dirty="0">
+              <a:t>C </a:t>
+            </a:r>
+            <a:r>
+              <a:rPr lang="de-DE" dirty="0" err="1" smtClean="0">
                 <a:solidFill>
                   <a:schemeClr val="accent5">
                     <a:lumMod val="75000"/>
                   </a:schemeClr>
                 </a:solidFill>
               </a:rPr>
-              <a:t> </a:t>
-            </a:r>
-            <a:r>
-              <a:rPr lang="de-DE" dirty="0" err="1" smtClean="0">
+              <a:t>Linkage</a:t>
+            </a:r>
+            <a:r>
+              <a:rPr lang="de-DE" dirty="0" smtClean="0">
                 <a:solidFill>
                   <a:schemeClr val="accent5">
                     <a:lumMod val="75000"/>
                   </a:schemeClr>
                 </a:solidFill>
               </a:rPr>
-              <a:t>init</a:t>
-            </a:r>
-            <a:r>
-              <a:rPr lang="de-DE" dirty="0" smtClean="0">
+              <a:t>, </a:t>
+            </a:r>
+            <a:r>
+              <a:rPr lang="de-DE" dirty="0" err="1" smtClean="0">
                 <a:solidFill>
                   <a:schemeClr val="accent5">
                     <a:lumMod val="75000"/>
                   </a:schemeClr>
                 </a:solidFill>
               </a:rPr>
-              <a:t>/</a:t>
-            </a:r>
-            <a:r>
-              <a:rPr lang="de-DE" dirty="0" err="1" smtClean="0">
+              <a:t>even</a:t>
+            </a:r>
+            <a:r>
+              <a:rPr lang="de-DE" dirty="0" smtClean="0">
                 <a:solidFill>
                   <a:schemeClr val="accent5">
                     <a:lumMod val="75000"/>
                   </a:schemeClr>
                 </a:solidFill>
               </a:rPr>
-              <a:t>fini</a:t>
+              <a:t> </a:t>
+            </a:r>
+            <a:r>
+              <a:rPr lang="de-DE" dirty="0" err="1" smtClean="0">
+                <a:solidFill>
+                  <a:schemeClr val="accent5">
+                    <a:lumMod val="75000"/>
+                  </a:schemeClr>
+                </a:solidFill>
+              </a:rPr>
+              <a:t>though</a:t>
+            </a:r>
+            <a:r>
+              <a:rPr lang="de-DE" dirty="0" smtClean="0">
+                <a:solidFill>
+                  <a:schemeClr val="accent5">
+                    <a:lumMod val="75000"/>
+                  </a:schemeClr>
+                </a:solidFill>
+              </a:rPr>
+              <a:t> </a:t>
+            </a:r>
+            <a:r>
+              <a:rPr lang="de-DE" dirty="0" err="1" smtClean="0">
+                <a:solidFill>
+                  <a:schemeClr val="accent5">
+                    <a:lumMod val="75000"/>
+                  </a:schemeClr>
+                </a:solidFill>
+              </a:rPr>
+              <a:t>Plugin</a:t>
+            </a:r>
+            <a:r>
+              <a:rPr lang="de-DE" dirty="0" smtClean="0">
+                <a:solidFill>
+                  <a:schemeClr val="accent5">
+                    <a:lumMod val="75000"/>
+                  </a:schemeClr>
+                </a:solidFill>
+              </a:rPr>
+              <a:t> </a:t>
+            </a:r>
+            <a:r>
+              <a:rPr lang="de-DE" dirty="0" err="1" smtClean="0">
+                <a:solidFill>
+                  <a:schemeClr val="accent5">
+                    <a:lumMod val="75000"/>
+                  </a:schemeClr>
+                </a:solidFill>
+              </a:rPr>
+              <a:t>is</a:t>
+            </a:r>
+            <a:r>
+              <a:rPr lang="de-DE" dirty="0" smtClean="0">
+                <a:solidFill>
+                  <a:schemeClr val="accent5">
+                    <a:lumMod val="75000"/>
+                  </a:schemeClr>
+                </a:solidFill>
+              </a:rPr>
+              <a:t> a C++ </a:t>
+            </a:r>
+            <a:r>
+              <a:rPr lang="de-DE" dirty="0" err="1" smtClean="0">
+                <a:solidFill>
+                  <a:schemeClr val="accent5">
+                    <a:lumMod val="75000"/>
+                  </a:schemeClr>
+                </a:solidFill>
+              </a:rPr>
+              <a:t>class</a:t>
             </a:r>
             <a:endParaRPr lang="de-DE" dirty="0" smtClean="0">
               <a:solidFill>
@@ -5395,10 +5123,196 @@
           </a:p>
         </p:txBody>
       </p:sp>
+      <p:sp>
+        <p:nvSpPr>
+          <p:cNvPr id="6" name="Inhaltsplatzhalter 2"/>
+          <p:cNvSpPr txBox="1">
+            <a:spLocks/>
+          </p:cNvSpPr>
+          <p:nvPr/>
+        </p:nvSpPr>
+        <p:spPr>
+          <a:xfrm>
+            <a:off x="179512" y="2636912"/>
+            <a:ext cx="8856984" cy="432048"/>
+          </a:xfrm>
+          <a:prstGeom prst="rect">
+            <a:avLst/>
+          </a:prstGeom>
+        </p:spPr>
+        <p:txBody>
+          <a:bodyPr vert="horz" lIns="91440" tIns="45720" rIns="91440" bIns="45720" rtlCol="0">
+            <a:normAutofit/>
+          </a:bodyPr>
+          <a:lstStyle>
+            <a:lvl1pPr marL="342900" indent="-342900" algn="l" defTabSz="914400" rtl="0" eaLnBrk="1" latinLnBrk="0" hangingPunct="1">
+              <a:spcBef>
+                <a:spcPct val="20000"/>
+              </a:spcBef>
+              <a:buFont typeface="Arial" pitchFamily="34" charset="0"/>
+              <a:buChar char="•"/>
+              <a:defRPr sz="3200" kern="1200">
+                <a:solidFill>
+                  <a:schemeClr val="tx1"/>
+                </a:solidFill>
+                <a:latin typeface="+mn-lt"/>
+                <a:ea typeface="+mn-ea"/>
+                <a:cs typeface="+mn-cs"/>
+              </a:defRPr>
+            </a:lvl1pPr>
+            <a:lvl2pPr marL="742950" indent="-285750" algn="l" defTabSz="914400" rtl="0" eaLnBrk="1" latinLnBrk="0" hangingPunct="1">
+              <a:spcBef>
+                <a:spcPct val="20000"/>
+              </a:spcBef>
+              <a:buFont typeface="Arial" pitchFamily="34" charset="0"/>
+              <a:buChar char="–"/>
+              <a:defRPr sz="2800" kern="1200">
+                <a:solidFill>
+                  <a:schemeClr val="tx1"/>
+                </a:solidFill>
+                <a:latin typeface="+mn-lt"/>
+                <a:ea typeface="+mn-ea"/>
+                <a:cs typeface="+mn-cs"/>
+              </a:defRPr>
+            </a:lvl2pPr>
+            <a:lvl3pPr marL="1143000" indent="-228600" algn="l" defTabSz="914400" rtl="0" eaLnBrk="1" latinLnBrk="0" hangingPunct="1">
+              <a:spcBef>
+                <a:spcPct val="20000"/>
+              </a:spcBef>
+              <a:buFont typeface="Arial" pitchFamily="34" charset="0"/>
+              <a:buChar char="•"/>
+              <a:defRPr sz="2400" kern="1200">
+                <a:solidFill>
+                  <a:schemeClr val="tx1"/>
+                </a:solidFill>
+                <a:latin typeface="+mn-lt"/>
+                <a:ea typeface="+mn-ea"/>
+                <a:cs typeface="+mn-cs"/>
+              </a:defRPr>
+            </a:lvl3pPr>
+            <a:lvl4pPr marL="1600200" indent="-228600" algn="l" defTabSz="914400" rtl="0" eaLnBrk="1" latinLnBrk="0" hangingPunct="1">
+              <a:spcBef>
+                <a:spcPct val="20000"/>
+              </a:spcBef>
+              <a:buFont typeface="Arial" pitchFamily="34" charset="0"/>
+              <a:buChar char="–"/>
+              <a:defRPr sz="2000" kern="1200">
+                <a:solidFill>
+                  <a:schemeClr val="tx1"/>
+                </a:solidFill>
+                <a:latin typeface="+mn-lt"/>
+                <a:ea typeface="+mn-ea"/>
+                <a:cs typeface="+mn-cs"/>
+              </a:defRPr>
+            </a:lvl4pPr>
+            <a:lvl5pPr marL="2057400" indent="-228600" algn="l" defTabSz="914400" rtl="0" eaLnBrk="1" latinLnBrk="0" hangingPunct="1">
+              <a:spcBef>
+                <a:spcPct val="20000"/>
+              </a:spcBef>
+              <a:buFont typeface="Arial" pitchFamily="34" charset="0"/>
+              <a:buChar char="»"/>
+              <a:defRPr sz="2000" kern="1200">
+                <a:solidFill>
+                  <a:schemeClr val="tx1"/>
+                </a:solidFill>
+                <a:latin typeface="+mn-lt"/>
+                <a:ea typeface="+mn-ea"/>
+                <a:cs typeface="+mn-cs"/>
+              </a:defRPr>
+            </a:lvl5pPr>
+            <a:lvl6pPr marL="2514600" indent="-228600" algn="l" defTabSz="914400" rtl="0" eaLnBrk="1" latinLnBrk="0" hangingPunct="1">
+              <a:spcBef>
+                <a:spcPct val="20000"/>
+              </a:spcBef>
+              <a:buFont typeface="Arial" pitchFamily="34" charset="0"/>
+              <a:buChar char="•"/>
+              <a:defRPr sz="2000" kern="1200">
+                <a:solidFill>
+                  <a:schemeClr val="tx1"/>
+                </a:solidFill>
+                <a:latin typeface="+mn-lt"/>
+                <a:ea typeface="+mn-ea"/>
+                <a:cs typeface="+mn-cs"/>
+              </a:defRPr>
+            </a:lvl6pPr>
+            <a:lvl7pPr marL="2971800" indent="-228600" algn="l" defTabSz="914400" rtl="0" eaLnBrk="1" latinLnBrk="0" hangingPunct="1">
+              <a:spcBef>
+                <a:spcPct val="20000"/>
+              </a:spcBef>
+              <a:buFont typeface="Arial" pitchFamily="34" charset="0"/>
+              <a:buChar char="•"/>
+              <a:defRPr sz="2000" kern="1200">
+                <a:solidFill>
+                  <a:schemeClr val="tx1"/>
+                </a:solidFill>
+                <a:latin typeface="+mn-lt"/>
+                <a:ea typeface="+mn-ea"/>
+                <a:cs typeface="+mn-cs"/>
+              </a:defRPr>
+            </a:lvl7pPr>
+            <a:lvl8pPr marL="3429000" indent="-228600" algn="l" defTabSz="914400" rtl="0" eaLnBrk="1" latinLnBrk="0" hangingPunct="1">
+              <a:spcBef>
+                <a:spcPct val="20000"/>
+              </a:spcBef>
+              <a:buFont typeface="Arial" pitchFamily="34" charset="0"/>
+              <a:buChar char="•"/>
+              <a:defRPr sz="2000" kern="1200">
+                <a:solidFill>
+                  <a:schemeClr val="tx1"/>
+                </a:solidFill>
+                <a:latin typeface="+mn-lt"/>
+                <a:ea typeface="+mn-ea"/>
+                <a:cs typeface="+mn-cs"/>
+              </a:defRPr>
+            </a:lvl8pPr>
+            <a:lvl9pPr marL="3886200" indent="-228600" algn="l" defTabSz="914400" rtl="0" eaLnBrk="1" latinLnBrk="0" hangingPunct="1">
+              <a:spcBef>
+                <a:spcPct val="20000"/>
+              </a:spcBef>
+              <a:buFont typeface="Arial" pitchFamily="34" charset="0"/>
+              <a:buChar char="•"/>
+              <a:defRPr sz="2000" kern="1200">
+                <a:solidFill>
+                  <a:schemeClr val="tx1"/>
+                </a:solidFill>
+                <a:latin typeface="+mn-lt"/>
+                <a:ea typeface="+mn-ea"/>
+                <a:cs typeface="+mn-cs"/>
+              </a:defRPr>
+            </a:lvl9pPr>
+          </a:lstStyle>
+          <a:p>
+            <a:pPr marL="0" indent="0">
+              <a:buNone/>
+            </a:pPr>
+            <a:r>
+              <a:rPr lang="de-DE" sz="2000" u="sng" dirty="0" smtClean="0"/>
+              <a:t>EnglishGreeter.cpp  (</a:t>
+            </a:r>
+            <a:r>
+              <a:rPr lang="de-DE" sz="2000" u="sng" dirty="0" err="1" smtClean="0"/>
+              <a:t>built</a:t>
+            </a:r>
+            <a:r>
+              <a:rPr lang="de-DE" sz="2000" u="sng" dirty="0" smtClean="0"/>
+              <a:t> </a:t>
+            </a:r>
+            <a:r>
+              <a:rPr lang="de-DE" sz="2000" u="sng" dirty="0" err="1" smtClean="0"/>
+              <a:t>to</a:t>
+            </a:r>
+            <a:r>
+              <a:rPr lang="de-DE" sz="2000" u="sng" dirty="0" smtClean="0"/>
+              <a:t> plugin.so)</a:t>
+            </a:r>
+            <a:endParaRPr lang="de-DE" sz="2000" u="sng" dirty="0"/>
+          </a:p>
+        </p:txBody>
+      </p:sp>
     </p:spTree>
     <p:extLst>
       <p:ext uri="{BB962C8B-B14F-4D97-AF65-F5344CB8AC3E}">
-        <p14:creationId xmlns:p14="http://schemas.microsoft.com/office/powerpoint/2010/main" val="1674358896"/>
+        <p14:creationId xmlns:p14="http://schemas.microsoft.com/office/powerpoint/2010/main" val="3197550836"/>
       </p:ext>
     </p:extLst>
   </p:cSld>
@@ -5481,6 +5395,898 @@
         </p:nvSpPr>
         <p:spPr>
           <a:xfrm>
+            <a:off x="179512" y="3545632"/>
+            <a:ext cx="4824536" cy="3267744"/>
+          </a:xfrm>
+        </p:spPr>
+        <p:txBody>
+          <a:bodyPr>
+            <a:normAutofit fontScale="92500" lnSpcReduction="10000"/>
+          </a:bodyPr>
+          <a:lstStyle/>
+          <a:p>
+            <a:pPr marL="0" indent="0">
+              <a:buNone/>
+            </a:pPr>
+            <a:r>
+              <a:rPr lang="de-DE" sz="1600" dirty="0" err="1" smtClean="0">
+                <a:latin typeface="Consolas" pitchFamily="49" charset="0"/>
+                <a:cs typeface="Consolas" pitchFamily="49" charset="0"/>
+              </a:rPr>
+              <a:t>PluginId</a:t>
+            </a:r>
+            <a:endParaRPr lang="de-DE" sz="1600" dirty="0" smtClean="0">
+              <a:latin typeface="Consolas" pitchFamily="49" charset="0"/>
+              <a:cs typeface="Consolas" pitchFamily="49" charset="0"/>
+            </a:endParaRPr>
+          </a:p>
+          <a:p>
+            <a:pPr marL="0" indent="0">
+              <a:buNone/>
+            </a:pPr>
+            <a:r>
+              <a:rPr lang="de-DE" sz="1600" dirty="0">
+                <a:latin typeface="Consolas" pitchFamily="49" charset="0"/>
+                <a:cs typeface="Consolas" pitchFamily="49" charset="0"/>
+              </a:rPr>
+              <a:t> </a:t>
+            </a:r>
+            <a:r>
+              <a:rPr lang="de-DE" sz="1600" dirty="0" smtClean="0">
+                <a:latin typeface="Consolas" pitchFamily="49" charset="0"/>
+                <a:cs typeface="Consolas" pitchFamily="49" charset="0"/>
+              </a:rPr>
+              <a:t>  + </a:t>
+            </a:r>
+            <a:r>
+              <a:rPr lang="de-DE" sz="1600" i="1" dirty="0" smtClean="0">
+                <a:latin typeface="Consolas" pitchFamily="49" charset="0"/>
+                <a:cs typeface="Consolas" pitchFamily="49" charset="0"/>
+              </a:rPr>
+              <a:t>type() : </a:t>
+            </a:r>
+            <a:r>
+              <a:rPr lang="de-DE" sz="1600" i="1" dirty="0" err="1" smtClean="0">
+                <a:latin typeface="Consolas" pitchFamily="49" charset="0"/>
+                <a:cs typeface="Consolas" pitchFamily="49" charset="0"/>
+              </a:rPr>
+              <a:t>type_info</a:t>
+            </a:r>
+            <a:endParaRPr lang="de-DE" sz="1600" i="1" dirty="0" smtClean="0">
+              <a:latin typeface="Consolas" pitchFamily="49" charset="0"/>
+              <a:cs typeface="Consolas" pitchFamily="49" charset="0"/>
+            </a:endParaRPr>
+          </a:p>
+          <a:p>
+            <a:pPr marL="0" indent="0">
+              <a:buNone/>
+            </a:pPr>
+            <a:r>
+              <a:rPr lang="de-DE" sz="2800" dirty="0" smtClean="0">
+                <a:latin typeface="Consolas" pitchFamily="49" charset="0"/>
+                <a:cs typeface="Consolas" pitchFamily="49" charset="0"/>
+              </a:rPr>
+              <a:t>     ↑</a:t>
+            </a:r>
+            <a:endParaRPr lang="de-DE" sz="2800" dirty="0">
+              <a:latin typeface="Consolas" pitchFamily="49" charset="0"/>
+              <a:cs typeface="Consolas" pitchFamily="49" charset="0"/>
+            </a:endParaRPr>
+          </a:p>
+          <a:p>
+            <a:pPr marL="0" indent="0">
+              <a:buNone/>
+            </a:pPr>
+            <a:r>
+              <a:rPr lang="de-DE" sz="1600" dirty="0" err="1" smtClean="0">
+                <a:latin typeface="Consolas" pitchFamily="49" charset="0"/>
+                <a:cs typeface="Consolas" pitchFamily="49" charset="0"/>
+              </a:rPr>
+              <a:t>Plugin</a:t>
+            </a:r>
+            <a:r>
+              <a:rPr lang="de-DE" sz="1600" dirty="0" smtClean="0">
+                <a:latin typeface="Consolas" pitchFamily="49" charset="0"/>
+                <a:cs typeface="Consolas" pitchFamily="49" charset="0"/>
+              </a:rPr>
+              <a:t>&lt;I&gt;</a:t>
+            </a:r>
+          </a:p>
+          <a:p>
+            <a:pPr marL="0" indent="0">
+              <a:buNone/>
+            </a:pPr>
+            <a:r>
+              <a:rPr lang="de-DE" sz="1600" dirty="0">
+                <a:latin typeface="Consolas" pitchFamily="49" charset="0"/>
+                <a:cs typeface="Consolas" pitchFamily="49" charset="0"/>
+              </a:rPr>
+              <a:t> </a:t>
+            </a:r>
+            <a:r>
+              <a:rPr lang="de-DE" sz="1600" dirty="0" smtClean="0">
+                <a:latin typeface="Consolas" pitchFamily="49" charset="0"/>
+                <a:cs typeface="Consolas" pitchFamily="49" charset="0"/>
+              </a:rPr>
+              <a:t>  + type() </a:t>
+            </a:r>
+            <a:r>
+              <a:rPr lang="de-DE" sz="1600" dirty="0">
+                <a:latin typeface="Consolas" pitchFamily="49" charset="0"/>
+                <a:cs typeface="Consolas" pitchFamily="49" charset="0"/>
+              </a:rPr>
+              <a:t>: </a:t>
+            </a:r>
+            <a:r>
+              <a:rPr lang="de-DE" sz="1600" dirty="0" err="1" smtClean="0">
+                <a:latin typeface="Consolas" pitchFamily="49" charset="0"/>
+                <a:cs typeface="Consolas" pitchFamily="49" charset="0"/>
+              </a:rPr>
+              <a:t>type_info</a:t>
+            </a:r>
+            <a:endParaRPr lang="de-DE" sz="1600" dirty="0" smtClean="0">
+              <a:latin typeface="Consolas" pitchFamily="49" charset="0"/>
+              <a:cs typeface="Consolas" pitchFamily="49" charset="0"/>
+            </a:endParaRPr>
+          </a:p>
+          <a:p>
+            <a:pPr marL="0" indent="0">
+              <a:buNone/>
+            </a:pPr>
+            <a:r>
+              <a:rPr lang="de-DE" sz="1600" dirty="0">
+                <a:latin typeface="Consolas" pitchFamily="49" charset="0"/>
+                <a:cs typeface="Consolas" pitchFamily="49" charset="0"/>
+              </a:rPr>
+              <a:t> </a:t>
+            </a:r>
+            <a:r>
+              <a:rPr lang="de-DE" sz="1600" dirty="0" smtClean="0">
+                <a:latin typeface="Consolas" pitchFamily="49" charset="0"/>
+                <a:cs typeface="Consolas" pitchFamily="49" charset="0"/>
+              </a:rPr>
+              <a:t>  + </a:t>
+            </a:r>
+            <a:r>
+              <a:rPr lang="de-DE" sz="1600" i="1" dirty="0" err="1" smtClean="0">
+                <a:latin typeface="Consolas" pitchFamily="49" charset="0"/>
+                <a:cs typeface="Consolas" pitchFamily="49" charset="0"/>
+              </a:rPr>
+              <a:t>create</a:t>
+            </a:r>
+            <a:r>
+              <a:rPr lang="de-DE" sz="1600" i="1" dirty="0" smtClean="0">
+                <a:latin typeface="Consolas" pitchFamily="49" charset="0"/>
+                <a:cs typeface="Consolas" pitchFamily="49" charset="0"/>
+              </a:rPr>
+              <a:t>() : I*</a:t>
+            </a:r>
+          </a:p>
+          <a:p>
+            <a:pPr marL="0" indent="0">
+              <a:buNone/>
+            </a:pPr>
+            <a:r>
+              <a:rPr lang="de-DE" sz="1600" i="1" dirty="0">
+                <a:latin typeface="Consolas" pitchFamily="49" charset="0"/>
+                <a:cs typeface="Consolas" pitchFamily="49" charset="0"/>
+              </a:rPr>
+              <a:t> </a:t>
+            </a:r>
+            <a:r>
+              <a:rPr lang="de-DE" sz="1600" i="1" dirty="0" smtClean="0">
+                <a:latin typeface="Consolas" pitchFamily="49" charset="0"/>
+                <a:cs typeface="Consolas" pitchFamily="49" charset="0"/>
+              </a:rPr>
+              <a:t>  + </a:t>
+            </a:r>
+            <a:r>
+              <a:rPr lang="de-DE" sz="1600" i="1" dirty="0" err="1" smtClean="0">
+                <a:latin typeface="Consolas" pitchFamily="49" charset="0"/>
+                <a:cs typeface="Consolas" pitchFamily="49" charset="0"/>
+              </a:rPr>
+              <a:t>feature</a:t>
+            </a:r>
+            <a:r>
+              <a:rPr lang="de-DE" sz="1600" i="1" dirty="0" smtClean="0">
+                <a:latin typeface="Consolas" pitchFamily="49" charset="0"/>
+                <a:cs typeface="Consolas" pitchFamily="49" charset="0"/>
+              </a:rPr>
+              <a:t>() : </a:t>
+            </a:r>
+            <a:r>
+              <a:rPr lang="de-DE" sz="1600" i="1" dirty="0" err="1" smtClean="0">
+                <a:latin typeface="Consolas" pitchFamily="49" charset="0"/>
+                <a:cs typeface="Consolas" pitchFamily="49" charset="0"/>
+              </a:rPr>
+              <a:t>string</a:t>
+            </a:r>
+            <a:endParaRPr lang="de-DE" sz="1600" i="1" dirty="0" smtClean="0">
+              <a:latin typeface="Consolas" pitchFamily="49" charset="0"/>
+              <a:cs typeface="Consolas" pitchFamily="49" charset="0"/>
+            </a:endParaRPr>
+          </a:p>
+          <a:p>
+            <a:pPr marL="0" indent="0">
+              <a:buNone/>
+            </a:pPr>
+            <a:r>
+              <a:rPr lang="de-DE" sz="2800" dirty="0" smtClean="0">
+                <a:latin typeface="Consolas" pitchFamily="49" charset="0"/>
+                <a:cs typeface="Consolas" pitchFamily="49" charset="0"/>
+              </a:rPr>
+              <a:t>     ↑</a:t>
+            </a:r>
+            <a:endParaRPr lang="de-DE" sz="1600" dirty="0">
+              <a:latin typeface="Consolas" pitchFamily="49" charset="0"/>
+              <a:cs typeface="Consolas" pitchFamily="49" charset="0"/>
+            </a:endParaRPr>
+          </a:p>
+          <a:p>
+            <a:pPr marL="0" indent="0">
+              <a:buNone/>
+            </a:pPr>
+            <a:r>
+              <a:rPr lang="de-DE" sz="1600" dirty="0" err="1" smtClean="0">
+                <a:latin typeface="Consolas" pitchFamily="49" charset="0"/>
+                <a:cs typeface="Consolas" pitchFamily="49" charset="0"/>
+              </a:rPr>
+              <a:t>BasicPlugin</a:t>
+            </a:r>
+            <a:r>
+              <a:rPr lang="de-DE" sz="1600" dirty="0" smtClean="0">
+                <a:latin typeface="Consolas" pitchFamily="49" charset="0"/>
+                <a:cs typeface="Consolas" pitchFamily="49" charset="0"/>
+              </a:rPr>
+              <a:t>&lt;T, I&gt;</a:t>
+            </a:r>
+          </a:p>
+          <a:p>
+            <a:pPr marL="0" indent="0">
+              <a:buNone/>
+            </a:pPr>
+            <a:r>
+              <a:rPr lang="de-DE" sz="1600" dirty="0">
+                <a:latin typeface="Consolas" pitchFamily="49" charset="0"/>
+                <a:cs typeface="Consolas" pitchFamily="49" charset="0"/>
+              </a:rPr>
+              <a:t> </a:t>
+            </a:r>
+            <a:r>
+              <a:rPr lang="de-DE" sz="1600" dirty="0" smtClean="0">
+                <a:latin typeface="Consolas" pitchFamily="49" charset="0"/>
+                <a:cs typeface="Consolas" pitchFamily="49" charset="0"/>
+              </a:rPr>
+              <a:t>  + </a:t>
+            </a:r>
+            <a:r>
+              <a:rPr lang="de-DE" sz="1600" dirty="0" err="1" smtClean="0">
+                <a:latin typeface="Consolas" pitchFamily="49" charset="0"/>
+                <a:cs typeface="Consolas" pitchFamily="49" charset="0"/>
+              </a:rPr>
+              <a:t>create</a:t>
+            </a:r>
+            <a:r>
+              <a:rPr lang="de-DE" sz="1600" dirty="0" smtClean="0">
+                <a:latin typeface="Consolas" pitchFamily="49" charset="0"/>
+                <a:cs typeface="Consolas" pitchFamily="49" charset="0"/>
+              </a:rPr>
+              <a:t>() : I*</a:t>
+            </a:r>
+          </a:p>
+          <a:p>
+            <a:pPr marL="0" indent="0">
+              <a:buNone/>
+            </a:pPr>
+            <a:r>
+              <a:rPr lang="de-DE" sz="1600" dirty="0">
+                <a:latin typeface="Consolas" pitchFamily="49" charset="0"/>
+                <a:cs typeface="Consolas" pitchFamily="49" charset="0"/>
+              </a:rPr>
+              <a:t> </a:t>
+            </a:r>
+            <a:r>
+              <a:rPr lang="de-DE" sz="1600" dirty="0" smtClean="0">
+                <a:latin typeface="Consolas" pitchFamily="49" charset="0"/>
+                <a:cs typeface="Consolas" pitchFamily="49" charset="0"/>
+              </a:rPr>
+              <a:t>  + </a:t>
+            </a:r>
+            <a:r>
+              <a:rPr lang="de-DE" sz="1600" dirty="0" err="1" smtClean="0">
+                <a:latin typeface="Consolas" pitchFamily="49" charset="0"/>
+                <a:cs typeface="Consolas" pitchFamily="49" charset="0"/>
+              </a:rPr>
+              <a:t>feature</a:t>
+            </a:r>
+            <a:r>
+              <a:rPr lang="de-DE" sz="1600" dirty="0" smtClean="0">
+                <a:latin typeface="Consolas" pitchFamily="49" charset="0"/>
+                <a:cs typeface="Consolas" pitchFamily="49" charset="0"/>
+              </a:rPr>
+              <a:t>() : </a:t>
+            </a:r>
+            <a:r>
+              <a:rPr lang="de-DE" sz="1600" dirty="0" err="1" smtClean="0">
+                <a:latin typeface="Consolas" pitchFamily="49" charset="0"/>
+                <a:cs typeface="Consolas" pitchFamily="49" charset="0"/>
+              </a:rPr>
+              <a:t>string</a:t>
+            </a:r>
+            <a:endParaRPr lang="en-US" sz="1600" dirty="0">
+              <a:latin typeface="Consolas" pitchFamily="49" charset="0"/>
+              <a:cs typeface="Consolas" pitchFamily="49" charset="0"/>
+            </a:endParaRPr>
+          </a:p>
+          <a:p>
+            <a:pPr marL="457200" lvl="1" indent="0">
+              <a:buNone/>
+            </a:pPr>
+            <a:endParaRPr lang="de-DE" dirty="0">
+              <a:solidFill>
+                <a:schemeClr val="tx2">
+                  <a:lumMod val="75000"/>
+                </a:schemeClr>
+              </a:solidFill>
+            </a:endParaRPr>
+          </a:p>
+          <a:p>
+            <a:endParaRPr lang="de-DE" dirty="0"/>
+          </a:p>
+        </p:txBody>
+      </p:sp>
+      <p:sp>
+        <p:nvSpPr>
+          <p:cNvPr id="5" name="Inhaltsplatzhalter 2"/>
+          <p:cNvSpPr txBox="1">
+            <a:spLocks/>
+          </p:cNvSpPr>
+          <p:nvPr/>
+        </p:nvSpPr>
+        <p:spPr>
+          <a:xfrm>
+            <a:off x="179512" y="908720"/>
+            <a:ext cx="8856984" cy="2520280"/>
+          </a:xfrm>
+          <a:prstGeom prst="rect">
+            <a:avLst/>
+          </a:prstGeom>
+        </p:spPr>
+        <p:txBody>
+          <a:bodyPr vert="horz" lIns="91440" tIns="45720" rIns="91440" bIns="45720" rtlCol="0">
+            <a:normAutofit fontScale="77500" lnSpcReduction="20000"/>
+          </a:bodyPr>
+          <a:lstStyle>
+            <a:lvl1pPr marL="342900" indent="-342900" algn="l" defTabSz="914400" rtl="0" eaLnBrk="1" latinLnBrk="0" hangingPunct="1">
+              <a:spcBef>
+                <a:spcPct val="20000"/>
+              </a:spcBef>
+              <a:buFont typeface="Arial" pitchFamily="34" charset="0"/>
+              <a:buChar char="•"/>
+              <a:defRPr sz="3200" kern="1200">
+                <a:solidFill>
+                  <a:schemeClr val="tx1"/>
+                </a:solidFill>
+                <a:latin typeface="+mn-lt"/>
+                <a:ea typeface="+mn-ea"/>
+                <a:cs typeface="+mn-cs"/>
+              </a:defRPr>
+            </a:lvl1pPr>
+            <a:lvl2pPr marL="742950" indent="-285750" algn="l" defTabSz="914400" rtl="0" eaLnBrk="1" latinLnBrk="0" hangingPunct="1">
+              <a:spcBef>
+                <a:spcPct val="20000"/>
+              </a:spcBef>
+              <a:buFont typeface="Arial" pitchFamily="34" charset="0"/>
+              <a:buChar char="–"/>
+              <a:defRPr sz="2800" kern="1200">
+                <a:solidFill>
+                  <a:schemeClr val="tx1"/>
+                </a:solidFill>
+                <a:latin typeface="+mn-lt"/>
+                <a:ea typeface="+mn-ea"/>
+                <a:cs typeface="+mn-cs"/>
+              </a:defRPr>
+            </a:lvl2pPr>
+            <a:lvl3pPr marL="1143000" indent="-228600" algn="l" defTabSz="914400" rtl="0" eaLnBrk="1" latinLnBrk="0" hangingPunct="1">
+              <a:spcBef>
+                <a:spcPct val="20000"/>
+              </a:spcBef>
+              <a:buFont typeface="Arial" pitchFamily="34" charset="0"/>
+              <a:buChar char="•"/>
+              <a:defRPr sz="2400" kern="1200">
+                <a:solidFill>
+                  <a:schemeClr val="tx1"/>
+                </a:solidFill>
+                <a:latin typeface="+mn-lt"/>
+                <a:ea typeface="+mn-ea"/>
+                <a:cs typeface="+mn-cs"/>
+              </a:defRPr>
+            </a:lvl3pPr>
+            <a:lvl4pPr marL="1600200" indent="-228600" algn="l" defTabSz="914400" rtl="0" eaLnBrk="1" latinLnBrk="0" hangingPunct="1">
+              <a:spcBef>
+                <a:spcPct val="20000"/>
+              </a:spcBef>
+              <a:buFont typeface="Arial" pitchFamily="34" charset="0"/>
+              <a:buChar char="–"/>
+              <a:defRPr sz="2000" kern="1200">
+                <a:solidFill>
+                  <a:schemeClr val="tx1"/>
+                </a:solidFill>
+                <a:latin typeface="+mn-lt"/>
+                <a:ea typeface="+mn-ea"/>
+                <a:cs typeface="+mn-cs"/>
+              </a:defRPr>
+            </a:lvl4pPr>
+            <a:lvl5pPr marL="2057400" indent="-228600" algn="l" defTabSz="914400" rtl="0" eaLnBrk="1" latinLnBrk="0" hangingPunct="1">
+              <a:spcBef>
+                <a:spcPct val="20000"/>
+              </a:spcBef>
+              <a:buFont typeface="Arial" pitchFamily="34" charset="0"/>
+              <a:buChar char="»"/>
+              <a:defRPr sz="2000" kern="1200">
+                <a:solidFill>
+                  <a:schemeClr val="tx1"/>
+                </a:solidFill>
+                <a:latin typeface="+mn-lt"/>
+                <a:ea typeface="+mn-ea"/>
+                <a:cs typeface="+mn-cs"/>
+              </a:defRPr>
+            </a:lvl5pPr>
+            <a:lvl6pPr marL="2514600" indent="-228600" algn="l" defTabSz="914400" rtl="0" eaLnBrk="1" latinLnBrk="0" hangingPunct="1">
+              <a:spcBef>
+                <a:spcPct val="20000"/>
+              </a:spcBef>
+              <a:buFont typeface="Arial" pitchFamily="34" charset="0"/>
+              <a:buChar char="•"/>
+              <a:defRPr sz="2000" kern="1200">
+                <a:solidFill>
+                  <a:schemeClr val="tx1"/>
+                </a:solidFill>
+                <a:latin typeface="+mn-lt"/>
+                <a:ea typeface="+mn-ea"/>
+                <a:cs typeface="+mn-cs"/>
+              </a:defRPr>
+            </a:lvl6pPr>
+            <a:lvl7pPr marL="2971800" indent="-228600" algn="l" defTabSz="914400" rtl="0" eaLnBrk="1" latinLnBrk="0" hangingPunct="1">
+              <a:spcBef>
+                <a:spcPct val="20000"/>
+              </a:spcBef>
+              <a:buFont typeface="Arial" pitchFamily="34" charset="0"/>
+              <a:buChar char="•"/>
+              <a:defRPr sz="2000" kern="1200">
+                <a:solidFill>
+                  <a:schemeClr val="tx1"/>
+                </a:solidFill>
+                <a:latin typeface="+mn-lt"/>
+                <a:ea typeface="+mn-ea"/>
+                <a:cs typeface="+mn-cs"/>
+              </a:defRPr>
+            </a:lvl7pPr>
+            <a:lvl8pPr marL="3429000" indent="-228600" algn="l" defTabSz="914400" rtl="0" eaLnBrk="1" latinLnBrk="0" hangingPunct="1">
+              <a:spcBef>
+                <a:spcPct val="20000"/>
+              </a:spcBef>
+              <a:buFont typeface="Arial" pitchFamily="34" charset="0"/>
+              <a:buChar char="•"/>
+              <a:defRPr sz="2000" kern="1200">
+                <a:solidFill>
+                  <a:schemeClr val="tx1"/>
+                </a:solidFill>
+                <a:latin typeface="+mn-lt"/>
+                <a:ea typeface="+mn-ea"/>
+                <a:cs typeface="+mn-cs"/>
+              </a:defRPr>
+            </a:lvl8pPr>
+            <a:lvl9pPr marL="3886200" indent="-228600" algn="l" defTabSz="914400" rtl="0" eaLnBrk="1" latinLnBrk="0" hangingPunct="1">
+              <a:spcBef>
+                <a:spcPct val="20000"/>
+              </a:spcBef>
+              <a:buFont typeface="Arial" pitchFamily="34" charset="0"/>
+              <a:buChar char="•"/>
+              <a:defRPr sz="2000" kern="1200">
+                <a:solidFill>
+                  <a:schemeClr val="tx1"/>
+                </a:solidFill>
+                <a:latin typeface="+mn-lt"/>
+                <a:ea typeface="+mn-ea"/>
+                <a:cs typeface="+mn-cs"/>
+              </a:defRPr>
+            </a:lvl9pPr>
+          </a:lstStyle>
+          <a:p>
+            <a:r>
+              <a:rPr lang="de-DE" dirty="0"/>
+              <a:t>The </a:t>
+            </a:r>
+            <a:r>
+              <a:rPr lang="de-DE" dirty="0" err="1"/>
+              <a:t>PluginId</a:t>
+            </a:r>
+            <a:endParaRPr lang="de-DE" dirty="0"/>
+          </a:p>
+          <a:p>
+            <a:pPr lvl="1"/>
+            <a:r>
+              <a:rPr lang="de-DE" dirty="0" err="1"/>
+              <a:t>Allows</a:t>
+            </a:r>
+            <a:r>
+              <a:rPr lang="de-DE" dirty="0"/>
+              <a:t> </a:t>
+            </a:r>
+            <a:r>
+              <a:rPr lang="de-DE" dirty="0" err="1"/>
+              <a:t>typesafe</a:t>
+            </a:r>
+            <a:r>
+              <a:rPr lang="de-DE" dirty="0"/>
+              <a:t> </a:t>
+            </a:r>
+            <a:r>
+              <a:rPr lang="de-DE" dirty="0" err="1"/>
+              <a:t>cast</a:t>
+            </a:r>
+            <a:r>
+              <a:rPr lang="de-DE" dirty="0"/>
+              <a:t> </a:t>
+            </a:r>
+            <a:r>
+              <a:rPr lang="de-DE" dirty="0" err="1"/>
+              <a:t>to</a:t>
+            </a:r>
+            <a:r>
+              <a:rPr lang="de-DE" dirty="0"/>
+              <a:t> </a:t>
+            </a:r>
+            <a:r>
+              <a:rPr lang="de-DE" dirty="0" err="1"/>
+              <a:t>derived</a:t>
+            </a:r>
+            <a:r>
+              <a:rPr lang="de-DE" dirty="0"/>
+              <a:t> </a:t>
+            </a:r>
+            <a:r>
+              <a:rPr lang="de-DE" dirty="0" err="1"/>
+              <a:t>Plugin</a:t>
+            </a:r>
+            <a:r>
+              <a:rPr lang="de-DE" dirty="0"/>
+              <a:t>&lt;I&gt;</a:t>
+            </a:r>
+          </a:p>
+          <a:p>
+            <a:r>
+              <a:rPr lang="de-DE" dirty="0"/>
+              <a:t>The </a:t>
+            </a:r>
+            <a:r>
+              <a:rPr lang="de-DE" dirty="0" err="1"/>
+              <a:t>Plugin</a:t>
+            </a:r>
+            <a:r>
+              <a:rPr lang="de-DE" dirty="0"/>
+              <a:t>&lt;I&gt;</a:t>
+            </a:r>
+          </a:p>
+          <a:p>
+            <a:pPr lvl="1"/>
+            <a:r>
+              <a:rPr lang="de-DE" dirty="0" err="1"/>
+              <a:t>Is</a:t>
+            </a:r>
+            <a:r>
+              <a:rPr lang="de-DE" dirty="0"/>
+              <a:t> a </a:t>
+            </a:r>
+            <a:r>
+              <a:rPr lang="de-DE" dirty="0" err="1"/>
+              <a:t>factory</a:t>
+            </a:r>
+            <a:r>
+              <a:rPr lang="de-DE" dirty="0"/>
+              <a:t> </a:t>
+            </a:r>
+            <a:r>
+              <a:rPr lang="de-DE" dirty="0" err="1"/>
+              <a:t>interface</a:t>
+            </a:r>
+            <a:r>
+              <a:rPr lang="de-DE" dirty="0"/>
+              <a:t> </a:t>
+            </a:r>
+            <a:r>
+              <a:rPr lang="de-DE" dirty="0" err="1"/>
+              <a:t>to</a:t>
+            </a:r>
+            <a:r>
+              <a:rPr lang="de-DE" dirty="0"/>
+              <a:t> </a:t>
+            </a:r>
+            <a:r>
+              <a:rPr lang="de-DE" dirty="0" err="1"/>
+              <a:t>create</a:t>
+            </a:r>
+            <a:r>
+              <a:rPr lang="de-DE" dirty="0"/>
+              <a:t> </a:t>
+            </a:r>
+            <a:r>
+              <a:rPr lang="de-DE" dirty="0" err="1"/>
+              <a:t>objects</a:t>
+            </a:r>
+            <a:r>
+              <a:rPr lang="de-DE" dirty="0"/>
+              <a:t> </a:t>
+            </a:r>
+            <a:r>
+              <a:rPr lang="de-DE" dirty="0" err="1"/>
+              <a:t>implementing</a:t>
+            </a:r>
+            <a:r>
+              <a:rPr lang="de-DE" dirty="0"/>
+              <a:t> </a:t>
+            </a:r>
+            <a:r>
+              <a:rPr lang="de-DE" dirty="0" smtClean="0"/>
+              <a:t>I</a:t>
+            </a:r>
+          </a:p>
+          <a:p>
+            <a:r>
+              <a:rPr lang="de-DE" dirty="0" smtClean="0"/>
+              <a:t>The </a:t>
+            </a:r>
+            <a:r>
+              <a:rPr lang="de-DE" dirty="0" err="1" smtClean="0"/>
+              <a:t>BasicPlugin</a:t>
+            </a:r>
+            <a:r>
+              <a:rPr lang="de-DE" dirty="0" smtClean="0"/>
+              <a:t>&lt;T, I&gt; </a:t>
+            </a:r>
+          </a:p>
+          <a:p>
+            <a:pPr lvl="1"/>
+            <a:r>
+              <a:rPr lang="de-DE" dirty="0" err="1" smtClean="0"/>
+              <a:t>Is</a:t>
+            </a:r>
+            <a:r>
+              <a:rPr lang="de-DE" dirty="0" smtClean="0"/>
+              <a:t> a </a:t>
+            </a:r>
+            <a:r>
+              <a:rPr lang="de-DE" dirty="0" err="1" smtClean="0"/>
+              <a:t>factory</a:t>
+            </a:r>
+            <a:r>
+              <a:rPr lang="de-DE" dirty="0" smtClean="0"/>
+              <a:t> </a:t>
+            </a:r>
+            <a:r>
+              <a:rPr lang="de-DE" dirty="0" err="1" smtClean="0"/>
+              <a:t>to</a:t>
+            </a:r>
+            <a:r>
+              <a:rPr lang="de-DE" dirty="0" smtClean="0"/>
+              <a:t> </a:t>
+            </a:r>
+            <a:r>
+              <a:rPr lang="de-DE" dirty="0" err="1" smtClean="0"/>
+              <a:t>create</a:t>
+            </a:r>
+            <a:r>
+              <a:rPr lang="de-DE" dirty="0" smtClean="0"/>
+              <a:t> T </a:t>
+            </a:r>
+            <a:r>
+              <a:rPr lang="de-DE" dirty="0" err="1" smtClean="0"/>
+              <a:t>implementing</a:t>
+            </a:r>
+            <a:r>
+              <a:rPr lang="de-DE" dirty="0" smtClean="0"/>
+              <a:t> I</a:t>
+            </a:r>
+          </a:p>
+          <a:p>
+            <a:pPr lvl="1"/>
+            <a:r>
+              <a:rPr lang="de-DE" dirty="0">
+                <a:solidFill>
+                  <a:schemeClr val="accent5">
+                    <a:lumMod val="75000"/>
+                  </a:schemeClr>
+                </a:solidFill>
+              </a:rPr>
+              <a:t>Normal </a:t>
+            </a:r>
+            <a:r>
+              <a:rPr lang="de-DE" dirty="0" err="1">
+                <a:solidFill>
+                  <a:schemeClr val="accent5">
+                    <a:lumMod val="75000"/>
+                  </a:schemeClr>
+                </a:solidFill>
+              </a:rPr>
+              <a:t>Ctor</a:t>
+            </a:r>
+            <a:r>
+              <a:rPr lang="de-DE" dirty="0">
+                <a:solidFill>
+                  <a:schemeClr val="accent5">
+                    <a:lumMod val="75000"/>
+                  </a:schemeClr>
+                </a:solidFill>
+              </a:rPr>
+              <a:t> </a:t>
+            </a:r>
+            <a:r>
+              <a:rPr lang="de-DE" dirty="0" err="1">
+                <a:solidFill>
+                  <a:schemeClr val="accent5">
+                    <a:lumMod val="75000"/>
+                  </a:schemeClr>
+                </a:solidFill>
+              </a:rPr>
+              <a:t>instead</a:t>
+            </a:r>
+            <a:r>
+              <a:rPr lang="de-DE" dirty="0">
+                <a:solidFill>
+                  <a:schemeClr val="accent5">
+                    <a:lumMod val="75000"/>
+                  </a:schemeClr>
+                </a:solidFill>
+              </a:rPr>
+              <a:t> </a:t>
+            </a:r>
+            <a:r>
+              <a:rPr lang="de-DE" dirty="0" err="1">
+                <a:solidFill>
+                  <a:schemeClr val="accent5">
+                    <a:lumMod val="75000"/>
+                  </a:schemeClr>
+                </a:solidFill>
+              </a:rPr>
+              <a:t>of</a:t>
+            </a:r>
+            <a:r>
+              <a:rPr lang="de-DE" dirty="0">
+                <a:solidFill>
+                  <a:schemeClr val="accent5">
+                    <a:lumMod val="75000"/>
+                  </a:schemeClr>
+                </a:solidFill>
+              </a:rPr>
+              <a:t> </a:t>
+            </a:r>
+            <a:r>
+              <a:rPr lang="de-DE" dirty="0" err="1" smtClean="0">
+                <a:solidFill>
+                  <a:schemeClr val="accent5">
+                    <a:lumMod val="75000"/>
+                  </a:schemeClr>
+                </a:solidFill>
+              </a:rPr>
+              <a:t>init</a:t>
+            </a:r>
+            <a:r>
+              <a:rPr lang="de-DE" dirty="0" smtClean="0">
+                <a:solidFill>
+                  <a:schemeClr val="accent5">
+                    <a:lumMod val="75000"/>
+                  </a:schemeClr>
+                </a:solidFill>
+              </a:rPr>
+              <a:t>/</a:t>
+            </a:r>
+            <a:r>
+              <a:rPr lang="de-DE" dirty="0" err="1" smtClean="0">
+                <a:solidFill>
+                  <a:schemeClr val="accent5">
+                    <a:lumMod val="75000"/>
+                  </a:schemeClr>
+                </a:solidFill>
+              </a:rPr>
+              <a:t>fini</a:t>
+            </a:r>
+            <a:endParaRPr lang="de-DE" dirty="0" smtClean="0">
+              <a:solidFill>
+                <a:schemeClr val="accent5">
+                  <a:lumMod val="75000"/>
+                </a:schemeClr>
+              </a:solidFill>
+            </a:endParaRPr>
+          </a:p>
+        </p:txBody>
+      </p:sp>
+    </p:spTree>
+    <p:extLst>
+      <p:ext uri="{BB962C8B-B14F-4D97-AF65-F5344CB8AC3E}">
+        <p14:creationId xmlns:p14="http://schemas.microsoft.com/office/powerpoint/2010/main" val="1674358896"/>
+      </p:ext>
+    </p:extLst>
+  </p:cSld>
+  <p:clrMapOvr>
+    <a:masterClrMapping/>
+  </p:clrMapOvr>
+</p:sld>
+</file>
+
+<file path=ppt/slides/slide13.xml><?xml version="1.0" encoding="utf-8"?>
+<p:sld xmlns:a="http://schemas.openxmlformats.org/drawingml/2006/main" xmlns:r="http://schemas.openxmlformats.org/officeDocument/2006/relationships" xmlns:p="http://schemas.openxmlformats.org/presentationml/2006/main">
+  <p:cSld>
+    <p:spTree>
+      <p:nvGrpSpPr>
+        <p:cNvPr id="1" name=""/>
+        <p:cNvGrpSpPr/>
+        <p:nvPr/>
+      </p:nvGrpSpPr>
+      <p:grpSpPr>
+        <a:xfrm>
+          <a:off x="0" y="0"/>
+          <a:ext cx="0" cy="0"/>
+          <a:chOff x="0" y="0"/>
+          <a:chExt cx="0" cy="0"/>
+        </a:xfrm>
+      </p:grpSpPr>
+      <p:sp>
+        <p:nvSpPr>
+          <p:cNvPr id="2" name="Titel 1"/>
+          <p:cNvSpPr>
+            <a:spLocks noGrp="1"/>
+          </p:cNvSpPr>
+          <p:nvPr>
+            <p:ph type="title"/>
+          </p:nvPr>
+        </p:nvSpPr>
+        <p:spPr>
+          <a:xfrm>
+            <a:off x="457200" y="58614"/>
+            <a:ext cx="8229600" cy="850106"/>
+          </a:xfrm>
+        </p:spPr>
+        <p:txBody>
+          <a:bodyPr/>
+          <a:lstStyle/>
+          <a:p>
+            <a:r>
+              <a:rPr lang="de-DE" dirty="0" err="1"/>
+              <a:t>Example</a:t>
+            </a:r>
+            <a:r>
+              <a:rPr lang="de-DE" dirty="0"/>
+              <a:t>: The </a:t>
+            </a:r>
+            <a:r>
+              <a:rPr lang="de-DE" dirty="0" err="1"/>
+              <a:t>Greeter</a:t>
+            </a:r>
+            <a:r>
+              <a:rPr lang="de-DE" dirty="0"/>
+              <a:t> </a:t>
+            </a:r>
+            <a:r>
+              <a:rPr lang="de-DE" dirty="0" err="1"/>
+              <a:t>Plugin</a:t>
+            </a:r>
+            <a:endParaRPr lang="en-US" dirty="0"/>
+          </a:p>
+        </p:txBody>
+      </p:sp>
+      <p:sp>
+        <p:nvSpPr>
+          <p:cNvPr id="4" name="Inhaltsplatzhalter 2"/>
+          <p:cNvSpPr>
+            <a:spLocks noGrp="1"/>
+          </p:cNvSpPr>
+          <p:nvPr>
+            <p:ph idx="1"/>
+          </p:nvPr>
+        </p:nvSpPr>
+        <p:spPr>
+          <a:xfrm>
             <a:off x="179512" y="4077072"/>
             <a:ext cx="8856984" cy="2736304"/>
           </a:xfrm>
@@ -5622,14 +6428,7 @@
                 <a:latin typeface="Consolas" pitchFamily="49" charset="0"/>
                 <a:cs typeface="Consolas" pitchFamily="49" charset="0"/>
               </a:rPr>
-              <a:t>Greeter</a:t>
-            </a:r>
-            <a:r>
-              <a:rPr lang="en-US" sz="1600" dirty="0" smtClean="0">
-                <a:latin typeface="Consolas" pitchFamily="49" charset="0"/>
-                <a:cs typeface="Consolas" pitchFamily="49" charset="0"/>
-              </a:rPr>
-              <a:t>* </a:t>
+              <a:t>Greeter* </a:t>
             </a:r>
             <a:r>
               <a:rPr lang="en-US" sz="1600" dirty="0">
@@ -6411,7 +7210,7 @@
 </p:sld>
 </file>
 
-<file path=ppt/slides/slide13.xml><?xml version="1.0" encoding="utf-8"?>
+<file path=ppt/slides/slide14.xml><?xml version="1.0" encoding="utf-8"?>
 <p:sld xmlns:a="http://schemas.openxmlformats.org/drawingml/2006/main" xmlns:r="http://schemas.openxmlformats.org/officeDocument/2006/relationships" xmlns:p="http://schemas.openxmlformats.org/presentationml/2006/main">
   <p:cSld>
     <p:spTree>
@@ -6974,14 +7773,7 @@
                 <a:latin typeface="Consolas" pitchFamily="49" charset="0"/>
                 <a:cs typeface="Consolas" pitchFamily="49" charset="0"/>
               </a:rPr>
-              <a:t> </a:t>
-            </a:r>
-            <a:r>
-              <a:rPr lang="de-DE" sz="1600" dirty="0" smtClean="0">
-                <a:latin typeface="Consolas" pitchFamily="49" charset="0"/>
-                <a:cs typeface="Consolas" pitchFamily="49" charset="0"/>
-              </a:rPr>
-              <a:t>= _T(</a:t>
+              <a:t> = _T(</a:t>
             </a:r>
             <a:r>
               <a:rPr lang="de-DE" sz="1600" dirty="0" smtClean="0">
@@ -7471,35 +8263,21 @@
                 <a:latin typeface="Consolas" pitchFamily="49" charset="0"/>
                 <a:cs typeface="Consolas" pitchFamily="49" charset="0"/>
               </a:rPr>
-              <a:t>&gt; </a:t>
+              <a:t>&gt;  </a:t>
+            </a:r>
+            <a:r>
+              <a:rPr lang="de-DE" sz="1600" dirty="0" err="1" smtClean="0">
+                <a:latin typeface="Consolas" pitchFamily="49" charset="0"/>
+                <a:cs typeface="Consolas" pitchFamily="49" charset="0"/>
+              </a:rPr>
+              <a:t>path</a:t>
             </a:r>
             <a:r>
               <a:rPr lang="de-DE" sz="1600" dirty="0" smtClean="0">
                 <a:latin typeface="Consolas" pitchFamily="49" charset="0"/>
                 <a:cs typeface="Consolas" pitchFamily="49" charset="0"/>
               </a:rPr>
-              <a:t> </a:t>
-            </a:r>
-            <a:r>
-              <a:rPr lang="de-DE" sz="1600" dirty="0" err="1" smtClean="0">
-                <a:latin typeface="Consolas" pitchFamily="49" charset="0"/>
-                <a:cs typeface="Consolas" pitchFamily="49" charset="0"/>
-              </a:rPr>
-              <a:t>path</a:t>
-            </a:r>
-            <a:r>
-              <a:rPr lang="de-DE" sz="1600" dirty="0" smtClean="0">
-                <a:latin typeface="Consolas" pitchFamily="49" charset="0"/>
-                <a:cs typeface="Consolas" pitchFamily="49" charset="0"/>
-              </a:rPr>
-              <a:t> </a:t>
-            </a:r>
-            <a:r>
-              <a:rPr lang="de-DE" sz="1600" dirty="0" smtClean="0">
-                <a:latin typeface="Consolas" pitchFamily="49" charset="0"/>
-                <a:cs typeface="Consolas" pitchFamily="49" charset="0"/>
-              </a:rPr>
-              <a:t>= </a:t>
+              <a:t> = </a:t>
             </a:r>
             <a:r>
               <a:rPr lang="de-DE" sz="1600" dirty="0" smtClean="0">
@@ -7594,14 +8372,7 @@
                 <a:latin typeface="Consolas" pitchFamily="49" charset="0"/>
                 <a:cs typeface="Consolas" pitchFamily="49" charset="0"/>
               </a:rPr>
-              <a:t> h </a:t>
-            </a:r>
-            <a:r>
-              <a:rPr lang="en-US" sz="1600" dirty="0" smtClean="0">
-                <a:latin typeface="Consolas" pitchFamily="49" charset="0"/>
-                <a:cs typeface="Consolas" pitchFamily="49" charset="0"/>
-              </a:rPr>
-              <a:t>= </a:t>
+              <a:t> h = </a:t>
             </a:r>
             <a:r>
               <a:rPr lang="en-US" sz="1600" dirty="0" err="1" smtClean="0">
@@ -8663,222 +9434,52 @@
         </p:nvSpPr>
         <p:spPr>
           <a:xfrm>
-            <a:off x="457200" y="58614"/>
-            <a:ext cx="8229600" cy="850106"/>
-          </a:xfrm>
-        </p:spPr>
-        <p:txBody>
-          <a:bodyPr/>
-          <a:lstStyle/>
-          <a:p>
-            <a:r>
-              <a:rPr lang="de-DE" dirty="0" err="1"/>
-              <a:t>W</a:t>
-            </a:r>
-            <a:r>
-              <a:rPr lang="de-DE" dirty="0" err="1" smtClean="0"/>
-              <a:t>hat‘s</a:t>
-            </a:r>
-            <a:r>
-              <a:rPr lang="de-DE" dirty="0" smtClean="0"/>
-              <a:t> </a:t>
-            </a:r>
-            <a:r>
-              <a:rPr lang="de-DE" dirty="0" err="1" smtClean="0"/>
-              <a:t>the</a:t>
-            </a:r>
-            <a:r>
-              <a:rPr lang="de-DE" dirty="0" smtClean="0"/>
-              <a:t> real Problem?</a:t>
-            </a:r>
-            <a:endParaRPr lang="en-US" dirty="0"/>
-          </a:p>
-        </p:txBody>
-      </p:sp>
-      <p:sp>
-        <p:nvSpPr>
-          <p:cNvPr id="17" name="Inhaltsplatzhalter 2"/>
-          <p:cNvSpPr>
-            <a:spLocks noGrp="1"/>
-          </p:cNvSpPr>
-          <p:nvPr>
-            <p:ph idx="1"/>
-          </p:nvPr>
-        </p:nvSpPr>
-        <p:spPr>
-          <a:xfrm>
-            <a:off x="179512" y="1052736"/>
-            <a:ext cx="8856984" cy="5503341"/>
+            <a:off x="395536" y="1714798"/>
+            <a:ext cx="8229600" cy="2362274"/>
           </a:xfrm>
         </p:spPr>
         <p:txBody>
           <a:bodyPr>
-            <a:normAutofit lnSpcReduction="10000"/>
+            <a:normAutofit/>
           </a:bodyPr>
           <a:lstStyle/>
           <a:p>
-            <a:pPr marL="0" indent="0" algn="ctr">
-              <a:buNone/>
-            </a:pPr>
-            <a:r>
-              <a:rPr lang="de-DE" dirty="0" smtClean="0">
-                <a:solidFill>
-                  <a:srgbClr val="C00000"/>
-                </a:solidFill>
-              </a:rPr>
-              <a:t>--- RED </a:t>
-            </a:r>
-            <a:r>
-              <a:rPr lang="de-DE" dirty="0">
-                <a:solidFill>
-                  <a:srgbClr val="C00000"/>
-                </a:solidFill>
-              </a:rPr>
-              <a:t>ALERT --- RED </a:t>
-            </a:r>
-            <a:r>
-              <a:rPr lang="de-DE" dirty="0" smtClean="0">
-                <a:solidFill>
-                  <a:srgbClr val="C00000"/>
-                </a:solidFill>
-              </a:rPr>
-              <a:t>ALERT --- </a:t>
-            </a:r>
-            <a:r>
-              <a:rPr lang="de-DE" dirty="0">
-                <a:solidFill>
-                  <a:srgbClr val="C00000"/>
-                </a:solidFill>
-              </a:rPr>
-              <a:t>RED </a:t>
-            </a:r>
-            <a:r>
-              <a:rPr lang="de-DE" dirty="0" smtClean="0">
-                <a:solidFill>
-                  <a:srgbClr val="C00000"/>
-                </a:solidFill>
-              </a:rPr>
-              <a:t>ALERT ---</a:t>
-            </a:r>
-            <a:endParaRPr lang="de-DE" dirty="0">
-              <a:solidFill>
-                <a:srgbClr val="C00000"/>
-              </a:solidFill>
-            </a:endParaRPr>
-          </a:p>
-          <a:p>
-            <a:pPr marL="0" indent="0">
-              <a:buNone/>
-            </a:pPr>
-            <a:endParaRPr lang="de-DE" dirty="0" smtClean="0"/>
-          </a:p>
-          <a:p>
-            <a:pPr marL="0" indent="0">
-              <a:buNone/>
-            </a:pPr>
-            <a:r>
-              <a:rPr lang="en-US" u="sng" dirty="0"/>
-              <a:t>6.3.2.3:8</a:t>
-            </a:r>
-            <a:r>
-              <a:rPr lang="en-US" dirty="0"/>
-              <a:t> A pointer to a function of one type may be converted to a pointer to a function of another type and back again; the result shall compare equal to the original pointer. If a converted pointer is used to call a function whose type is not compatible with the pointed-to type, the behavior is undefined</a:t>
-            </a:r>
-            <a:r>
-              <a:rPr lang="en-US" dirty="0" smtClean="0"/>
-              <a:t>.</a:t>
-            </a:r>
-          </a:p>
-          <a:p>
-            <a:pPr marL="0" indent="0">
-              <a:buNone/>
-            </a:pPr>
-            <a:endParaRPr lang="de-DE" dirty="0"/>
-          </a:p>
-          <a:p>
-            <a:pPr marL="0" indent="0">
-              <a:buNone/>
-            </a:pPr>
-            <a:r>
-              <a:rPr lang="de-DE" dirty="0" smtClean="0"/>
-              <a:t>NOTE: </a:t>
-            </a:r>
-            <a:r>
-              <a:rPr lang="de-DE" dirty="0" err="1" smtClean="0"/>
-              <a:t>cast</a:t>
-            </a:r>
-            <a:r>
-              <a:rPr lang="de-DE" dirty="0" smtClean="0"/>
-              <a:t> </a:t>
-            </a:r>
-            <a:r>
-              <a:rPr lang="de-DE" dirty="0" err="1" smtClean="0"/>
-              <a:t>from</a:t>
-            </a:r>
-            <a:r>
-              <a:rPr lang="de-DE" dirty="0" smtClean="0"/>
-              <a:t> </a:t>
-            </a:r>
-            <a:r>
-              <a:rPr lang="de-DE" dirty="0" err="1" smtClean="0"/>
-              <a:t>void</a:t>
-            </a:r>
-            <a:r>
-              <a:rPr lang="de-DE" dirty="0" smtClean="0"/>
-              <a:t>* </a:t>
-            </a:r>
-            <a:r>
-              <a:rPr lang="de-DE" dirty="0" err="1" smtClean="0"/>
-              <a:t>to</a:t>
-            </a:r>
-            <a:r>
-              <a:rPr lang="de-DE" dirty="0" smtClean="0"/>
-              <a:t> </a:t>
-            </a:r>
-            <a:r>
-              <a:rPr lang="de-DE" dirty="0" err="1" smtClean="0"/>
-              <a:t>function</a:t>
-            </a:r>
-            <a:r>
-              <a:rPr lang="de-DE" dirty="0" smtClean="0"/>
-              <a:t> </a:t>
-            </a:r>
-            <a:r>
-              <a:rPr lang="de-DE" dirty="0" err="1" smtClean="0"/>
-              <a:t>pointer</a:t>
-            </a:r>
-            <a:r>
-              <a:rPr lang="de-DE" dirty="0" smtClean="0"/>
-              <a:t> </a:t>
-            </a:r>
-            <a:r>
-              <a:rPr lang="de-DE" dirty="0" err="1" smtClean="0"/>
-              <a:t>is</a:t>
-            </a:r>
-            <a:r>
-              <a:rPr lang="de-DE" dirty="0" smtClean="0"/>
-              <a:t> </a:t>
-            </a:r>
-            <a:r>
-              <a:rPr lang="de-DE" dirty="0" err="1" smtClean="0"/>
-              <a:t>undefined</a:t>
-            </a:r>
-            <a:r>
-              <a:rPr lang="de-DE" dirty="0" smtClean="0"/>
-              <a:t> </a:t>
-            </a:r>
-            <a:r>
-              <a:rPr lang="de-DE" dirty="0" err="1" smtClean="0"/>
-              <a:t>behaviour</a:t>
-            </a:r>
-            <a:endParaRPr lang="de-DE" dirty="0"/>
+            <a:r>
+              <a:rPr lang="de-DE" sz="6600" dirty="0" err="1"/>
+              <a:t>W</a:t>
+            </a:r>
+            <a:r>
+              <a:rPr lang="de-DE" sz="6600" dirty="0" err="1" smtClean="0"/>
+              <a:t>hat‘s</a:t>
+            </a:r>
+            <a:r>
+              <a:rPr lang="de-DE" sz="6600" dirty="0" smtClean="0"/>
+              <a:t> </a:t>
+            </a:r>
+            <a:r>
+              <a:rPr lang="de-DE" sz="6600" dirty="0" err="1" smtClean="0"/>
+              <a:t>the</a:t>
+            </a:r>
+            <a:r>
+              <a:rPr lang="de-DE" sz="6600" dirty="0"/>
+              <a:t> </a:t>
+            </a:r>
+            <a:r>
+              <a:rPr lang="de-DE" sz="6600" dirty="0" smtClean="0"/>
+              <a:t>Problem</a:t>
+            </a:r>
+            <a:r>
+              <a:rPr lang="de-DE" sz="6600" dirty="0" smtClean="0"/>
+              <a:t>?</a:t>
+            </a:r>
+            <a:endParaRPr lang="en-US" sz="6600" dirty="0"/>
           </a:p>
         </p:txBody>
       </p:sp>
     </p:spTree>
     <p:extLst>
       <p:ext uri="{BB962C8B-B14F-4D97-AF65-F5344CB8AC3E}">
-        <p14:creationId xmlns:p14="http://schemas.microsoft.com/office/powerpoint/2010/main" val="1290437072"/>
+        <p14:creationId xmlns:p14="http://schemas.microsoft.com/office/powerpoint/2010/main" val="402982609"/>
       </p:ext>
     </p:extLst>
   </p:cSld>
@@ -8943,7 +9544,11 @@
             </a:r>
             <a:r>
               <a:rPr lang="de-DE" dirty="0" smtClean="0"/>
-              <a:t> real Problem?</a:t>
+              <a:t> </a:t>
+            </a:r>
+            <a:r>
+              <a:rPr lang="de-DE" dirty="0" smtClean="0"/>
+              <a:t>Problem?</a:t>
             </a:r>
             <a:endParaRPr lang="en-US" dirty="0"/>
           </a:p>
@@ -8967,25 +9572,107 @@
         </p:spPr>
         <p:txBody>
           <a:bodyPr>
-            <a:normAutofit/>
+            <a:normAutofit lnSpcReduction="10000"/>
           </a:bodyPr>
           <a:lstStyle/>
           <a:p>
-            <a:r>
-              <a:rPr lang="de-DE" dirty="0" smtClean="0"/>
-              <a:t>Name </a:t>
+            <a:pPr marL="0" indent="0" algn="ctr">
+              <a:buNone/>
+            </a:pPr>
+            <a:r>
+              <a:rPr lang="de-DE" dirty="0" smtClean="0">
+                <a:solidFill>
+                  <a:srgbClr val="C00000"/>
+                </a:solidFill>
+              </a:rPr>
+              <a:t>--- RED </a:t>
+            </a:r>
+            <a:r>
+              <a:rPr lang="de-DE" dirty="0">
+                <a:solidFill>
+                  <a:srgbClr val="C00000"/>
+                </a:solidFill>
+              </a:rPr>
+              <a:t>ALERT --- RED </a:t>
+            </a:r>
+            <a:r>
+              <a:rPr lang="de-DE" dirty="0" smtClean="0">
+                <a:solidFill>
+                  <a:srgbClr val="C00000"/>
+                </a:solidFill>
+              </a:rPr>
+              <a:t>ALERT --- </a:t>
+            </a:r>
+            <a:r>
+              <a:rPr lang="de-DE" dirty="0">
+                <a:solidFill>
+                  <a:srgbClr val="C00000"/>
+                </a:solidFill>
+              </a:rPr>
+              <a:t>RED </a:t>
+            </a:r>
+            <a:r>
+              <a:rPr lang="de-DE" dirty="0" smtClean="0">
+                <a:solidFill>
+                  <a:srgbClr val="C00000"/>
+                </a:solidFill>
+              </a:rPr>
+              <a:t>ALERT ---</a:t>
+            </a:r>
+            <a:endParaRPr lang="de-DE" dirty="0">
+              <a:solidFill>
+                <a:srgbClr val="C00000"/>
+              </a:solidFill>
+            </a:endParaRPr>
+          </a:p>
+          <a:p>
+            <a:pPr marL="0" indent="0">
+              <a:buNone/>
+            </a:pPr>
+            <a:endParaRPr lang="de-DE" dirty="0" smtClean="0"/>
+          </a:p>
+          <a:p>
+            <a:pPr marL="0" indent="0">
+              <a:buNone/>
+            </a:pPr>
+            <a:r>
+              <a:rPr lang="en-US" u="sng" dirty="0"/>
+              <a:t>6.3.2.3:8</a:t>
+            </a:r>
+            <a:r>
+              <a:rPr lang="en-US" dirty="0"/>
+              <a:t> A pointer to a function of one type may be converted to a pointer to a function of another type and back again; the result shall compare equal to the original pointer. If a converted pointer is used to call a function whose type is not compatible with the pointed-to type, the behavior is undefined</a:t>
+            </a:r>
+            <a:r>
+              <a:rPr lang="en-US" dirty="0" smtClean="0"/>
+              <a:t>.</a:t>
+            </a:r>
+          </a:p>
+          <a:p>
+            <a:pPr marL="0" indent="0">
+              <a:buNone/>
+            </a:pPr>
+            <a:endParaRPr lang="de-DE" dirty="0"/>
+          </a:p>
+          <a:p>
+            <a:pPr marL="0" indent="0">
+              <a:buNone/>
+            </a:pPr>
+            <a:r>
+              <a:rPr lang="de-DE" dirty="0" smtClean="0"/>
+              <a:t>NOTE: </a:t>
             </a:r>
             <a:r>
               <a:rPr lang="de-DE" dirty="0" err="1" smtClean="0"/>
-              <a:t>mangling</a:t>
-            </a:r>
-            <a:endParaRPr lang="de-DE" dirty="0" smtClean="0"/>
-          </a:p>
-          <a:p>
-            <a:pPr lvl="1"/>
+              <a:t>cast</a:t>
+            </a:r>
+            <a:r>
+              <a:rPr lang="de-DE" dirty="0" smtClean="0"/>
+              <a:t> </a:t>
+            </a:r>
             <a:r>
               <a:rPr lang="de-DE" dirty="0" err="1" smtClean="0"/>
-              <a:t>Use</a:t>
+              <a:t>from</a:t>
             </a:r>
             <a:r>
               <a:rPr lang="de-DE" dirty="0" smtClean="0"/>
@@ -8993,25 +9680,15 @@
             </a:r>
             <a:r>
               <a:rPr lang="de-DE" dirty="0" err="1" smtClean="0"/>
-              <a:t>export</a:t>
-            </a:r>
-            <a:r>
-              <a:rPr lang="de-DE" dirty="0" smtClean="0"/>
-              <a:t> “C“</a:t>
-            </a:r>
-          </a:p>
-          <a:p>
-            <a:pPr lvl="1"/>
-            <a:endParaRPr lang="de-DE" dirty="0"/>
-          </a:p>
-          <a:p>
-            <a:r>
-              <a:rPr lang="de-DE" dirty="0" smtClean="0"/>
-              <a:t>Export </a:t>
+              <a:t>void</a:t>
+            </a:r>
+            <a:r>
+              <a:rPr lang="de-DE" dirty="0" smtClean="0"/>
+              <a:t>* </a:t>
             </a:r>
             <a:r>
               <a:rPr lang="de-DE" dirty="0" err="1" smtClean="0"/>
-              <a:t>resolvable</a:t>
+              <a:t>to</a:t>
             </a:r>
             <a:r>
               <a:rPr lang="de-DE" dirty="0" smtClean="0"/>
@@ -9019,35 +9696,31 @@
             </a:r>
             <a:r>
               <a:rPr lang="de-DE" dirty="0" err="1" smtClean="0"/>
-              <a:t>symbols</a:t>
-            </a:r>
-            <a:endParaRPr lang="de-DE" dirty="0" smtClean="0"/>
-          </a:p>
-          <a:p>
-            <a:pPr lvl="1"/>
-            <a:r>
-              <a:rPr lang="de-DE" dirty="0" smtClean="0"/>
-              <a:t>_</a:t>
+              <a:t>function</a:t>
+            </a:r>
+            <a:r>
+              <a:rPr lang="de-DE" dirty="0" smtClean="0"/>
+              <a:t> </a:t>
             </a:r>
             <a:r>
               <a:rPr lang="de-DE" dirty="0" err="1" smtClean="0"/>
-              <a:t>declspec</a:t>
-            </a:r>
-            <a:r>
-              <a:rPr lang="de-DE" dirty="0" smtClean="0"/>
-              <a:t>(</a:t>
+              <a:t>pointer</a:t>
+            </a:r>
+            <a:r>
+              <a:rPr lang="de-DE" dirty="0" smtClean="0"/>
+              <a:t> </a:t>
             </a:r>
             <a:r>
               <a:rPr lang="de-DE" dirty="0" err="1" smtClean="0"/>
-              <a:t>export</a:t>
-            </a:r>
-            <a:r>
-              <a:rPr lang="de-DE" dirty="0" smtClean="0"/>
-              <a:t>), </a:t>
+              <a:t>is</a:t>
+            </a:r>
+            <a:r>
+              <a:rPr lang="de-DE" dirty="0" smtClean="0"/>
+              <a:t> </a:t>
             </a:r>
             <a:r>
               <a:rPr lang="de-DE" dirty="0" err="1" smtClean="0"/>
-              <a:t>visibility</a:t>
+              <a:t>undefined</a:t>
             </a:r>
             <a:r>
               <a:rPr lang="de-DE" dirty="0" smtClean="0"/>
@@ -9055,117 +9728,7 @@
             </a:r>
             <a:r>
               <a:rPr lang="de-DE" dirty="0" err="1" smtClean="0"/>
-              <a:t>for</a:t>
-            </a:r>
-            <a:r>
-              <a:rPr lang="de-DE" dirty="0" smtClean="0"/>
-              <a:t> </a:t>
-            </a:r>
-            <a:r>
-              <a:rPr lang="de-DE" dirty="0" err="1" smtClean="0"/>
-              <a:t>gcc</a:t>
-            </a:r>
-            <a:r>
-              <a:rPr lang="de-DE" dirty="0" smtClean="0"/>
-              <a:t>, .</a:t>
-            </a:r>
-            <a:r>
-              <a:rPr lang="de-DE" dirty="0" err="1" smtClean="0"/>
-              <a:t>def</a:t>
-            </a:r>
-            <a:r>
-              <a:rPr lang="de-DE" dirty="0" smtClean="0"/>
-              <a:t> </a:t>
-            </a:r>
-            <a:r>
-              <a:rPr lang="de-DE" dirty="0" err="1" smtClean="0"/>
-              <a:t>files</a:t>
-            </a:r>
-            <a:r>
-              <a:rPr lang="de-DE" dirty="0" smtClean="0"/>
-              <a:t> etc…</a:t>
-            </a:r>
-          </a:p>
-          <a:p>
-            <a:pPr lvl="1"/>
-            <a:endParaRPr lang="de-DE" dirty="0"/>
-          </a:p>
-          <a:p>
-            <a:r>
-              <a:rPr lang="de-DE" dirty="0" smtClean="0"/>
-              <a:t>Do not </a:t>
-            </a:r>
-            <a:r>
-              <a:rPr lang="de-DE" dirty="0" err="1" smtClean="0"/>
-              <a:t>rely</a:t>
-            </a:r>
-            <a:r>
-              <a:rPr lang="de-DE" dirty="0" smtClean="0"/>
-              <a:t> on </a:t>
-            </a:r>
-            <a:r>
-              <a:rPr lang="de-DE" dirty="0" err="1" smtClean="0"/>
-              <a:t>platform</a:t>
-            </a:r>
-            <a:r>
-              <a:rPr lang="de-DE" dirty="0" smtClean="0"/>
-              <a:t> </a:t>
-            </a:r>
-            <a:r>
-              <a:rPr lang="de-DE" dirty="0" err="1" smtClean="0"/>
-              <a:t>specific</a:t>
-            </a:r>
-            <a:r>
-              <a:rPr lang="de-DE" dirty="0" smtClean="0"/>
-              <a:t> </a:t>
-            </a:r>
-            <a:r>
-              <a:rPr lang="de-DE" dirty="0" err="1" smtClean="0"/>
-              <a:t>library</a:t>
-            </a:r>
-            <a:r>
-              <a:rPr lang="de-DE" dirty="0" smtClean="0"/>
-              <a:t> </a:t>
-            </a:r>
-            <a:r>
-              <a:rPr lang="de-DE" dirty="0" err="1" smtClean="0"/>
-              <a:t>init</a:t>
-            </a:r>
-            <a:r>
-              <a:rPr lang="de-DE" dirty="0" smtClean="0"/>
-              <a:t>/</a:t>
-            </a:r>
-            <a:r>
-              <a:rPr lang="de-DE" dirty="0" err="1" smtClean="0"/>
-              <a:t>finalisation</a:t>
-            </a:r>
-            <a:endParaRPr lang="de-DE" dirty="0" smtClean="0"/>
-          </a:p>
-          <a:p>
-            <a:pPr lvl="1"/>
-            <a:r>
-              <a:rPr lang="de-DE" dirty="0" err="1" smtClean="0"/>
-              <a:t>No</a:t>
-            </a:r>
-            <a:r>
-              <a:rPr lang="de-DE" dirty="0" smtClean="0"/>
-              <a:t> </a:t>
-            </a:r>
-            <a:r>
-              <a:rPr lang="de-DE" dirty="0" err="1" smtClean="0"/>
-              <a:t>init</a:t>
-            </a:r>
-            <a:r>
-              <a:rPr lang="de-DE" dirty="0" smtClean="0"/>
-              <a:t>()/</a:t>
-            </a:r>
-            <a:r>
-              <a:rPr lang="de-DE" dirty="0" err="1" smtClean="0"/>
-              <a:t>fini</a:t>
-            </a:r>
-            <a:r>
-              <a:rPr lang="de-DE" dirty="0" smtClean="0"/>
-              <a:t>() etc…</a:t>
+              <a:t>behaviour</a:t>
             </a:r>
             <a:endParaRPr lang="de-DE" dirty="0"/>
           </a:p>
@@ -9174,7 +9737,7 @@
     </p:spTree>
     <p:extLst>
       <p:ext uri="{BB962C8B-B14F-4D97-AF65-F5344CB8AC3E}">
-        <p14:creationId xmlns:p14="http://schemas.microsoft.com/office/powerpoint/2010/main" val="804849881"/>
+        <p14:creationId xmlns:p14="http://schemas.microsoft.com/office/powerpoint/2010/main" val="1290437072"/>
       </p:ext>
     </p:extLst>
   </p:cSld>
@@ -9239,7 +9802,11 @@
             </a:r>
             <a:r>
               <a:rPr lang="de-DE" dirty="0" smtClean="0"/>
-              <a:t> real Problem?</a:t>
+              <a:t> </a:t>
+            </a:r>
+            <a:r>
+              <a:rPr lang="de-DE" dirty="0" smtClean="0"/>
+              <a:t>Problem?</a:t>
             </a:r>
             <a:endParaRPr lang="en-US" dirty="0"/>
           </a:p>
@@ -9268,16 +9835,20 @@
           <a:lstStyle/>
           <a:p>
             <a:r>
+              <a:rPr lang="de-DE" dirty="0" smtClean="0"/>
+              <a:t>Name </a:t>
+            </a:r>
+            <a:r>
               <a:rPr lang="de-DE" dirty="0" err="1" smtClean="0"/>
-              <a:t>Platforms</a:t>
-            </a:r>
-            <a:r>
-              <a:rPr lang="de-DE" dirty="0" smtClean="0"/>
-              <a:t> do not </a:t>
-            </a:r>
+              <a:t>mangling</a:t>
+            </a:r>
+            <a:endParaRPr lang="de-DE" dirty="0" smtClean="0"/>
+          </a:p>
+          <a:p>
+            <a:pPr lvl="1"/>
             <a:r>
               <a:rPr lang="de-DE" dirty="0" err="1" smtClean="0"/>
-              <a:t>allow</a:t>
+              <a:t>Use</a:t>
             </a:r>
             <a:r>
               <a:rPr lang="de-DE" dirty="0" smtClean="0"/>
@@ -9285,60 +9856,12 @@
             </a:r>
             <a:r>
               <a:rPr lang="de-DE" dirty="0" err="1" smtClean="0"/>
-              <a:t>to</a:t>
-            </a:r>
-            <a:r>
-              <a:rPr lang="de-DE" dirty="0" smtClean="0"/>
-              <a:t> </a:t>
-            </a:r>
-            <a:r>
-              <a:rPr lang="de-DE" dirty="0" err="1" smtClean="0"/>
-              <a:t>load</a:t>
-            </a:r>
-            <a:r>
-              <a:rPr lang="de-DE" dirty="0" smtClean="0"/>
-              <a:t> </a:t>
-            </a:r>
-            <a:r>
-              <a:rPr lang="de-DE" dirty="0" err="1" smtClean="0"/>
-              <a:t>libraries</a:t>
-            </a:r>
-            <a:r>
-              <a:rPr lang="de-DE" dirty="0" smtClean="0"/>
-              <a:t> </a:t>
-            </a:r>
-            <a:r>
-              <a:rPr lang="de-DE" dirty="0" err="1" smtClean="0"/>
-              <a:t>at</a:t>
-            </a:r>
-            <a:r>
-              <a:rPr lang="de-DE" dirty="0" smtClean="0"/>
-              <a:t> all</a:t>
-            </a:r>
-          </a:p>
-          <a:p>
-            <a:pPr lvl="1"/>
-            <a:r>
-              <a:rPr lang="de-DE" dirty="0" err="1" smtClean="0"/>
-              <a:t>iOS</a:t>
-            </a:r>
-            <a:r>
-              <a:rPr lang="de-DE" dirty="0" smtClean="0"/>
-              <a:t>, </a:t>
-            </a:r>
-            <a:r>
-              <a:rPr lang="de-DE" dirty="0" err="1" smtClean="0"/>
-              <a:t>some</a:t>
-            </a:r>
-            <a:r>
-              <a:rPr lang="de-DE" dirty="0" smtClean="0"/>
-              <a:t> </a:t>
-            </a:r>
-            <a:r>
-              <a:rPr lang="de-DE" dirty="0" err="1" smtClean="0"/>
-              <a:t>linux</a:t>
-            </a:r>
-            <a:endParaRPr lang="de-DE" dirty="0" smtClean="0"/>
+              <a:t>export</a:t>
+            </a:r>
+            <a:r>
+              <a:rPr lang="de-DE" dirty="0" smtClean="0"/>
+              <a:t> “C“</a:t>
+            </a:r>
           </a:p>
           <a:p>
             <a:pPr lvl="1"/>
@@ -9347,11 +9870,11 @@
           <a:p>
             <a:r>
               <a:rPr lang="de-DE" dirty="0" smtClean="0"/>
-              <a:t>Not </a:t>
+              <a:t>Export </a:t>
             </a:r>
             <a:r>
               <a:rPr lang="de-DE" dirty="0" err="1" smtClean="0"/>
-              <a:t>always</a:t>
+              <a:t>resolvable</a:t>
             </a:r>
             <a:r>
               <a:rPr lang="de-DE" dirty="0" smtClean="0"/>
@@ -9359,31 +9882,35 @@
             </a:r>
             <a:r>
               <a:rPr lang="de-DE" dirty="0" err="1" smtClean="0"/>
-              <a:t>possible</a:t>
-            </a:r>
-            <a:r>
-              <a:rPr lang="de-DE" dirty="0" smtClean="0"/>
-              <a:t> </a:t>
+              <a:t>symbols</a:t>
+            </a:r>
+            <a:endParaRPr lang="de-DE" dirty="0" smtClean="0"/>
+          </a:p>
+          <a:p>
+            <a:pPr lvl="1"/>
+            <a:r>
+              <a:rPr lang="de-DE" dirty="0" smtClean="0"/>
+              <a:t>_</a:t>
             </a:r>
             <a:r>
               <a:rPr lang="de-DE" dirty="0" err="1" smtClean="0"/>
-              <a:t>to</a:t>
-            </a:r>
-            <a:r>
-              <a:rPr lang="de-DE" dirty="0" smtClean="0"/>
-              <a:t> </a:t>
+              <a:t>declspec</a:t>
+            </a:r>
+            <a:r>
+              <a:rPr lang="de-DE" dirty="0" smtClean="0"/>
+              <a:t>(</a:t>
             </a:r>
             <a:r>
               <a:rPr lang="de-DE" dirty="0" err="1" smtClean="0"/>
-              <a:t>load</a:t>
-            </a:r>
-            <a:r>
-              <a:rPr lang="de-DE" dirty="0" smtClean="0"/>
-              <a:t> same </a:t>
+              <a:t>export</a:t>
+            </a:r>
+            <a:r>
+              <a:rPr lang="de-DE" dirty="0" smtClean="0"/>
+              <a:t>), </a:t>
             </a:r>
             <a:r>
               <a:rPr lang="de-DE" dirty="0" err="1" smtClean="0"/>
-              <a:t>symbol</a:t>
+              <a:t>visibility</a:t>
             </a:r>
             <a:r>
               <a:rPr lang="de-DE" dirty="0" smtClean="0"/>
@@ -9391,15 +9918,117 @@
             </a:r>
             <a:r>
               <a:rPr lang="de-DE" dirty="0" err="1" smtClean="0"/>
-              <a:t>from</a:t>
-            </a:r>
-            <a:r>
-              <a:rPr lang="de-DE" dirty="0" smtClean="0"/>
-              <a:t> different </a:t>
+              <a:t>for</a:t>
+            </a:r>
+            <a:r>
+              <a:rPr lang="de-DE" dirty="0" smtClean="0"/>
+              <a:t> </a:t>
             </a:r>
             <a:r>
               <a:rPr lang="de-DE" dirty="0" err="1" smtClean="0"/>
-              <a:t>libs</a:t>
+              <a:t>gcc</a:t>
+            </a:r>
+            <a:r>
+              <a:rPr lang="de-DE" dirty="0" smtClean="0"/>
+              <a:t>, .</a:t>
+            </a:r>
+            <a:r>
+              <a:rPr lang="de-DE" dirty="0" err="1" smtClean="0"/>
+              <a:t>def</a:t>
+            </a:r>
+            <a:r>
+              <a:rPr lang="de-DE" dirty="0" smtClean="0"/>
+              <a:t> </a:t>
+            </a:r>
+            <a:r>
+              <a:rPr lang="de-DE" dirty="0" err="1" smtClean="0"/>
+              <a:t>files</a:t>
+            </a:r>
+            <a:r>
+              <a:rPr lang="de-DE" dirty="0" smtClean="0"/>
+              <a:t> etc…</a:t>
+            </a:r>
+          </a:p>
+          <a:p>
+            <a:pPr lvl="1"/>
+            <a:endParaRPr lang="de-DE" dirty="0"/>
+          </a:p>
+          <a:p>
+            <a:r>
+              <a:rPr lang="de-DE" dirty="0" smtClean="0"/>
+              <a:t>Do not </a:t>
+            </a:r>
+            <a:r>
+              <a:rPr lang="de-DE" dirty="0" err="1" smtClean="0"/>
+              <a:t>rely</a:t>
+            </a:r>
+            <a:r>
+              <a:rPr lang="de-DE" dirty="0" smtClean="0"/>
+              <a:t> on </a:t>
+            </a:r>
+            <a:r>
+              <a:rPr lang="de-DE" dirty="0" err="1" smtClean="0"/>
+              <a:t>platform</a:t>
+            </a:r>
+            <a:r>
+              <a:rPr lang="de-DE" dirty="0" smtClean="0"/>
+              <a:t> </a:t>
+            </a:r>
+            <a:r>
+              <a:rPr lang="de-DE" dirty="0" err="1" smtClean="0"/>
+              <a:t>specific</a:t>
+            </a:r>
+            <a:r>
+              <a:rPr lang="de-DE" dirty="0" smtClean="0"/>
+              <a:t> </a:t>
+            </a:r>
+            <a:r>
+              <a:rPr lang="de-DE" dirty="0" err="1" smtClean="0"/>
+              <a:t>library</a:t>
+            </a:r>
+            <a:r>
+              <a:rPr lang="de-DE" dirty="0" smtClean="0"/>
+              <a:t> </a:t>
+            </a:r>
+            <a:r>
+              <a:rPr lang="de-DE" dirty="0" err="1" smtClean="0"/>
+              <a:t>init</a:t>
+            </a:r>
+            <a:r>
+              <a:rPr lang="de-DE" dirty="0" smtClean="0"/>
+              <a:t>/</a:t>
+            </a:r>
+            <a:r>
+              <a:rPr lang="de-DE" dirty="0" err="1" smtClean="0"/>
+              <a:t>finalisation</a:t>
+            </a:r>
+            <a:endParaRPr lang="de-DE" dirty="0" smtClean="0"/>
+          </a:p>
+          <a:p>
+            <a:pPr lvl="1"/>
+            <a:r>
+              <a:rPr lang="de-DE" dirty="0" err="1" smtClean="0"/>
+              <a:t>No</a:t>
+            </a:r>
+            <a:r>
+              <a:rPr lang="de-DE" dirty="0" smtClean="0"/>
+              <a:t> </a:t>
+            </a:r>
+            <a:r>
+              <a:rPr lang="de-DE" dirty="0" err="1" smtClean="0"/>
+              <a:t>init</a:t>
+            </a:r>
+            <a:r>
+              <a:rPr lang="de-DE" dirty="0" smtClean="0"/>
+              <a:t>()/</a:t>
+            </a:r>
+            <a:r>
+              <a:rPr lang="de-DE" dirty="0" err="1" smtClean="0"/>
+              <a:t>fini</a:t>
+            </a:r>
+            <a:r>
+              <a:rPr lang="de-DE" dirty="0" smtClean="0"/>
+              <a:t>() etc…</a:t>
             </a:r>
             <a:endParaRPr lang="de-DE" dirty="0"/>
           </a:p>
@@ -9408,7 +10037,7 @@
     </p:spTree>
     <p:extLst>
       <p:ext uri="{BB962C8B-B14F-4D97-AF65-F5344CB8AC3E}">
-        <p14:creationId xmlns:p14="http://schemas.microsoft.com/office/powerpoint/2010/main" val="3880358084"/>
+        <p14:creationId xmlns:p14="http://schemas.microsoft.com/office/powerpoint/2010/main" val="804849881"/>
       </p:ext>
     </p:extLst>
   </p:cSld>
@@ -9447,8 +10076,56 @@
         </p:nvSpPr>
         <p:spPr>
           <a:xfrm>
-            <a:off x="395536" y="1714798"/>
-            <a:ext cx="8229600" cy="2362274"/>
+            <a:off x="457200" y="58614"/>
+            <a:ext cx="8229600" cy="850106"/>
+          </a:xfrm>
+        </p:spPr>
+        <p:txBody>
+          <a:bodyPr/>
+          <a:lstStyle/>
+          <a:p>
+            <a:r>
+              <a:rPr lang="de-DE" dirty="0" err="1"/>
+              <a:t>W</a:t>
+            </a:r>
+            <a:r>
+              <a:rPr lang="de-DE" dirty="0" err="1" smtClean="0"/>
+              <a:t>hat‘s</a:t>
+            </a:r>
+            <a:r>
+              <a:rPr lang="de-DE" dirty="0" smtClean="0"/>
+              <a:t> </a:t>
+            </a:r>
+            <a:r>
+              <a:rPr lang="de-DE" dirty="0" err="1" smtClean="0"/>
+              <a:t>the</a:t>
+            </a:r>
+            <a:r>
+              <a:rPr lang="de-DE" dirty="0" smtClean="0"/>
+              <a:t> </a:t>
+            </a:r>
+            <a:r>
+              <a:rPr lang="de-DE" dirty="0" smtClean="0"/>
+              <a:t>Problem?</a:t>
+            </a:r>
+            <a:endParaRPr lang="en-US" dirty="0"/>
+          </a:p>
+        </p:txBody>
+      </p:sp>
+      <p:sp>
+        <p:nvSpPr>
+          <p:cNvPr id="17" name="Inhaltsplatzhalter 2"/>
+          <p:cNvSpPr>
+            <a:spLocks noGrp="1"/>
+          </p:cNvSpPr>
+          <p:nvPr>
+            <p:ph idx="1"/>
+          </p:nvPr>
+        </p:nvSpPr>
+        <p:spPr>
+          <a:xfrm>
+            <a:off x="179512" y="1052736"/>
+            <a:ext cx="8856984" cy="5503341"/>
           </a:xfrm>
         </p:spPr>
         <p:txBody>
@@ -9458,37 +10135,147 @@
           <a:lstStyle/>
           <a:p>
             <a:r>
-              <a:rPr lang="de-DE" sz="6600" dirty="0" err="1"/>
-              <a:t>W</a:t>
-            </a:r>
-            <a:r>
-              <a:rPr lang="de-DE" sz="6600" dirty="0" err="1" smtClean="0"/>
-              <a:t>hat‘s</a:t>
-            </a:r>
-            <a:r>
-              <a:rPr lang="de-DE" sz="6600" dirty="0" smtClean="0"/>
-              <a:t> </a:t>
-            </a:r>
-            <a:r>
-              <a:rPr lang="de-DE" sz="6600" dirty="0" err="1" smtClean="0"/>
-              <a:t>the</a:t>
-            </a:r>
-            <a:r>
-              <a:rPr lang="de-DE" sz="6600" dirty="0"/>
-              <a:t> </a:t>
-            </a:r>
-            <a:r>
-              <a:rPr lang="de-DE" sz="6600" dirty="0" smtClean="0"/>
-              <a:t>Solution?</a:t>
-            </a:r>
-            <a:endParaRPr lang="en-US" sz="6600" dirty="0"/>
+              <a:rPr lang="de-DE" dirty="0" err="1" smtClean="0"/>
+              <a:t>Platforms</a:t>
+            </a:r>
+            <a:r>
+              <a:rPr lang="de-DE" dirty="0" smtClean="0"/>
+              <a:t> do not </a:t>
+            </a:r>
+            <a:r>
+              <a:rPr lang="de-DE" dirty="0" err="1" smtClean="0"/>
+              <a:t>allow</a:t>
+            </a:r>
+            <a:r>
+              <a:rPr lang="de-DE" dirty="0" smtClean="0"/>
+              <a:t> </a:t>
+            </a:r>
+            <a:r>
+              <a:rPr lang="de-DE" dirty="0" err="1" smtClean="0"/>
+              <a:t>to</a:t>
+            </a:r>
+            <a:r>
+              <a:rPr lang="de-DE" dirty="0" smtClean="0"/>
+              <a:t> </a:t>
+            </a:r>
+            <a:r>
+              <a:rPr lang="de-DE" dirty="0" err="1" smtClean="0"/>
+              <a:t>load</a:t>
+            </a:r>
+            <a:r>
+              <a:rPr lang="de-DE" dirty="0" smtClean="0"/>
+              <a:t> </a:t>
+            </a:r>
+            <a:r>
+              <a:rPr lang="de-DE" dirty="0" err="1" smtClean="0"/>
+              <a:t>libraries</a:t>
+            </a:r>
+            <a:r>
+              <a:rPr lang="de-DE" dirty="0" smtClean="0"/>
+              <a:t> </a:t>
+            </a:r>
+            <a:r>
+              <a:rPr lang="de-DE" dirty="0" err="1" smtClean="0"/>
+              <a:t>at</a:t>
+            </a:r>
+            <a:r>
+              <a:rPr lang="de-DE" dirty="0" smtClean="0"/>
+              <a:t> all</a:t>
+            </a:r>
+          </a:p>
+          <a:p>
+            <a:pPr lvl="1"/>
+            <a:r>
+              <a:rPr lang="de-DE" dirty="0" err="1" smtClean="0"/>
+              <a:t>iOS</a:t>
+            </a:r>
+            <a:r>
+              <a:rPr lang="de-DE" dirty="0" smtClean="0"/>
+              <a:t>, </a:t>
+            </a:r>
+            <a:r>
+              <a:rPr lang="de-DE" dirty="0" err="1" smtClean="0"/>
+              <a:t>some</a:t>
+            </a:r>
+            <a:r>
+              <a:rPr lang="de-DE" dirty="0" smtClean="0"/>
+              <a:t> </a:t>
+            </a:r>
+            <a:r>
+              <a:rPr lang="de-DE" dirty="0" err="1" smtClean="0"/>
+              <a:t>linux</a:t>
+            </a:r>
+            <a:endParaRPr lang="de-DE" dirty="0" smtClean="0"/>
+          </a:p>
+          <a:p>
+            <a:pPr lvl="1"/>
+            <a:endParaRPr lang="de-DE" dirty="0"/>
+          </a:p>
+          <a:p>
+            <a:r>
+              <a:rPr lang="de-DE" dirty="0" smtClean="0"/>
+              <a:t>Not </a:t>
+            </a:r>
+            <a:r>
+              <a:rPr lang="de-DE" dirty="0" err="1" smtClean="0"/>
+              <a:t>always</a:t>
+            </a:r>
+            <a:r>
+              <a:rPr lang="de-DE" dirty="0" smtClean="0"/>
+              <a:t> </a:t>
+            </a:r>
+            <a:r>
+              <a:rPr lang="de-DE" dirty="0" err="1" smtClean="0"/>
+              <a:t>possible</a:t>
+            </a:r>
+            <a:r>
+              <a:rPr lang="de-DE" dirty="0" smtClean="0"/>
+              <a:t> </a:t>
+            </a:r>
+            <a:r>
+              <a:rPr lang="de-DE" dirty="0" err="1" smtClean="0"/>
+              <a:t>to</a:t>
+            </a:r>
+            <a:r>
+              <a:rPr lang="de-DE" dirty="0" smtClean="0"/>
+              <a:t> </a:t>
+            </a:r>
+            <a:r>
+              <a:rPr lang="de-DE" dirty="0" err="1" smtClean="0"/>
+              <a:t>load</a:t>
+            </a:r>
+            <a:r>
+              <a:rPr lang="de-DE" dirty="0" smtClean="0"/>
+              <a:t> same </a:t>
+            </a:r>
+            <a:r>
+              <a:rPr lang="de-DE" dirty="0" err="1" smtClean="0"/>
+              <a:t>symbol</a:t>
+            </a:r>
+            <a:r>
+              <a:rPr lang="de-DE" dirty="0" smtClean="0"/>
+              <a:t> </a:t>
+            </a:r>
+            <a:r>
+              <a:rPr lang="de-DE" dirty="0" err="1" smtClean="0"/>
+              <a:t>from</a:t>
+            </a:r>
+            <a:r>
+              <a:rPr lang="de-DE" dirty="0" smtClean="0"/>
+              <a:t> different </a:t>
+            </a:r>
+            <a:r>
+              <a:rPr lang="de-DE" dirty="0" err="1" smtClean="0"/>
+              <a:t>libs</a:t>
+            </a:r>
+            <a:endParaRPr lang="de-DE" dirty="0"/>
           </a:p>
         </p:txBody>
       </p:sp>
     </p:spTree>
     <p:extLst>
       <p:ext uri="{BB962C8B-B14F-4D97-AF65-F5344CB8AC3E}">
-        <p14:creationId xmlns:p14="http://schemas.microsoft.com/office/powerpoint/2010/main" val="4144915592"/>
+        <p14:creationId xmlns:p14="http://schemas.microsoft.com/office/powerpoint/2010/main" val="3880358084"/>
       </p:ext>
     </p:extLst>
   </p:cSld>
@@ -9527,52 +10314,8 @@
         </p:nvSpPr>
         <p:spPr>
           <a:xfrm>
-            <a:off x="457200" y="58614"/>
-            <a:ext cx="8229600" cy="850106"/>
-          </a:xfrm>
-        </p:spPr>
-        <p:txBody>
-          <a:bodyPr/>
-          <a:lstStyle/>
-          <a:p>
-            <a:r>
-              <a:rPr lang="de-DE" dirty="0" err="1"/>
-              <a:t>Example</a:t>
-            </a:r>
-            <a:r>
-              <a:rPr lang="de-DE" dirty="0"/>
-              <a:t>: The </a:t>
-            </a:r>
-            <a:r>
-              <a:rPr lang="de-DE" dirty="0" err="1"/>
-              <a:t>Greeter</a:t>
-            </a:r>
-            <a:r>
-              <a:rPr lang="de-DE" dirty="0"/>
-              <a:t> </a:t>
-            </a:r>
-            <a:r>
-              <a:rPr lang="de-DE" dirty="0" err="1"/>
-              <a:t>Plugin</a:t>
-            </a:r>
-            <a:endParaRPr lang="de-DE" dirty="0"/>
-          </a:p>
-        </p:txBody>
-      </p:sp>
-      <p:sp>
-        <p:nvSpPr>
-          <p:cNvPr id="4" name="Inhaltsplatzhalter 2"/>
-          <p:cNvSpPr>
-            <a:spLocks noGrp="1"/>
-          </p:cNvSpPr>
-          <p:nvPr>
-            <p:ph idx="1"/>
-          </p:nvPr>
-        </p:nvSpPr>
-        <p:spPr>
-          <a:xfrm>
-            <a:off x="179512" y="4077072"/>
-            <a:ext cx="8712968" cy="2304256"/>
+            <a:off x="395536" y="1714798"/>
+            <a:ext cx="8229600" cy="2362274"/>
           </a:xfrm>
         </p:spPr>
         <p:txBody>
@@ -9581,744 +10324,38 @@
           </a:bodyPr>
           <a:lstStyle/>
           <a:p>
-            <a:pPr marL="0" indent="0">
-              <a:buNone/>
-            </a:pPr>
-            <a:r>
-              <a:rPr lang="en-US" sz="1600" b="1" dirty="0">
-                <a:latin typeface="Consolas" pitchFamily="49" charset="0"/>
-                <a:cs typeface="Consolas" pitchFamily="49" charset="0"/>
-              </a:rPr>
-              <a:t>class</a:t>
-            </a:r>
-            <a:r>
-              <a:rPr lang="en-US" sz="1600" dirty="0">
-                <a:latin typeface="Consolas" pitchFamily="49" charset="0"/>
-                <a:cs typeface="Consolas" pitchFamily="49" charset="0"/>
-              </a:rPr>
-              <a:t> Greeter </a:t>
-            </a:r>
-            <a:endParaRPr lang="en-US" sz="1600" dirty="0" smtClean="0">
-              <a:latin typeface="Consolas" pitchFamily="49" charset="0"/>
-              <a:cs typeface="Consolas" pitchFamily="49" charset="0"/>
-            </a:endParaRPr>
-          </a:p>
-          <a:p>
-            <a:pPr marL="0" indent="0">
-              <a:buNone/>
-            </a:pPr>
-            <a:r>
-              <a:rPr lang="en-US" sz="1600" dirty="0" smtClean="0">
-                <a:latin typeface="Consolas" pitchFamily="49" charset="0"/>
-                <a:cs typeface="Consolas" pitchFamily="49" charset="0"/>
-              </a:rPr>
-              <a:t>{ </a:t>
-            </a:r>
-          </a:p>
-          <a:p>
-            <a:pPr marL="0" indent="0">
-              <a:buNone/>
-            </a:pPr>
-            <a:r>
-              <a:rPr lang="en-US" sz="1600" b="1" dirty="0" smtClean="0">
-                <a:latin typeface="Consolas" pitchFamily="49" charset="0"/>
-                <a:cs typeface="Consolas" pitchFamily="49" charset="0"/>
-              </a:rPr>
-              <a:t>  public</a:t>
-            </a:r>
-            <a:r>
-              <a:rPr lang="en-US" sz="1600" dirty="0">
-                <a:latin typeface="Consolas" pitchFamily="49" charset="0"/>
-                <a:cs typeface="Consolas" pitchFamily="49" charset="0"/>
-              </a:rPr>
-              <a:t>: </a:t>
-            </a:r>
-            <a:endParaRPr lang="en-US" sz="1600" dirty="0" smtClean="0">
-              <a:latin typeface="Consolas" pitchFamily="49" charset="0"/>
-              <a:cs typeface="Consolas" pitchFamily="49" charset="0"/>
-            </a:endParaRPr>
-          </a:p>
-          <a:p>
-            <a:pPr marL="0" indent="0">
-              <a:buNone/>
-            </a:pPr>
-            <a:r>
-              <a:rPr lang="en-US" sz="1600" dirty="0">
-                <a:latin typeface="Consolas" pitchFamily="49" charset="0"/>
-                <a:cs typeface="Consolas" pitchFamily="49" charset="0"/>
-              </a:rPr>
-              <a:t> </a:t>
-            </a:r>
-            <a:r>
-              <a:rPr lang="en-US" sz="1600" dirty="0" smtClean="0">
-                <a:latin typeface="Consolas" pitchFamily="49" charset="0"/>
-                <a:cs typeface="Consolas" pitchFamily="49" charset="0"/>
-              </a:rPr>
-              <a:t>   </a:t>
-            </a:r>
-            <a:r>
-              <a:rPr lang="en-US" sz="1600" dirty="0" smtClean="0">
-                <a:solidFill>
-                  <a:schemeClr val="tx2">
-                    <a:lumMod val="60000"/>
-                    <a:lumOff val="40000"/>
-                  </a:schemeClr>
-                </a:solidFill>
-                <a:latin typeface="Consolas" pitchFamily="49" charset="0"/>
-                <a:cs typeface="Consolas" pitchFamily="49" charset="0"/>
-              </a:rPr>
-              <a:t>virtual</a:t>
-            </a:r>
-            <a:r>
-              <a:rPr lang="en-US" sz="1600" dirty="0" smtClean="0">
-                <a:latin typeface="Consolas" pitchFamily="49" charset="0"/>
-                <a:cs typeface="Consolas" pitchFamily="49" charset="0"/>
-              </a:rPr>
-              <a:t> </a:t>
-            </a:r>
-            <a:r>
-              <a:rPr lang="en-US" sz="1600" dirty="0">
-                <a:latin typeface="Consolas" pitchFamily="49" charset="0"/>
-                <a:cs typeface="Consolas" pitchFamily="49" charset="0"/>
-              </a:rPr>
-              <a:t>~Greeter() </a:t>
-            </a:r>
-            <a:endParaRPr lang="en-US" sz="1600" dirty="0" smtClean="0">
-              <a:latin typeface="Consolas" pitchFamily="49" charset="0"/>
-              <a:cs typeface="Consolas" pitchFamily="49" charset="0"/>
-            </a:endParaRPr>
-          </a:p>
-          <a:p>
-            <a:pPr marL="0" indent="0">
-              <a:buNone/>
-            </a:pPr>
-            <a:r>
-              <a:rPr lang="en-US" sz="1600" dirty="0">
-                <a:latin typeface="Consolas" pitchFamily="49" charset="0"/>
-                <a:cs typeface="Consolas" pitchFamily="49" charset="0"/>
-              </a:rPr>
-              <a:t> </a:t>
-            </a:r>
-            <a:r>
-              <a:rPr lang="en-US" sz="1600" dirty="0" smtClean="0">
-                <a:latin typeface="Consolas" pitchFamily="49" charset="0"/>
-                <a:cs typeface="Consolas" pitchFamily="49" charset="0"/>
-              </a:rPr>
-              <a:t>   {} </a:t>
-            </a:r>
-            <a:endParaRPr lang="en-US" sz="1600" dirty="0" smtClean="0">
-              <a:latin typeface="Consolas" pitchFamily="49" charset="0"/>
-              <a:cs typeface="Consolas" pitchFamily="49" charset="0"/>
-            </a:endParaRPr>
-          </a:p>
-          <a:p>
-            <a:pPr marL="0" indent="0">
-              <a:buNone/>
-            </a:pPr>
-            <a:endParaRPr lang="en-US" sz="800" dirty="0" smtClean="0">
-              <a:latin typeface="Consolas" pitchFamily="49" charset="0"/>
-              <a:cs typeface="Consolas" pitchFamily="49" charset="0"/>
-            </a:endParaRPr>
-          </a:p>
-          <a:p>
-            <a:pPr marL="0" indent="0">
-              <a:buNone/>
-            </a:pPr>
-            <a:r>
-              <a:rPr lang="en-US" sz="1600" dirty="0">
-                <a:solidFill>
-                  <a:schemeClr val="tx2">
-                    <a:lumMod val="60000"/>
-                    <a:lumOff val="40000"/>
-                  </a:schemeClr>
-                </a:solidFill>
-                <a:latin typeface="Consolas" pitchFamily="49" charset="0"/>
-                <a:cs typeface="Consolas" pitchFamily="49" charset="0"/>
-              </a:rPr>
-              <a:t> </a:t>
-            </a:r>
-            <a:r>
-              <a:rPr lang="en-US" sz="1600" dirty="0" smtClean="0">
-                <a:solidFill>
-                  <a:schemeClr val="tx2">
-                    <a:lumMod val="60000"/>
-                    <a:lumOff val="40000"/>
-                  </a:schemeClr>
-                </a:solidFill>
-                <a:latin typeface="Consolas" pitchFamily="49" charset="0"/>
-                <a:cs typeface="Consolas" pitchFamily="49" charset="0"/>
-              </a:rPr>
-              <a:t>   virtual</a:t>
-            </a:r>
-            <a:r>
-              <a:rPr lang="en-US" sz="1600" dirty="0" smtClean="0">
-                <a:latin typeface="Consolas" pitchFamily="49" charset="0"/>
-                <a:cs typeface="Consolas" pitchFamily="49" charset="0"/>
-              </a:rPr>
-              <a:t> </a:t>
-            </a:r>
-            <a:r>
-              <a:rPr lang="en-US" sz="1600" dirty="0">
-                <a:solidFill>
-                  <a:schemeClr val="tx2">
-                    <a:lumMod val="60000"/>
-                    <a:lumOff val="40000"/>
-                  </a:schemeClr>
-                </a:solidFill>
-                <a:latin typeface="Consolas" pitchFamily="49" charset="0"/>
-                <a:cs typeface="Consolas" pitchFamily="49" charset="0"/>
-              </a:rPr>
-              <a:t>void</a:t>
-            </a:r>
-            <a:r>
-              <a:rPr lang="en-US" sz="1600" dirty="0">
-                <a:latin typeface="Consolas" pitchFamily="49" charset="0"/>
-                <a:cs typeface="Consolas" pitchFamily="49" charset="0"/>
-              </a:rPr>
-              <a:t> </a:t>
-            </a:r>
-            <a:r>
-              <a:rPr lang="en-US" sz="1600" dirty="0" err="1">
-                <a:latin typeface="Consolas" pitchFamily="49" charset="0"/>
-                <a:cs typeface="Consolas" pitchFamily="49" charset="0"/>
-              </a:rPr>
-              <a:t>sayHello</a:t>
-            </a:r>
-            <a:r>
-              <a:rPr lang="en-US" sz="1600" dirty="0" smtClean="0">
-                <a:latin typeface="Consolas" pitchFamily="49" charset="0"/>
-                <a:cs typeface="Consolas" pitchFamily="49" charset="0"/>
-              </a:rPr>
-              <a:t>() </a:t>
-            </a:r>
-            <a:r>
-              <a:rPr lang="en-US" sz="1600" dirty="0">
-                <a:latin typeface="Consolas" pitchFamily="49" charset="0"/>
-                <a:cs typeface="Consolas" pitchFamily="49" charset="0"/>
-              </a:rPr>
-              <a:t>= 0; </a:t>
-            </a:r>
-            <a:endParaRPr lang="en-US" sz="1600" dirty="0" smtClean="0">
-              <a:latin typeface="Consolas" pitchFamily="49" charset="0"/>
-              <a:cs typeface="Consolas" pitchFamily="49" charset="0"/>
-            </a:endParaRPr>
-          </a:p>
-          <a:p>
-            <a:pPr marL="0" indent="0">
-              <a:buNone/>
-            </a:pPr>
-            <a:r>
-              <a:rPr lang="en-US" sz="1600" dirty="0" smtClean="0">
-                <a:latin typeface="Consolas" pitchFamily="49" charset="0"/>
-                <a:cs typeface="Consolas" pitchFamily="49" charset="0"/>
-              </a:rPr>
-              <a:t>};</a:t>
-            </a:r>
-            <a:endParaRPr lang="de-DE" sz="1600" b="1" dirty="0">
-              <a:latin typeface="Consolas" pitchFamily="49" charset="0"/>
-              <a:cs typeface="Consolas" pitchFamily="49" charset="0"/>
-            </a:endParaRPr>
-          </a:p>
-          <a:p>
-            <a:pPr marL="0" indent="0">
-              <a:buNone/>
-            </a:pPr>
-            <a:endParaRPr lang="en-US" sz="1600" dirty="0" smtClean="0">
-              <a:latin typeface="Consolas" pitchFamily="49" charset="0"/>
-              <a:cs typeface="Consolas" pitchFamily="49" charset="0"/>
-            </a:endParaRPr>
-          </a:p>
-          <a:p>
-            <a:pPr marL="0" indent="0">
-              <a:buNone/>
-            </a:pPr>
-            <a:endParaRPr lang="en-US" sz="1600" dirty="0" smtClean="0">
-              <a:latin typeface="Consolas" pitchFamily="49" charset="0"/>
-              <a:cs typeface="Consolas" pitchFamily="49" charset="0"/>
-            </a:endParaRPr>
-          </a:p>
-          <a:p>
-            <a:pPr marL="0" indent="0">
-              <a:buNone/>
-            </a:pPr>
-            <a:endParaRPr lang="en-US" sz="1600" dirty="0">
-              <a:latin typeface="Consolas" pitchFamily="49" charset="0"/>
-              <a:cs typeface="Consolas" pitchFamily="49" charset="0"/>
-            </a:endParaRPr>
-          </a:p>
-          <a:p>
-            <a:pPr marL="457200" lvl="1" indent="0">
-              <a:buNone/>
-            </a:pPr>
-            <a:endParaRPr lang="de-DE" dirty="0">
-              <a:solidFill>
-                <a:schemeClr val="tx2">
-                  <a:lumMod val="75000"/>
-                </a:schemeClr>
-              </a:solidFill>
-            </a:endParaRPr>
-          </a:p>
-          <a:p>
-            <a:endParaRPr lang="de-DE" dirty="0"/>
-          </a:p>
-        </p:txBody>
-      </p:sp>
-      <p:sp>
-        <p:nvSpPr>
-          <p:cNvPr id="5" name="Inhaltsplatzhalter 2"/>
-          <p:cNvSpPr txBox="1">
-            <a:spLocks/>
-          </p:cNvSpPr>
-          <p:nvPr/>
-        </p:nvSpPr>
-        <p:spPr>
-          <a:xfrm>
-            <a:off x="179512" y="989112"/>
-            <a:ext cx="8856984" cy="1935832"/>
-          </a:xfrm>
-          <a:prstGeom prst="rect">
-            <a:avLst/>
-          </a:prstGeom>
-        </p:spPr>
-        <p:txBody>
-          <a:bodyPr vert="horz" lIns="91440" tIns="45720" rIns="91440" bIns="45720" rtlCol="0">
-            <a:normAutofit fontScale="92500" lnSpcReduction="10000"/>
-          </a:bodyPr>
-          <a:lstStyle>
-            <a:lvl1pPr marL="342900" indent="-342900" algn="l" defTabSz="914400" rtl="0" eaLnBrk="1" latinLnBrk="0" hangingPunct="1">
-              <a:spcBef>
-                <a:spcPct val="20000"/>
-              </a:spcBef>
-              <a:buFont typeface="Arial" pitchFamily="34" charset="0"/>
-              <a:buChar char="•"/>
-              <a:defRPr sz="3200" kern="1200">
-                <a:solidFill>
-                  <a:schemeClr val="tx1"/>
-                </a:solidFill>
-                <a:latin typeface="+mn-lt"/>
-                <a:ea typeface="+mn-ea"/>
-                <a:cs typeface="+mn-cs"/>
-              </a:defRPr>
-            </a:lvl1pPr>
-            <a:lvl2pPr marL="742950" indent="-285750" algn="l" defTabSz="914400" rtl="0" eaLnBrk="1" latinLnBrk="0" hangingPunct="1">
-              <a:spcBef>
-                <a:spcPct val="20000"/>
-              </a:spcBef>
-              <a:buFont typeface="Arial" pitchFamily="34" charset="0"/>
-              <a:buChar char="–"/>
-              <a:defRPr sz="2800" kern="1200">
-                <a:solidFill>
-                  <a:schemeClr val="tx1"/>
-                </a:solidFill>
-                <a:latin typeface="+mn-lt"/>
-                <a:ea typeface="+mn-ea"/>
-                <a:cs typeface="+mn-cs"/>
-              </a:defRPr>
-            </a:lvl2pPr>
-            <a:lvl3pPr marL="1143000" indent="-228600" algn="l" defTabSz="914400" rtl="0" eaLnBrk="1" latinLnBrk="0" hangingPunct="1">
-              <a:spcBef>
-                <a:spcPct val="20000"/>
-              </a:spcBef>
-              <a:buFont typeface="Arial" pitchFamily="34" charset="0"/>
-              <a:buChar char="•"/>
-              <a:defRPr sz="2400" kern="1200">
-                <a:solidFill>
-                  <a:schemeClr val="tx1"/>
-                </a:solidFill>
-                <a:latin typeface="+mn-lt"/>
-                <a:ea typeface="+mn-ea"/>
-                <a:cs typeface="+mn-cs"/>
-              </a:defRPr>
-            </a:lvl3pPr>
-            <a:lvl4pPr marL="1600200" indent="-228600" algn="l" defTabSz="914400" rtl="0" eaLnBrk="1" latinLnBrk="0" hangingPunct="1">
-              <a:spcBef>
-                <a:spcPct val="20000"/>
-              </a:spcBef>
-              <a:buFont typeface="Arial" pitchFamily="34" charset="0"/>
-              <a:buChar char="–"/>
-              <a:defRPr sz="2000" kern="1200">
-                <a:solidFill>
-                  <a:schemeClr val="tx1"/>
-                </a:solidFill>
-                <a:latin typeface="+mn-lt"/>
-                <a:ea typeface="+mn-ea"/>
-                <a:cs typeface="+mn-cs"/>
-              </a:defRPr>
-            </a:lvl4pPr>
-            <a:lvl5pPr marL="2057400" indent="-228600" algn="l" defTabSz="914400" rtl="0" eaLnBrk="1" latinLnBrk="0" hangingPunct="1">
-              <a:spcBef>
-                <a:spcPct val="20000"/>
-              </a:spcBef>
-              <a:buFont typeface="Arial" pitchFamily="34" charset="0"/>
-              <a:buChar char="»"/>
-              <a:defRPr sz="2000" kern="1200">
-                <a:solidFill>
-                  <a:schemeClr val="tx1"/>
-                </a:solidFill>
-                <a:latin typeface="+mn-lt"/>
-                <a:ea typeface="+mn-ea"/>
-                <a:cs typeface="+mn-cs"/>
-              </a:defRPr>
-            </a:lvl5pPr>
-            <a:lvl6pPr marL="2514600" indent="-228600" algn="l" defTabSz="914400" rtl="0" eaLnBrk="1" latinLnBrk="0" hangingPunct="1">
-              <a:spcBef>
-                <a:spcPct val="20000"/>
-              </a:spcBef>
-              <a:buFont typeface="Arial" pitchFamily="34" charset="0"/>
-              <a:buChar char="•"/>
-              <a:defRPr sz="2000" kern="1200">
-                <a:solidFill>
-                  <a:schemeClr val="tx1"/>
-                </a:solidFill>
-                <a:latin typeface="+mn-lt"/>
-                <a:ea typeface="+mn-ea"/>
-                <a:cs typeface="+mn-cs"/>
-              </a:defRPr>
-            </a:lvl6pPr>
-            <a:lvl7pPr marL="2971800" indent="-228600" algn="l" defTabSz="914400" rtl="0" eaLnBrk="1" latinLnBrk="0" hangingPunct="1">
-              <a:spcBef>
-                <a:spcPct val="20000"/>
-              </a:spcBef>
-              <a:buFont typeface="Arial" pitchFamily="34" charset="0"/>
-              <a:buChar char="•"/>
-              <a:defRPr sz="2000" kern="1200">
-                <a:solidFill>
-                  <a:schemeClr val="tx1"/>
-                </a:solidFill>
-                <a:latin typeface="+mn-lt"/>
-                <a:ea typeface="+mn-ea"/>
-                <a:cs typeface="+mn-cs"/>
-              </a:defRPr>
-            </a:lvl7pPr>
-            <a:lvl8pPr marL="3429000" indent="-228600" algn="l" defTabSz="914400" rtl="0" eaLnBrk="1" latinLnBrk="0" hangingPunct="1">
-              <a:spcBef>
-                <a:spcPct val="20000"/>
-              </a:spcBef>
-              <a:buFont typeface="Arial" pitchFamily="34" charset="0"/>
-              <a:buChar char="•"/>
-              <a:defRPr sz="2000" kern="1200">
-                <a:solidFill>
-                  <a:schemeClr val="tx1"/>
-                </a:solidFill>
-                <a:latin typeface="+mn-lt"/>
-                <a:ea typeface="+mn-ea"/>
-                <a:cs typeface="+mn-cs"/>
-              </a:defRPr>
-            </a:lvl8pPr>
-            <a:lvl9pPr marL="3886200" indent="-228600" algn="l" defTabSz="914400" rtl="0" eaLnBrk="1" latinLnBrk="0" hangingPunct="1">
-              <a:spcBef>
-                <a:spcPct val="20000"/>
-              </a:spcBef>
-              <a:buFont typeface="Arial" pitchFamily="34" charset="0"/>
-              <a:buChar char="•"/>
-              <a:defRPr sz="2000" kern="1200">
-                <a:solidFill>
-                  <a:schemeClr val="tx1"/>
-                </a:solidFill>
-                <a:latin typeface="+mn-lt"/>
-                <a:ea typeface="+mn-ea"/>
-                <a:cs typeface="+mn-cs"/>
-              </a:defRPr>
-            </a:lvl9pPr>
-          </a:lstStyle>
-          <a:p>
-            <a:r>
-              <a:rPr lang="de-DE" dirty="0" smtClean="0"/>
-              <a:t>The </a:t>
-            </a:r>
-            <a:r>
-              <a:rPr lang="de-DE" dirty="0" err="1" smtClean="0"/>
-              <a:t>Greeter</a:t>
-            </a:r>
-            <a:r>
-              <a:rPr lang="de-DE" dirty="0" smtClean="0"/>
-              <a:t> </a:t>
-            </a:r>
-            <a:r>
-              <a:rPr lang="de-DE" dirty="0" err="1" smtClean="0"/>
-              <a:t>Plugin</a:t>
-            </a:r>
-            <a:r>
-              <a:rPr lang="de-DE" dirty="0" smtClean="0"/>
-              <a:t> Interface</a:t>
-            </a:r>
-          </a:p>
-          <a:p>
-            <a:pPr lvl="1"/>
-            <a:r>
-              <a:rPr lang="de-DE" dirty="0" smtClean="0"/>
-              <a:t>Classic OO design </a:t>
-            </a:r>
-            <a:r>
-              <a:rPr lang="de-DE" dirty="0" err="1" smtClean="0"/>
-              <a:t>using</a:t>
-            </a:r>
-            <a:r>
-              <a:rPr lang="de-DE" dirty="0" smtClean="0"/>
-              <a:t> </a:t>
-            </a:r>
-            <a:r>
-              <a:rPr lang="de-DE" dirty="0" err="1" smtClean="0"/>
-              <a:t>virtual</a:t>
-            </a:r>
-            <a:r>
-              <a:rPr lang="de-DE" dirty="0" smtClean="0"/>
-              <a:t> </a:t>
-            </a:r>
-            <a:r>
-              <a:rPr lang="de-DE" dirty="0" err="1" smtClean="0"/>
-              <a:t>base</a:t>
-            </a:r>
-            <a:r>
-              <a:rPr lang="de-DE" dirty="0" smtClean="0"/>
-              <a:t> </a:t>
-            </a:r>
-            <a:r>
-              <a:rPr lang="de-DE" dirty="0" err="1" smtClean="0"/>
-              <a:t>classes</a:t>
-            </a:r>
-            <a:endParaRPr lang="de-DE" dirty="0" smtClean="0"/>
-          </a:p>
-          <a:p>
-            <a:pPr lvl="1"/>
-            <a:r>
-              <a:rPr lang="de-DE" dirty="0" err="1" smtClean="0"/>
-              <a:t>Plugin</a:t>
-            </a:r>
-            <a:r>
-              <a:rPr lang="de-DE" dirty="0" smtClean="0"/>
-              <a:t> Interface </a:t>
-            </a:r>
-            <a:r>
-              <a:rPr lang="de-DE" dirty="0" err="1" smtClean="0"/>
-              <a:t>defined</a:t>
-            </a:r>
-            <a:r>
-              <a:rPr lang="de-DE" dirty="0" smtClean="0"/>
-              <a:t> in </a:t>
-            </a:r>
-            <a:r>
-              <a:rPr lang="de-DE" dirty="0" err="1" smtClean="0"/>
-              <a:t>header</a:t>
-            </a:r>
-            <a:endParaRPr lang="de-DE" dirty="0" smtClean="0"/>
-          </a:p>
-          <a:p>
-            <a:pPr lvl="1"/>
-            <a:r>
-              <a:rPr lang="de-DE" dirty="0" err="1" smtClean="0"/>
-              <a:t>Plugins</a:t>
-            </a:r>
-            <a:r>
-              <a:rPr lang="de-DE" dirty="0" smtClean="0"/>
-              <a:t> </a:t>
-            </a:r>
-            <a:r>
-              <a:rPr lang="de-DE" dirty="0" err="1" smtClean="0"/>
-              <a:t>implement</a:t>
-            </a:r>
-            <a:r>
-              <a:rPr lang="de-DE" dirty="0" smtClean="0"/>
-              <a:t> </a:t>
-            </a:r>
-            <a:r>
-              <a:rPr lang="de-DE" dirty="0" err="1" smtClean="0"/>
-              <a:t>this</a:t>
-            </a:r>
-            <a:r>
-              <a:rPr lang="de-DE" dirty="0" smtClean="0"/>
-              <a:t> </a:t>
-            </a:r>
-            <a:r>
-              <a:rPr lang="de-DE" dirty="0" err="1" smtClean="0"/>
-              <a:t>interface</a:t>
-            </a:r>
-            <a:endParaRPr lang="de-DE" dirty="0" smtClean="0"/>
-          </a:p>
-          <a:p>
-            <a:pPr lvl="1"/>
-            <a:endParaRPr lang="de-DE" dirty="0" smtClean="0"/>
-          </a:p>
-          <a:p>
-            <a:pPr lvl="1"/>
-            <a:endParaRPr lang="de-DE" dirty="0"/>
-          </a:p>
-        </p:txBody>
-      </p:sp>
-      <p:sp>
-        <p:nvSpPr>
-          <p:cNvPr id="8" name="Inhaltsplatzhalter 2"/>
-          <p:cNvSpPr txBox="1">
-            <a:spLocks/>
-          </p:cNvSpPr>
-          <p:nvPr/>
-        </p:nvSpPr>
-        <p:spPr>
-          <a:xfrm>
-            <a:off x="179512" y="3501008"/>
-            <a:ext cx="8856984" cy="432048"/>
-          </a:xfrm>
-          <a:prstGeom prst="rect">
-            <a:avLst/>
-          </a:prstGeom>
-        </p:spPr>
-        <p:txBody>
-          <a:bodyPr vert="horz" lIns="91440" tIns="45720" rIns="91440" bIns="45720" rtlCol="0">
-            <a:normAutofit/>
-          </a:bodyPr>
-          <a:lstStyle>
-            <a:lvl1pPr marL="342900" indent="-342900" algn="l" defTabSz="914400" rtl="0" eaLnBrk="1" latinLnBrk="0" hangingPunct="1">
-              <a:spcBef>
-                <a:spcPct val="20000"/>
-              </a:spcBef>
-              <a:buFont typeface="Arial" pitchFamily="34" charset="0"/>
-              <a:buChar char="•"/>
-              <a:defRPr sz="3200" kern="1200">
-                <a:solidFill>
-                  <a:schemeClr val="tx1"/>
-                </a:solidFill>
-                <a:latin typeface="+mn-lt"/>
-                <a:ea typeface="+mn-ea"/>
-                <a:cs typeface="+mn-cs"/>
-              </a:defRPr>
-            </a:lvl1pPr>
-            <a:lvl2pPr marL="742950" indent="-285750" algn="l" defTabSz="914400" rtl="0" eaLnBrk="1" latinLnBrk="0" hangingPunct="1">
-              <a:spcBef>
-                <a:spcPct val="20000"/>
-              </a:spcBef>
-              <a:buFont typeface="Arial" pitchFamily="34" charset="0"/>
-              <a:buChar char="–"/>
-              <a:defRPr sz="2800" kern="1200">
-                <a:solidFill>
-                  <a:schemeClr val="tx1"/>
-                </a:solidFill>
-                <a:latin typeface="+mn-lt"/>
-                <a:ea typeface="+mn-ea"/>
-                <a:cs typeface="+mn-cs"/>
-              </a:defRPr>
-            </a:lvl2pPr>
-            <a:lvl3pPr marL="1143000" indent="-228600" algn="l" defTabSz="914400" rtl="0" eaLnBrk="1" latinLnBrk="0" hangingPunct="1">
-              <a:spcBef>
-                <a:spcPct val="20000"/>
-              </a:spcBef>
-              <a:buFont typeface="Arial" pitchFamily="34" charset="0"/>
-              <a:buChar char="•"/>
-              <a:defRPr sz="2400" kern="1200">
-                <a:solidFill>
-                  <a:schemeClr val="tx1"/>
-                </a:solidFill>
-                <a:latin typeface="+mn-lt"/>
-                <a:ea typeface="+mn-ea"/>
-                <a:cs typeface="+mn-cs"/>
-              </a:defRPr>
-            </a:lvl3pPr>
-            <a:lvl4pPr marL="1600200" indent="-228600" algn="l" defTabSz="914400" rtl="0" eaLnBrk="1" latinLnBrk="0" hangingPunct="1">
-              <a:spcBef>
-                <a:spcPct val="20000"/>
-              </a:spcBef>
-              <a:buFont typeface="Arial" pitchFamily="34" charset="0"/>
-              <a:buChar char="–"/>
-              <a:defRPr sz="2000" kern="1200">
-                <a:solidFill>
-                  <a:schemeClr val="tx1"/>
-                </a:solidFill>
-                <a:latin typeface="+mn-lt"/>
-                <a:ea typeface="+mn-ea"/>
-                <a:cs typeface="+mn-cs"/>
-              </a:defRPr>
-            </a:lvl4pPr>
-            <a:lvl5pPr marL="2057400" indent="-228600" algn="l" defTabSz="914400" rtl="0" eaLnBrk="1" latinLnBrk="0" hangingPunct="1">
-              <a:spcBef>
-                <a:spcPct val="20000"/>
-              </a:spcBef>
-              <a:buFont typeface="Arial" pitchFamily="34" charset="0"/>
-              <a:buChar char="»"/>
-              <a:defRPr sz="2000" kern="1200">
-                <a:solidFill>
-                  <a:schemeClr val="tx1"/>
-                </a:solidFill>
-                <a:latin typeface="+mn-lt"/>
-                <a:ea typeface="+mn-ea"/>
-                <a:cs typeface="+mn-cs"/>
-              </a:defRPr>
-            </a:lvl5pPr>
-            <a:lvl6pPr marL="2514600" indent="-228600" algn="l" defTabSz="914400" rtl="0" eaLnBrk="1" latinLnBrk="0" hangingPunct="1">
-              <a:spcBef>
-                <a:spcPct val="20000"/>
-              </a:spcBef>
-              <a:buFont typeface="Arial" pitchFamily="34" charset="0"/>
-              <a:buChar char="•"/>
-              <a:defRPr sz="2000" kern="1200">
-                <a:solidFill>
-                  <a:schemeClr val="tx1"/>
-                </a:solidFill>
-                <a:latin typeface="+mn-lt"/>
-                <a:ea typeface="+mn-ea"/>
-                <a:cs typeface="+mn-cs"/>
-              </a:defRPr>
-            </a:lvl6pPr>
-            <a:lvl7pPr marL="2971800" indent="-228600" algn="l" defTabSz="914400" rtl="0" eaLnBrk="1" latinLnBrk="0" hangingPunct="1">
-              <a:spcBef>
-                <a:spcPct val="20000"/>
-              </a:spcBef>
-              <a:buFont typeface="Arial" pitchFamily="34" charset="0"/>
-              <a:buChar char="•"/>
-              <a:defRPr sz="2000" kern="1200">
-                <a:solidFill>
-                  <a:schemeClr val="tx1"/>
-                </a:solidFill>
-                <a:latin typeface="+mn-lt"/>
-                <a:ea typeface="+mn-ea"/>
-                <a:cs typeface="+mn-cs"/>
-              </a:defRPr>
-            </a:lvl7pPr>
-            <a:lvl8pPr marL="3429000" indent="-228600" algn="l" defTabSz="914400" rtl="0" eaLnBrk="1" latinLnBrk="0" hangingPunct="1">
-              <a:spcBef>
-                <a:spcPct val="20000"/>
-              </a:spcBef>
-              <a:buFont typeface="Arial" pitchFamily="34" charset="0"/>
-              <a:buChar char="•"/>
-              <a:defRPr sz="2000" kern="1200">
-                <a:solidFill>
-                  <a:schemeClr val="tx1"/>
-                </a:solidFill>
-                <a:latin typeface="+mn-lt"/>
-                <a:ea typeface="+mn-ea"/>
-                <a:cs typeface="+mn-cs"/>
-              </a:defRPr>
-            </a:lvl8pPr>
-            <a:lvl9pPr marL="3886200" indent="-228600" algn="l" defTabSz="914400" rtl="0" eaLnBrk="1" latinLnBrk="0" hangingPunct="1">
-              <a:spcBef>
-                <a:spcPct val="20000"/>
-              </a:spcBef>
-              <a:buFont typeface="Arial" pitchFamily="34" charset="0"/>
-              <a:buChar char="•"/>
-              <a:defRPr sz="2000" kern="1200">
-                <a:solidFill>
-                  <a:schemeClr val="tx1"/>
-                </a:solidFill>
-                <a:latin typeface="+mn-lt"/>
-                <a:ea typeface="+mn-ea"/>
-                <a:cs typeface="+mn-cs"/>
-              </a:defRPr>
-            </a:lvl9pPr>
-          </a:lstStyle>
-          <a:p>
-            <a:pPr marL="0" indent="0">
-              <a:buNone/>
-            </a:pPr>
-            <a:r>
-              <a:rPr lang="de-DE" sz="2000" u="sng" dirty="0" err="1" smtClean="0"/>
-              <a:t>Greeter.h</a:t>
-            </a:r>
-            <a:endParaRPr lang="de-DE" sz="2000" u="sng" dirty="0"/>
+            <a:r>
+              <a:rPr lang="de-DE" sz="6600" dirty="0" err="1"/>
+              <a:t>W</a:t>
+            </a:r>
+            <a:r>
+              <a:rPr lang="de-DE" sz="6600" dirty="0" err="1" smtClean="0"/>
+              <a:t>hat‘s</a:t>
+            </a:r>
+            <a:r>
+              <a:rPr lang="de-DE" sz="6600" dirty="0" smtClean="0"/>
+              <a:t> </a:t>
+            </a:r>
+            <a:r>
+              <a:rPr lang="de-DE" sz="6600" dirty="0" err="1" smtClean="0"/>
+              <a:t>the</a:t>
+            </a:r>
+            <a:r>
+              <a:rPr lang="de-DE" sz="6600" dirty="0"/>
+              <a:t> </a:t>
+            </a:r>
+            <a:r>
+              <a:rPr lang="de-DE" sz="6600" dirty="0" smtClean="0"/>
+              <a:t>Solution?</a:t>
+            </a:r>
+            <a:endParaRPr lang="en-US" sz="6600" dirty="0"/>
           </a:p>
         </p:txBody>
       </p:sp>
     </p:spTree>
     <p:extLst>
       <p:ext uri="{BB962C8B-B14F-4D97-AF65-F5344CB8AC3E}">
-        <p14:creationId xmlns:p14="http://schemas.microsoft.com/office/powerpoint/2010/main" val="2536750366"/>
+        <p14:creationId xmlns:p14="http://schemas.microsoft.com/office/powerpoint/2010/main" val="4144915592"/>
       </p:ext>
     </p:extLst>
   </p:cSld>
